--- a/Ajax to HTMX.pptx
+++ b/Ajax to HTMX.pptx
@@ -34,6 +34,7 @@
     <p:sldId id="279" r:id="rId29"/>
     <p:sldId id="280" r:id="rId30"/>
     <p:sldId id="281" r:id="rId31"/>
+    <p:sldId id="302" r:id="rId52"/>
     <p:sldId id="282" r:id="rId32"/>
     <p:sldId id="283" r:id="rId33"/>
     <p:sldId id="284" r:id="rId34"/>
@@ -43,6 +44,17 @@
     <p:sldId id="288" r:id="rId38"/>
     <p:sldId id="289" r:id="rId39"/>
     <p:sldId id="290" r:id="rId40"/>
+    <p:sldId id="291" r:id="rId41"/>
+    <p:sldId id="292" r:id="rId42"/>
+    <p:sldId id="293" r:id="rId43"/>
+    <p:sldId id="294" r:id="rId44"/>
+    <p:sldId id="295" r:id="rId45"/>
+    <p:sldId id="296" r:id="rId46"/>
+    <p:sldId id="297" r:id="rId47"/>
+    <p:sldId id="298" r:id="rId48"/>
+    <p:sldId id="299" r:id="rId49"/>
+    <p:sldId id="300" r:id="rId50"/>
+    <p:sldId id="301" r:id="rId51"/>
   </p:sldIdLst>
   <p:sldSz cy="6858000" cx="12192000"/>
   <p:notesSz cx="6858000" cy="9144000"/>
@@ -938,20 +950,9 @@
           </a:bodyPr>
           <a:lstStyle/>
           <a:p>
-            <a:pPr indent="0" lvl="0" marL="0" rtl="0" algn="l">
-              <a:spcBef>
-                <a:spcPts val="0"/>
-              </a:spcBef>
-              <a:spcAft>
-                <a:spcPts val="0"/>
-              </a:spcAft>
-              <a:buNone/>
-            </a:pPr>
-            <a:r>
-              <a:rPr lang="en-US"/>
-              <a:t>Walk through the diagram: user triggers the #ajax event, browser sends an XHR to the callback, server builds an AjaxResponse with commands, browser interprets and updates the DOM.</a:t>
-            </a:r>
-            <a:endParaRPr/>
+            <a:r>
+              <a:t>Walk through the diagram: user triggers the #ajax event, browser sends an XHR to the callback, server builds an AjaxResponse with commands, drupal.ajax runs each command, the DOM updates and behaviors re-attach.</a:t>
+            </a:r>
           </a:p>
         </p:txBody>
       </p:sp>
@@ -1240,20 +1241,9 @@
           </a:bodyPr>
           <a:lstStyle/>
           <a:p>
-            <a:pPr indent="0" lvl="0" marL="0" rtl="0" algn="l">
-              <a:spcBef>
-                <a:spcPts val="0"/>
-              </a:spcBef>
-              <a:spcAft>
-                <a:spcPts val="0"/>
-              </a:spcAft>
-              <a:buNone/>
-            </a:pPr>
-            <a:r>
-              <a:rPr lang="en-US"/>
-              <a:t>One string, defined in two files, in two languages, with no compiler or linter checking they agree. Get it wrong, and nothing throws an error - it just silently doesn't work.</a:t>
-            </a:r>
-            <a:endParaRPr/>
+            <a:r>
+              <a:t>One string, defined in two files - the PHP form and a Twig template - in two languages, with no compiler or linter checking they agree. Get it wrong, and nothing throws an error - it just silently doesn't work.</a:t>
+            </a:r>
           </a:p>
         </p:txBody>
       </p:sp>
@@ -1542,20 +1532,9 @@
           </a:bodyPr>
           <a:lstStyle/>
           <a:p>
-            <a:pPr indent="0" lvl="0" marL="0" rtl="0" algn="l">
-              <a:spcBef>
-                <a:spcPts val="0"/>
-              </a:spcBef>
-              <a:spcAft>
-                <a:spcPts val="0"/>
-              </a:spcAft>
-              <a:buNone/>
-            </a:pPr>
-            <a:r>
-              <a:rPr lang="en-US"/>
-              <a:t>I once spent 40 minutes in devtools debugging an Ajax response that updated one region but silently failed on another. The bug wasn't in the PHP, and it wasn't in the JS logic - it was a mismatched wrapper ID, one string, defined in a .js file three directories away from the PHP that built the response. Nothing threw an error. It just... didn't work. This is exactly the bug the earlier diagram illustrates.</a:t>
-            </a:r>
-            <a:endParaRPr/>
+            <a:r>
+              <a:t>I once spent 40 minutes in devtools debugging an Ajax response that updated one region but silently failed on another. The bug wasn't in the PHP, and it wasn't in the JS logic - it was a mismatched wrapper ID, one string, defined in a template three directories away from the PHP that built the response. Nothing threw an error. It just... didn't work. This is exactly the bug the earlier diagram illustrates.</a:t>
+            </a:r>
           </a:p>
         </p:txBody>
       </p:sp>
@@ -1693,20 +1672,9 @@
           </a:bodyPr>
           <a:lstStyle/>
           <a:p>
-            <a:pPr indent="0" lvl="0" marL="0" rtl="0" algn="l">
-              <a:spcBef>
-                <a:spcPts val="0"/>
-              </a:spcBef>
-              <a:spcAft>
-                <a:spcPts val="0"/>
-              </a:spcAft>
-              <a:buNone/>
-            </a:pPr>
-            <a:r>
-              <a:rPr lang="en-US"/>
-              <a:t>So what if, instead of a PHP command and a matching JS behavior for every interaction, the element itself could just describe what it needs - when this changes, fetch this URL, and drop the result here? No command classes, no wrapper-ID matching, no second file to go find. What would that even look like? (pause, slide transition - next section opens with the reveal: That's not a hypothetical. It's called HTMX...)</a:t>
-            </a:r>
-            <a:endParaRPr/>
+            <a:r>
+              <a:t>So what if, instead of a callback, a command class and a wrapper ID to keep in sync for every interaction, the element itself could just describe what it needs - when this changes, fetch this URL, and drop the result here? No command classes, no wrapper-ID matching, no second file to go find. What would that even look like? (pause, slide transition - next section opens with the reveal: That's not a hypothetical. It's called HTMX...)</a:t>
+            </a:r>
           </a:p>
         </p:txBody>
       </p:sp>
@@ -3354,20 +3322,9 @@
           </a:bodyPr>
           <a:lstStyle/>
           <a:p>
-            <a:pPr indent="0" lvl="0" marL="0" rtl="0" algn="l">
-              <a:spcBef>
-                <a:spcPts val="0"/>
-              </a:spcBef>
-              <a:spcAft>
-                <a:spcPts val="0"/>
-              </a:spcAft>
-              <a:buNone/>
-            </a:pPr>
-            <a:r>
-              <a:rPr lang="en-US"/>
-              <a:t>An hx-get URL isn't a special Ajax callback - it's a normal Drupal route. No #ajax property, no form-building context required.</a:t>
-            </a:r>
-            <a:endParaRPr/>
+            <a:r>
+              <a:t>An hx-get URL isn't a special Ajax callback - it's a normal Drupal route with one flag. _htmx_route: TRUE tells Drupal to return just the main content and its assets. Without it, you'd get the whole themed page back. No #ajax property, no form-building context required.</a:t>
+            </a:r>
           </a:p>
         </p:txBody>
       </p:sp>
@@ -4411,20 +4368,9 @@
           </a:bodyPr>
           <a:lstStyle/>
           <a:p>
-            <a:pPr indent="0" lvl="0" marL="0" rtl="0" algn="l">
-              <a:spcBef>
-                <a:spcPts val="0"/>
-              </a:spcBef>
-              <a:spcAft>
-                <a:spcPts val="0"/>
-              </a:spcAft>
-              <a:buNone/>
-            </a:pPr>
-            <a:r>
-              <a:rPr lang="en-US"/>
-              <a:t>DX: the Ajax API is more ceremony, but deeply integrated with Form API - multi-step wizards and validation come free. HTMX is far less ceremony, but state management for anything multi-step is on you. Performance: an Ajax response is a JSON command stack interpreted by core/drupal.ajax, with Drupal.behaviors reattaching on every response. HTMX ships a ~14kb library, and the response is the HTML fragment itself.</a:t>
-            </a:r>
-            <a:endParaRPr/>
+            <a:r>
+              <a:t>DX: the Ajax API is more ceremony, but it's the most proven path for complex multi-step forms and wizards. HTMX is far less ceremony, and since 11.3 Form API can rebuild forms from HTMX requests - but complex multi-step flows are less proven. Performance: an Ajax response is a JSON command stack that core/drupal.ajax runs command by command. HTMX is a ~16kb library and the response is the HTML itself. Drupal.org reports up to 71% less JavaScript loaded for browser-server interactions with native HTMX in 11.3.</a:t>
+            </a:r>
           </a:p>
         </p:txBody>
       </p:sp>
@@ -4864,20 +4810,9 @@
           </a:bodyPr>
           <a:lstStyle/>
           <a:p>
-            <a:pPr indent="0" lvl="0" marL="0" rtl="0" algn="l">
-              <a:spcBef>
-                <a:spcPts val="0"/>
-              </a:spcBef>
-              <a:spcAft>
-                <a:spcPts val="0"/>
-              </a:spcAft>
-              <a:buNone/>
-            </a:pPr>
-            <a:r>
-              <a:rPr lang="en-US"/>
-              <a:t>Pick HTMX where round trips are simple and the UI is a fragment. Keep the Ajax API - or Drupal's own wizard-form machinery - where you need genuine multi-step state. This isn't a replace-everything story. It's a which-tool-for-which-job story. Next: how to actually bring HTMX into a project you already have, without a rewrite.</a:t>
-            </a:r>
-            <a:endParaRPr/>
+            <a:r>
+              <a:t>Pick HTMX where round trips are simple and the UI is a fragment. Keep the Ajax API where it already works, and for complex multi-step flows until HTMX patterns there mature. This isn't a replace-everything story. It's a which-tool-for-which-job story. Next: how to actually bring HTMX into a project you already have, without a rewrite.</a:t>
+            </a:r>
           </a:p>
         </p:txBody>
       </p:sp>
@@ -5015,20 +4950,9 @@
           </a:bodyPr>
           <a:lstStyle/>
           <a:p>
-            <a:pPr indent="0" lvl="0" marL="0" rtl="0" algn="l">
-              <a:spcBef>
-                <a:spcPts val="0"/>
-              </a:spcBef>
-              <a:spcAft>
-                <a:spcPts val="0"/>
-              </a:spcAft>
-              <a:buNone/>
-            </a:pPr>
-            <a:r>
-              <a:rPr lang="en-US"/>
-              <a:t>[Incremental adoption strategy - build later] How to introduce HTMX into an existing Drupal project without a rewrite.</a:t>
-            </a:r>
-            <a:endParaRPr/>
+            <a:r>
+              <a:t>How to actually bring HTMX into a project you already have, without a rewrite.</a:t>
+            </a:r>
           </a:p>
         </p:txBody>
       </p:sp>
@@ -5072,6 +4996,238 @@
               <a:t/>
             </a:r>
             <a:endParaRPr/>
+          </a:p>
+        </p:txBody>
+      </p:sp>
+    </p:spTree>
+  </p:cSld>
+  <p:clrMapOvr>
+    <a:masterClrMapping/>
+  </p:clrMapOvr>
+</p:notes>
+</file>
+
+<file path=ppt/notesSlides/notesSlide36.xml><?xml version="1.0" encoding="utf-8"?>
+<p:notes xmlns:a="http://schemas.openxmlformats.org/drawingml/2006/main" xmlns:p="http://schemas.openxmlformats.org/presentationml/2006/main" xmlns:r="http://schemas.openxmlformats.org/officeDocument/2006/relationships">
+  <p:cSld>
+    <p:spTree>
+      <p:nvGrpSpPr>
+        <p:cNvPr id="1" name=""/>
+        <p:cNvGrpSpPr/>
+        <p:nvPr/>
+      </p:nvGrpSpPr>
+      <p:grpSpPr>
+        <a:xfrm>
+          <a:off x="0" y="0"/>
+          <a:ext cx="0" cy="0"/>
+          <a:chOff x="0" y="0"/>
+          <a:chExt cx="0" cy="0"/>
+        </a:xfrm>
+      </p:grpSpPr>
+      <p:sp>
+        <p:nvSpPr>
+          <p:cNvPr id="2" name="Slide Image Placeholder 1"/>
+          <p:cNvSpPr>
+            <a:spLocks noGrp="1"/>
+          </p:cNvSpPr>
+          <p:nvPr>
+            <p:ph type="sldImg" idx="2"/>
+          </p:nvPr>
+        </p:nvSpPr>
+        <p:spPr/>
+      </p:sp>
+      <p:sp>
+        <p:nvSpPr>
+          <p:cNvPr id="3" name="Notes Placeholder 2"/>
+          <p:cNvSpPr>
+            <a:spLocks noGrp="1"/>
+          </p:cNvSpPr>
+          <p:nvPr>
+            <p:ph type="body" idx="1"/>
+          </p:nvPr>
+        </p:nvSpPr>
+        <p:spPr/>
+        <p:txBody>
+          <a:bodyPr/>
+          <a:lstStyle/>
+          <a:p>
+            <a:r>
+              <a:t>You don't rip out the Ajax API to start using HTMX. They coexist on the same page - HTMX doesn't touch anything #ajax owns. Here's how to actually bring it into a project you already have.</a:t>
+            </a:r>
+          </a:p>
+        </p:txBody>
+      </p:sp>
+    </p:spTree>
+  </p:cSld>
+  <p:clrMapOvr>
+    <a:masterClrMapping/>
+  </p:clrMapOvr>
+</p:notes>
+</file>
+
+<file path=ppt/notesSlides/notesSlide37.xml><?xml version="1.0" encoding="utf-8"?>
+<p:notes xmlns:a="http://schemas.openxmlformats.org/drawingml/2006/main" xmlns:p="http://schemas.openxmlformats.org/presentationml/2006/main" xmlns:r="http://schemas.openxmlformats.org/officeDocument/2006/relationships">
+  <p:cSld>
+    <p:spTree>
+      <p:nvGrpSpPr>
+        <p:cNvPr id="1" name=""/>
+        <p:cNvGrpSpPr/>
+        <p:nvPr/>
+      </p:nvGrpSpPr>
+      <p:grpSpPr>
+        <a:xfrm>
+          <a:off x="0" y="0"/>
+          <a:ext cx="0" cy="0"/>
+          <a:chOff x="0" y="0"/>
+          <a:chExt cx="0" cy="0"/>
+        </a:xfrm>
+      </p:grpSpPr>
+      <p:sp>
+        <p:nvSpPr>
+          <p:cNvPr id="2" name="Slide Image Placeholder 1"/>
+          <p:cNvSpPr>
+            <a:spLocks noGrp="1"/>
+          </p:cNvSpPr>
+          <p:nvPr>
+            <p:ph type="sldImg" idx="2"/>
+          </p:nvPr>
+        </p:nvSpPr>
+        <p:spPr/>
+      </p:sp>
+      <p:sp>
+        <p:nvSpPr>
+          <p:cNvPr id="3" name="Notes Placeholder 2"/>
+          <p:cNvSpPr>
+            <a:spLocks noGrp="1"/>
+          </p:cNvSpPr>
+          <p:nvPr>
+            <p:ph type="body" idx="1"/>
+          </p:nvPr>
+        </p:nvSpPr>
+        <p:spPr/>
+        <p:txBody>
+          <a:bodyPr/>
+          <a:lstStyle/>
+          <a:p>
+            <a:r>
+              <a:t>On Drupal 11.3 and up there's nothing to install. Core ships htmx as core/htmx, plus core/drupal.htmx for the Drupal glue: asset loading and behaviors. If you use the Htmx class, it attaches the library for you. If you hand-write hx attributes in Twig, it's one #attached line. No library definition, no CDN, no build step.</a:t>
+            </a:r>
+          </a:p>
+        </p:txBody>
+      </p:sp>
+    </p:spTree>
+  </p:cSld>
+  <p:clrMapOvr>
+    <a:masterClrMapping/>
+  </p:clrMapOvr>
+</p:notes>
+</file>
+
+<file path=ppt/notesSlides/notesSlide38.xml><?xml version="1.0" encoding="utf-8"?>
+<p:notes xmlns:a="http://schemas.openxmlformats.org/drawingml/2006/main" xmlns:p="http://schemas.openxmlformats.org/presentationml/2006/main" xmlns:r="http://schemas.openxmlformats.org/officeDocument/2006/relationships">
+  <p:cSld>
+    <p:spTree>
+      <p:nvGrpSpPr>
+        <p:cNvPr id="1" name=""/>
+        <p:cNvGrpSpPr/>
+        <p:nvPr/>
+      </p:nvGrpSpPr>
+      <p:grpSpPr>
+        <a:xfrm>
+          <a:off x="0" y="0"/>
+          <a:ext cx="0" cy="0"/>
+          <a:chOff x="0" y="0"/>
+          <a:chExt cx="0" cy="0"/>
+        </a:xfrm>
+      </p:grpSpPr>
+      <p:sp>
+        <p:nvSpPr>
+          <p:cNvPr id="2" name="Slide Image Placeholder 1"/>
+          <p:cNvSpPr>
+            <a:spLocks noGrp="1"/>
+          </p:cNvSpPr>
+          <p:nvPr>
+            <p:ph type="sldImg" idx="2"/>
+          </p:nvPr>
+        </p:nvSpPr>
+        <p:spPr/>
+      </p:sp>
+      <p:sp>
+        <p:nvSpPr>
+          <p:cNvPr id="3" name="Notes Placeholder 2"/>
+          <p:cNvSpPr>
+            <a:spLocks noGrp="1"/>
+          </p:cNvSpPr>
+          <p:nvPr>
+            <p:ph type="body" idx="1"/>
+          </p:nvPr>
+        </p:nvSpPr>
+        <p:spPr/>
+        <p:txBody>
+          <a:bodyPr/>
+          <a:lstStyle/>
+          <a:p>
+            <a:r>
+              <a:t>The Ajax API code that already works - leave it. HTMX is for new interactive spots, or the small annoying ones: a filter, a load-more pager, an autocomplete list. hx-boost is a low-effort way to try it - links and forms inside the boosted element become HTMX requests automatically. Scope it to one region first. Each boosted request still swaps the whole body, so test page-level JS like the toolbar and BigPipe.</a:t>
+            </a:r>
+          </a:p>
+        </p:txBody>
+      </p:sp>
+    </p:spTree>
+  </p:cSld>
+  <p:clrMapOvr>
+    <a:masterClrMapping/>
+  </p:clrMapOvr>
+</p:notes>
+</file>
+
+<file path=ppt/notesSlides/notesSlide39.xml><?xml version="1.0" encoding="utf-8"?>
+<p:notes xmlns:a="http://schemas.openxmlformats.org/drawingml/2006/main" xmlns:p="http://schemas.openxmlformats.org/presentationml/2006/main" xmlns:r="http://schemas.openxmlformats.org/officeDocument/2006/relationships">
+  <p:cSld>
+    <p:spTree>
+      <p:nvGrpSpPr>
+        <p:cNvPr id="1" name=""/>
+        <p:cNvGrpSpPr/>
+        <p:nvPr/>
+      </p:nvGrpSpPr>
+      <p:grpSpPr>
+        <a:xfrm>
+          <a:off x="0" y="0"/>
+          <a:ext cx="0" cy="0"/>
+          <a:chOff x="0" y="0"/>
+          <a:chExt cx="0" cy="0"/>
+        </a:xfrm>
+      </p:grpSpPr>
+      <p:sp>
+        <p:nvSpPr>
+          <p:cNvPr id="2" name="Slide Image Placeholder 1"/>
+          <p:cNvSpPr>
+            <a:spLocks noGrp="1"/>
+          </p:cNvSpPr>
+          <p:nvPr>
+            <p:ph type="sldImg" idx="2"/>
+          </p:nvPr>
+        </p:nvSpPr>
+        <p:spPr/>
+      </p:sp>
+      <p:sp>
+        <p:nvSpPr>
+          <p:cNvPr id="3" name="Notes Placeholder 2"/>
+          <p:cNvSpPr>
+            <a:spLocks noGrp="1"/>
+          </p:cNvSpPr>
+          <p:nvPr>
+            <p:ph type="body" idx="1"/>
+          </p:nvPr>
+        </p:nvSpPr>
+        <p:spPr/>
+        <p:txBody>
+          <a:bodyPr/>
+          <a:lstStyle/>
+          <a:p>
+            <a:r>
+              <a:t>New interactive feature: HTMX by default. Existing, working Ajax API code: leave it alone. Complex multi-step forms - wizards, heavy Form API flows: keep them on the Ajax API for now, per §6's verdict.</a:t>
+            </a:r>
           </a:p>
         </p:txBody>
       </p:sp>
@@ -5234,6 +5390,470 @@
 </p:notes>
 </file>
 
+<file path=ppt/notesSlides/notesSlide40.xml><?xml version="1.0" encoding="utf-8"?>
+<p:notes xmlns:a="http://schemas.openxmlformats.org/drawingml/2006/main" xmlns:p="http://schemas.openxmlformats.org/presentationml/2006/main" xmlns:r="http://schemas.openxmlformats.org/officeDocument/2006/relationships">
+  <p:cSld>
+    <p:spTree>
+      <p:nvGrpSpPr>
+        <p:cNvPr id="1" name=""/>
+        <p:cNvGrpSpPr/>
+        <p:nvPr/>
+      </p:nvGrpSpPr>
+      <p:grpSpPr>
+        <a:xfrm>
+          <a:off x="0" y="0"/>
+          <a:ext cx="0" cy="0"/>
+          <a:chOff x="0" y="0"/>
+          <a:chExt cx="0" cy="0"/>
+        </a:xfrm>
+      </p:grpSpPr>
+      <p:sp>
+        <p:nvSpPr>
+          <p:cNvPr id="2" name="Slide Image Placeholder 1"/>
+          <p:cNvSpPr>
+            <a:spLocks noGrp="1"/>
+          </p:cNvSpPr>
+          <p:nvPr>
+            <p:ph type="sldImg" idx="2"/>
+          </p:nvPr>
+        </p:nvSpPr>
+        <p:spPr/>
+      </p:sp>
+      <p:sp>
+        <p:nvSpPr>
+          <p:cNvPr id="3" name="Notes Placeholder 2"/>
+          <p:cNvSpPr>
+            <a:spLocks noGrp="1"/>
+          </p:cNvSpPr>
+          <p:nvPr>
+            <p:ph type="body" idx="1"/>
+          </p:nvPr>
+        </p:nvSpPr>
+        <p:spPr/>
+        <p:txBody>
+          <a:bodyPr/>
+          <a:lstStyle/>
+          <a:p>
+            <a:r>
+              <a:t>Use what core ships, pick a handful of low-risk candidates, boost one region to get a feel for it. No rewrite, no migration - just a second tool in the same box as the Ajax API. Next: where this actually stands in Drupal core today, and how you can help move it forward.</a:t>
+            </a:r>
+          </a:p>
+        </p:txBody>
+      </p:sp>
+    </p:spTree>
+  </p:cSld>
+  <p:clrMapOvr>
+    <a:masterClrMapping/>
+  </p:clrMapOvr>
+</p:notes>
+</file>
+
+<file path=ppt/notesSlides/notesSlide41.xml><?xml version="1.0" encoding="utf-8"?>
+<p:notes xmlns:a="http://schemas.openxmlformats.org/drawingml/2006/main" xmlns:p="http://schemas.openxmlformats.org/presentationml/2006/main" xmlns:r="http://schemas.openxmlformats.org/officeDocument/2006/relationships">
+  <p:cSld>
+    <p:spTree>
+      <p:nvGrpSpPr>
+        <p:cNvPr id="1" name=""/>
+        <p:cNvGrpSpPr/>
+        <p:nvPr/>
+      </p:nvGrpSpPr>
+      <p:grpSpPr>
+        <a:xfrm>
+          <a:off x="0" y="0"/>
+          <a:ext cx="0" cy="0"/>
+          <a:chOff x="0" y="0"/>
+          <a:chExt cx="0" cy="0"/>
+        </a:xfrm>
+      </p:grpSpPr>
+      <p:sp>
+        <p:nvSpPr>
+          <p:cNvPr id="2" name="Slide Image Placeholder 1"/>
+          <p:cNvSpPr>
+            <a:spLocks noGrp="1"/>
+          </p:cNvSpPr>
+          <p:nvPr>
+            <p:ph type="sldImg" idx="2"/>
+          </p:nvPr>
+        </p:nvSpPr>
+        <p:spPr/>
+      </p:sp>
+      <p:sp>
+        <p:nvSpPr>
+          <p:cNvPr id="3" name="Notes Placeholder 2"/>
+          <p:cNvSpPr>
+            <a:spLocks noGrp="1"/>
+          </p:cNvSpPr>
+          <p:nvPr>
+            <p:ph type="body" idx="1"/>
+          </p:nvPr>
+        </p:nvSpPr>
+        <p:spPr/>
+        <p:txBody>
+          <a:bodyPr/>
+          <a:lstStyle/>
+          <a:p>
+            <a:r>
+              <a:t>So, where are we today?</a:t>
+            </a:r>
+          </a:p>
+        </p:txBody>
+      </p:sp>
+    </p:spTree>
+  </p:cSld>
+  <p:clrMapOvr>
+    <a:masterClrMapping/>
+  </p:clrMapOvr>
+</p:notes>
+</file>
+
+<file path=ppt/notesSlides/notesSlide42.xml><?xml version="1.0" encoding="utf-8"?>
+<p:notes xmlns:a="http://schemas.openxmlformats.org/drawingml/2006/main" xmlns:p="http://schemas.openxmlformats.org/presentationml/2006/main" xmlns:r="http://schemas.openxmlformats.org/officeDocument/2006/relationships">
+  <p:cSld>
+    <p:spTree>
+      <p:nvGrpSpPr>
+        <p:cNvPr id="1" name=""/>
+        <p:cNvGrpSpPr/>
+        <p:nvPr/>
+      </p:nvGrpSpPr>
+      <p:grpSpPr>
+        <a:xfrm>
+          <a:off x="0" y="0"/>
+          <a:ext cx="0" cy="0"/>
+          <a:chOff x="0" y="0"/>
+          <a:chExt cx="0" cy="0"/>
+        </a:xfrm>
+      </p:grpSpPr>
+      <p:sp>
+        <p:nvSpPr>
+          <p:cNvPr id="2" name="Slide Image Placeholder 1"/>
+          <p:cNvSpPr>
+            <a:spLocks noGrp="1"/>
+          </p:cNvSpPr>
+          <p:nvPr>
+            <p:ph type="sldImg" idx="2"/>
+          </p:nvPr>
+        </p:nvSpPr>
+        <p:spPr/>
+      </p:sp>
+      <p:sp>
+        <p:nvSpPr>
+          <p:cNvPr id="3" name="Notes Placeholder 2"/>
+          <p:cNvSpPr>
+            <a:spLocks noGrp="1"/>
+          </p:cNvSpPr>
+          <p:nvPr>
+            <p:ph type="body" idx="1"/>
+          </p:nvPr>
+        </p:nvSpPr>
+        <p:spPr/>
+        <p:txBody>
+          <a:bodyPr/>
+          <a:lstStyle/>
+          <a:p>
+            <a:r>
+              <a:t>This isn't a someday story. HTMX came into core as a dependency in 11.2 and became fully featured in 11.3, as part of an active initiative to gradually replace the Ajax system. Both APIs are running side by side right now, on purpose, while contrib gets time to convert. And the payoff is measurable: drupal.org reports up to 71% less JavaScript loaded for browser-server interactions.</a:t>
+            </a:r>
+          </a:p>
+        </p:txBody>
+      </p:sp>
+    </p:spTree>
+  </p:cSld>
+  <p:clrMapOvr>
+    <a:masterClrMapping/>
+  </p:clrMapOvr>
+</p:notes>
+</file>
+
+<file path=ppt/notesSlides/notesSlide43.xml><?xml version="1.0" encoding="utf-8"?>
+<p:notes xmlns:a="http://schemas.openxmlformats.org/drawingml/2006/main" xmlns:p="http://schemas.openxmlformats.org/presentationml/2006/main" xmlns:r="http://schemas.openxmlformats.org/officeDocument/2006/relationships">
+  <p:cSld>
+    <p:spTree>
+      <p:nvGrpSpPr>
+        <p:cNvPr id="1" name=""/>
+        <p:cNvGrpSpPr/>
+        <p:nvPr/>
+      </p:nvGrpSpPr>
+      <p:grpSpPr>
+        <a:xfrm>
+          <a:off x="0" y="0"/>
+          <a:ext cx="0" cy="0"/>
+          <a:chOff x="0" y="0"/>
+          <a:chExt cx="0" cy="0"/>
+        </a:xfrm>
+      </p:grpSpPr>
+      <p:sp>
+        <p:nvSpPr>
+          <p:cNvPr id="2" name="Slide Image Placeholder 1"/>
+          <p:cNvSpPr>
+            <a:spLocks noGrp="1"/>
+          </p:cNvSpPr>
+          <p:nvPr>
+            <p:ph type="sldImg" idx="2"/>
+          </p:nvPr>
+        </p:nvSpPr>
+        <p:spPr/>
+      </p:sp>
+      <p:sp>
+        <p:nvSpPr>
+          <p:cNvPr id="3" name="Notes Placeholder 2"/>
+          <p:cNvSpPr>
+            <a:spLocks noGrp="1"/>
+          </p:cNvSpPr>
+          <p:nvPr>
+            <p:ph type="body" idx="1"/>
+          </p:nvPr>
+        </p:nvSpPr>
+        <p:spPr/>
+        <p:txBody>
+          <a:bodyPr/>
+          <a:lstStyle/>
+          <a:p>
+            <a:r>
+              <a:t>Core is keeping the old Ajax API and the new HTMX path running together on purpose - full deprecation waits until contrib has had real time to convert. That's the same incremental philosophy from §7, just at the core level instead of your project's.</a:t>
+            </a:r>
+          </a:p>
+        </p:txBody>
+      </p:sp>
+    </p:spTree>
+  </p:cSld>
+  <p:clrMapOvr>
+    <a:masterClrMapping/>
+  </p:clrMapOvr>
+</p:notes>
+</file>
+
+<file path=ppt/notesSlides/notesSlide44.xml><?xml version="1.0" encoding="utf-8"?>
+<p:notes xmlns:a="http://schemas.openxmlformats.org/drawingml/2006/main" xmlns:p="http://schemas.openxmlformats.org/presentationml/2006/main" xmlns:r="http://schemas.openxmlformats.org/officeDocument/2006/relationships">
+  <p:cSld>
+    <p:spTree>
+      <p:nvGrpSpPr>
+        <p:cNvPr id="1" name=""/>
+        <p:cNvGrpSpPr/>
+        <p:nvPr/>
+      </p:nvGrpSpPr>
+      <p:grpSpPr>
+        <a:xfrm>
+          <a:off x="0" y="0"/>
+          <a:ext cx="0" cy="0"/>
+          <a:chOff x="0" y="0"/>
+          <a:chExt cx="0" cy="0"/>
+        </a:xfrm>
+      </p:grpSpPr>
+      <p:sp>
+        <p:nvSpPr>
+          <p:cNvPr id="2" name="Slide Image Placeholder 1"/>
+          <p:cNvSpPr>
+            <a:spLocks noGrp="1"/>
+          </p:cNvSpPr>
+          <p:nvPr>
+            <p:ph type="sldImg" idx="2"/>
+          </p:nvPr>
+        </p:nvSpPr>
+        <p:spPr/>
+      </p:sp>
+      <p:sp>
+        <p:nvSpPr>
+          <p:cNvPr id="3" name="Notes Placeholder 2"/>
+          <p:cNvSpPr>
+            <a:spLocks noGrp="1"/>
+          </p:cNvSpPr>
+          <p:nvPr>
+            <p:ph type="body" idx="1"/>
+          </p:nvPr>
+        </p:nvSpPr>
+        <p:spPr/>
+        <p:txBody>
+          <a:bodyPr/>
+          <a:lstStyle/>
+          <a:p>
+            <a:r>
+              <a:t>Triage issues, convert a #ajax/Command usage to HTMX and report back, write docs/examples, build real-world case studies like this talk. The core initiative issue queue, the contrib module issue queue, and the #htmx channel on Drupal Slack are where the work happens.</a:t>
+            </a:r>
+          </a:p>
+        </p:txBody>
+      </p:sp>
+    </p:spTree>
+  </p:cSld>
+  <p:clrMapOvr>
+    <a:masterClrMapping/>
+  </p:clrMapOvr>
+</p:notes>
+</file>
+
+<file path=ppt/notesSlides/notesSlide45.xml><?xml version="1.0" encoding="utf-8"?>
+<p:notes xmlns:a="http://schemas.openxmlformats.org/drawingml/2006/main" xmlns:p="http://schemas.openxmlformats.org/presentationml/2006/main" xmlns:r="http://schemas.openxmlformats.org/officeDocument/2006/relationships">
+  <p:cSld>
+    <p:spTree>
+      <p:nvGrpSpPr>
+        <p:cNvPr id="1" name=""/>
+        <p:cNvGrpSpPr/>
+        <p:nvPr/>
+      </p:nvGrpSpPr>
+      <p:grpSpPr>
+        <a:xfrm>
+          <a:off x="0" y="0"/>
+          <a:ext cx="0" cy="0"/>
+          <a:chOff x="0" y="0"/>
+          <a:chExt cx="0" cy="0"/>
+        </a:xfrm>
+      </p:grpSpPr>
+      <p:sp>
+        <p:nvSpPr>
+          <p:cNvPr id="2" name="Slide Image Placeholder 1"/>
+          <p:cNvSpPr>
+            <a:spLocks noGrp="1"/>
+          </p:cNvSpPr>
+          <p:nvPr>
+            <p:ph type="sldImg" idx="2"/>
+          </p:nvPr>
+        </p:nvSpPr>
+        <p:spPr/>
+      </p:sp>
+      <p:sp>
+        <p:nvSpPr>
+          <p:cNvPr id="3" name="Notes Placeholder 2"/>
+          <p:cNvSpPr>
+            <a:spLocks noGrp="1"/>
+          </p:cNvSpPr>
+          <p:nvPr>
+            <p:ph type="body" idx="1"/>
+          </p:nvPr>
+        </p:nvSpPr>
+        <p:spPr/>
+        <p:txBody>
+          <a:bodyPr/>
+          <a:lstStyle/>
+          <a:p>
+            <a:r>
+              <a:t>This isn't waiting on permission - it's already in core, it's actively being worked, and it needs hands. If you're on 11.3, it's already on your site: go convert one #ajax callback in your own project and see what it feels like.</a:t>
+            </a:r>
+          </a:p>
+        </p:txBody>
+      </p:sp>
+    </p:spTree>
+  </p:cSld>
+  <p:clrMapOvr>
+    <a:masterClrMapping/>
+  </p:clrMapOvr>
+</p:notes>
+</file>
+
+<file path=ppt/notesSlides/notesSlide46.xml><?xml version="1.0" encoding="utf-8"?>
+<p:notes xmlns:a="http://schemas.openxmlformats.org/drawingml/2006/main" xmlns:p="http://schemas.openxmlformats.org/presentationml/2006/main" xmlns:r="http://schemas.openxmlformats.org/officeDocument/2006/relationships">
+  <p:cSld>
+    <p:spTree>
+      <p:nvGrpSpPr>
+        <p:cNvPr id="1" name=""/>
+        <p:cNvGrpSpPr/>
+        <p:nvPr/>
+      </p:nvGrpSpPr>
+      <p:grpSpPr>
+        <a:xfrm>
+          <a:off x="0" y="0"/>
+          <a:ext cx="0" cy="0"/>
+          <a:chOff x="0" y="0"/>
+          <a:chExt cx="0" cy="0"/>
+        </a:xfrm>
+      </p:grpSpPr>
+      <p:sp>
+        <p:nvSpPr>
+          <p:cNvPr id="2" name="Slide Image Placeholder 1"/>
+          <p:cNvSpPr>
+            <a:spLocks noGrp="1"/>
+          </p:cNvSpPr>
+          <p:nvPr>
+            <p:ph type="sldImg" idx="2"/>
+          </p:nvPr>
+        </p:nvSpPr>
+        <p:spPr/>
+      </p:sp>
+      <p:sp>
+        <p:nvSpPr>
+          <p:cNvPr id="3" name="Notes Placeholder 2"/>
+          <p:cNvSpPr>
+            <a:spLocks noGrp="1"/>
+          </p:cNvSpPr>
+          <p:nvPr>
+            <p:ph type="body" idx="1"/>
+          </p:nvPr>
+        </p:nvSpPr>
+        <p:spPr/>
+        <p:txBody>
+          <a:bodyPr/>
+          <a:lstStyle/>
+          <a:p>
+            <a:r>
+              <a:t>Thank everyone for coming, then open the floor for questions. Backup answers for likely questions are in docs/8-qa-backup.md.</a:t>
+            </a:r>
+          </a:p>
+        </p:txBody>
+      </p:sp>
+    </p:spTree>
+  </p:cSld>
+  <p:clrMapOvr>
+    <a:masterClrMapping/>
+  </p:clrMapOvr>
+</p:notes>
+</file>
+
+<file path=ppt/notesSlides/notesSlide47.xml><?xml version="1.0" encoding="utf-8"?>
+<p:notes xmlns:a="http://schemas.openxmlformats.org/drawingml/2006/main" xmlns:p="http://schemas.openxmlformats.org/presentationml/2006/main" xmlns:r="http://schemas.openxmlformats.org/officeDocument/2006/relationships">
+  <p:cSld>
+    <p:spTree>
+      <p:nvGrpSpPr>
+        <p:cNvPr id="1" name=""/>
+        <p:cNvGrpSpPr/>
+        <p:nvPr/>
+      </p:nvGrpSpPr>
+      <p:grpSpPr>
+        <a:xfrm>
+          <a:off x="0" y="0"/>
+          <a:ext cx="0" cy="0"/>
+          <a:chOff x="0" y="0"/>
+          <a:chExt cx="0" cy="0"/>
+        </a:xfrm>
+      </p:grpSpPr>
+      <p:sp>
+        <p:nvSpPr>
+          <p:cNvPr id="2" name="Slide Image Placeholder 1"/>
+          <p:cNvSpPr>
+            <a:spLocks noGrp="1"/>
+          </p:cNvSpPr>
+          <p:nvPr>
+            <p:ph type="sldImg" idx="2"/>
+          </p:nvPr>
+        </p:nvSpPr>
+        <p:spPr/>
+      </p:sp>
+      <p:sp>
+        <p:nvSpPr>
+          <p:cNvPr id="3" name="Notes Placeholder 2"/>
+          <p:cNvSpPr>
+            <a:spLocks noGrp="1"/>
+          </p:cNvSpPr>
+          <p:nvPr>
+            <p:ph type="body" idx="1"/>
+          </p:nvPr>
+        </p:nvSpPr>
+        <p:spPr/>
+        <p:txBody>
+          <a:bodyPr/>
+          <a:lstStyle/>
+          <a:p>
+            <a:r>
+              <a:t>And on the markup side, since 11.3 you don't have to hand-write hx attributes. Core's Htmx class builds every htmx attribute from PHP - the same four from the cheat sheet - and applies them to a render element. applyTo() also attaches core/drupal.htmx, which loads any CSS and JS the response needs and re-attaches Drupal.behaviors after every swap.</a:t>
+            </a:r>
+          </a:p>
+        </p:txBody>
+      </p:sp>
+    </p:spTree>
+  </p:cSld>
+  <p:clrMapOvr>
+    <a:masterClrMapping/>
+  </p:clrMapOvr>
+</p:notes>
+</file>
+
 <file path=ppt/notesSlides/notesSlide5.xml><?xml version="1.0" encoding="utf-8"?>
 <p:notes xmlns:a="http://schemas.openxmlformats.org/drawingml/2006/main" xmlns:r="http://schemas.openxmlformats.org/officeDocument/2006/relationships" xmlns:mc="http://schemas.openxmlformats.org/markup-compatibility/2006" xmlns:mv="urn:schemas-microsoft-com:mac:vml" xmlns:p="http://schemas.openxmlformats.org/presentationml/2006/main" xmlns:c="http://schemas.openxmlformats.org/drawingml/2006/chart" xmlns:dgm="http://schemas.openxmlformats.org/drawingml/2006/diagram" xmlns:o="urn:schemas-microsoft-com:office:office" xmlns:v="urn:schemas-microsoft-com:vml" xmlns:pvml="urn:schemas-microsoft-com:office:powerpoint" xmlns:com="http://schemas.openxmlformats.org/drawingml/2006/compatibility" xmlns:p14="http://schemas.microsoft.com/office/powerpoint/2010/main" xmlns:p15="http://schemas.microsoft.com/office/powerpoint/2012/main" xmlns:ahyp="http://schemas.microsoft.com/office/drawing/2018/hyperlinkcolor" showMasterPhAnim="0" showMasterSp="0">
   <p:cSld>
@@ -5468,20 +6088,9 @@
           </a:bodyPr>
           <a:lstStyle/>
           <a:p>
-            <a:pPr indent="0" lvl="0" marL="0" rtl="0" algn="l">
-              <a:spcBef>
-                <a:spcPts val="0"/>
-              </a:spcBef>
-              <a:spcAft>
-                <a:spcPts val="0"/>
-              </a:spcAft>
-              <a:buNone/>
-            </a:pPr>
-            <a:r>
-              <a:rPr lang="en-US"/>
-              <a:t>Over the next 45 minutes, we'll do four things: look at why Ajax API gets painful at scale, learn HTMX's core idea, map that idea directly onto Drupal's render/routing/caching system, then watch it work live. We'll close with an honest comparison and how to bring this into a project you already have.</a:t>
-            </a:r>
-            <a:endParaRPr/>
+            <a:r>
+              <a:t>Over the next 45 minutes: why the Ajax API gets painful at scale, HTMX's core idea, and how that idea maps directly onto Drupal's render, routing and caching system. Then we watch it work live. After that, an honest comparison, how to bring this into a project you already have, and where HTMX stands in Drupal core today, plus how you can help.</a:t>
+            </a:r>
           </a:p>
         </p:txBody>
       </p:sp>
@@ -5770,20 +6379,9 @@
           </a:bodyPr>
           <a:lstStyle/>
           <a:p>
-            <a:pPr indent="0" lvl="0" marL="0" rtl="0" algn="l">
-              <a:spcBef>
-                <a:spcPts val="0"/>
-              </a:spcBef>
-              <a:spcAft>
-                <a:spcPts val="0"/>
-              </a:spcAft>
-              <a:buNone/>
-            </a:pPr>
-            <a:r>
-              <a:rPr lang="en-US"/>
-              <a:t>Drupal's Ajax API isn't new - it's been part of core in its current form since Drupal 7, unified under a single framework. In Drupal 8 through 11, it was rebuilt on top of Symfony's HttpKernel - AjaxResponse extends Symfony's Response, and interactions are expressed as a stack of Command objects. It's mature, well-documented, and used everywhere in core - exposed filters, autocomplete, modal dialogs, inline entity forms. This isn't a story about a broken system. It's a story about a system that was the right answer for 2011, and is starting to show its age.</a:t>
-            </a:r>
-            <a:endParaRPr/>
+            <a:r>
+              <a:t>Drupal's Ajax API isn't new - it's been part of core in its current form since Drupal 7, unified under a single framework. In Drupal 8 through 11, it was rebuilt on top of Symfony's HttpKernel - AjaxResponse extends Symfony's JsonResponse, and interactions are expressed as a stack of Command objects. It's mature, well-documented, and used everywhere in core - exposed filters, autocomplete, modal dialogs, inline entity forms. This isn't a story about a broken system. It's a story about a system that was the right answer for 2011, and is starting to show its age.</a:t>
+            </a:r>
           </a:p>
         </p:txBody>
       </p:sp>
@@ -5921,20 +6519,9 @@
           </a:bodyPr>
           <a:lstStyle/>
           <a:p>
-            <a:pPr indent="0" lvl="0" marL="0" rtl="0" algn="l">
-              <a:spcBef>
-                <a:spcPts val="0"/>
-              </a:spcBef>
-              <a:spcAft>
-                <a:spcPts val="0"/>
-              </a:spcAft>
-              <a:buNone/>
-            </a:pPr>
-            <a:r>
-              <a:rPr lang="en-US"/>
-              <a:t>A form/render element gets an #ajax property: callback, wrapper, event. The callback runs server-side and returns an AjaxResponse built from one or more Commands. The client-side core/drupal.ajax library plus Drupal.behaviors interpret those commands and mutate the DOM.</a:t>
-            </a:r>
-            <a:endParaRPr/>
+            <a:r>
+              <a:t>A form/render element gets an #ajax property: callback, wrapper, event. The callback runs server-side and returns an AjaxResponse built from one or more Commands. The client-side core/drupal.ajax library runs each command to mutate the DOM, then Drupal.behaviors re-attach to the new markup.</a:t>
+            </a:r>
           </a:p>
         </p:txBody>
       </p:sp>
@@ -12204,8 +12791,8 @@
         </p:blipFill>
         <p:spPr>
           <a:xfrm>
-            <a:off x="2546176" y="1691000"/>
-            <a:ext cx="7676226" cy="4836025"/>
+            <a:off x="2735988" y="1691000"/>
+            <a:ext cx="7296601" cy="4836025"/>
           </a:xfrm>
           <a:prstGeom prst="rect">
             <a:avLst/>
@@ -13173,7 +13760,7 @@
                 <a:cs typeface="Calibri"/>
                 <a:sym typeface="Calibri"/>
               </a:rPr>
-              <a:t>Every interaction needs a matching PHP command + JS behavior pair.</a:t>
+              <a:t>Custom interactions need a PHP command plus a matching JS command handler.</a:t>
             </a:r>
             <a:endParaRPr/>
           </a:p>
@@ -17312,8 +17899,8 @@
         </p:nvSpPr>
         <p:spPr>
           <a:xfrm>
-            <a:off x="640080" y="2207890"/>
-            <a:ext cx="10908900" cy="1756500"/>
+            <a:off x="640080" y="1463040"/>
+            <a:ext cx="10908900" cy="2240280"/>
           </a:xfrm>
           <a:prstGeom prst="roundRect">
             <a:avLst>
@@ -17506,6 +18093,72 @@
             </a:r>
             <a:endParaRPr/>
           </a:p>
+          <a:p>
+            <a:pPr indent="0" lvl="0" marL="0" marR="0" rtl="0" algn="l">
+              <a:lnSpc>
+                <a:spcPct val="122000"/>
+              </a:lnSpc>
+              <a:spcBef>
+                <a:spcPts val="0"/>
+              </a:spcBef>
+              <a:spcAft>
+                <a:spcPts val="0"/>
+              </a:spcAft>
+              <a:buNone/>
+            </a:pPr>
+            <a:r>
+              <a:rPr b="0" i="0" lang="en-US" sz="1250">
+                <a:solidFill>
+                  <a:srgbClr val="D8E4F5"/>
+                </a:solidFill>
+                <a:latin typeface="Courier New"/>
+                <a:ea typeface="Courier New"/>
+                <a:cs typeface="Courier New"/>
+                <a:sym typeface="Courier New"/>
+              </a:rPr>
+              <a:t>  options:</a:t>
+            </a:r>
+            <a:endParaRPr/>
+          </a:p>
+          <a:p>
+            <a:pPr indent="0" lvl="0" marL="0" marR="0" rtl="0" algn="l">
+              <a:lnSpc>
+                <a:spcPct val="122000"/>
+              </a:lnSpc>
+              <a:spcBef>
+                <a:spcPts val="0"/>
+              </a:spcBef>
+              <a:spcAft>
+                <a:spcPts val="0"/>
+              </a:spcAft>
+              <a:buNone/>
+            </a:pPr>
+            <a:r>
+              <a:rPr b="0" i="0" lang="en-US" sz="1250">
+                <a:solidFill>
+                  <a:srgbClr val="D8E4F5"/>
+                </a:solidFill>
+                <a:latin typeface="Courier New"/>
+                <a:ea typeface="Courier New"/>
+                <a:cs typeface="Courier New"/>
+                <a:sym typeface="Courier New"/>
+              </a:rPr>
+              <a:t>    </a:t>
+            </a:r>
+            <a:r>
+              <a:rPr b="1" i="0" lang="en-US" sz="1250">
+                <a:solidFill>
+                  <a:srgbClr val="F26351"/>
+                </a:solidFill>
+                <a:latin typeface="Courier New"/>
+                <a:ea typeface="Courier New"/>
+                <a:cs typeface="Courier New"/>
+                <a:sym typeface="Courier New"/>
+              </a:rPr>
+              <a:t>_htmx_route: TRUE</a:t>
+            </a:r>
+            <a:endParaRPr/>
+          </a:p>
         </p:txBody>
       </p:sp>
       <p:sp>
@@ -17516,7 +18169,7 @@
         </p:nvSpPr>
         <p:spPr>
           <a:xfrm>
-            <a:off x="640080" y="4101459"/>
+            <a:off x="640080" y="3886200"/>
             <a:ext cx="10908900" cy="215400"/>
           </a:xfrm>
           <a:prstGeom prst="rect">
@@ -17555,7 +18208,7 @@
                 <a:cs typeface="Calibri"/>
                 <a:sym typeface="Calibri"/>
               </a:rPr>
-              <a:t>hx-get="/filter-results" isn't a special Ajax callback. It's a normal Drupal route — no #ajax property, no form-building context required.</a:t>
+              <a:t>hx-get="/filter-results" isn't a special Ajax callback. It's a normal Drupal route with one flag: _htmx_route returns just the main content and its assets, not the whole themed page.</a:t>
             </a:r>
             <a:endParaRPr/>
           </a:p>
@@ -18123,6 +18776,474 @@
   <p:cSld>
     <p:spTree>
       <p:nvGrpSpPr>
+        <p:cNvPr id="285" name="Shape 285"/>
+        <p:cNvGrpSpPr/>
+        <p:nvPr/>
+      </p:nvGrpSpPr>
+      <p:grpSpPr>
+        <a:xfrm>
+          <a:off x="0" y="0"/>
+          <a:ext cx="0" cy="0"/>
+          <a:chOff x="0" y="0"/>
+          <a:chExt cx="0" cy="0"/>
+        </a:xfrm>
+      </p:grpSpPr>
+      <p:sp>
+        <p:nvSpPr>
+          <p:cNvPr id="286" name="Google Shape;286;p33"/>
+          <p:cNvSpPr txBox="1"/>
+          <p:nvPr/>
+        </p:nvSpPr>
+        <p:spPr>
+          <a:xfrm>
+            <a:off x="640080" y="320040"/>
+            <a:ext cx="7315200" cy="320040"/>
+          </a:xfrm>
+          <a:prstGeom prst="rect">
+            <a:avLst/>
+          </a:prstGeom>
+          <a:noFill/>
+          <a:ln>
+            <a:noFill/>
+          </a:ln>
+        </p:spPr>
+        <p:txBody>
+          <a:bodyPr anchorCtr="0" anchor="t" bIns="0" lIns="0" spcFirstLastPara="1" rIns="0" wrap="square" tIns="0">
+            <a:spAutoFit/>
+          </a:bodyPr>
+          <a:lstStyle/>
+          <a:p>
+            <a:pPr indent="0" lvl="0" marL="0" marR="0" rtl="0" algn="l">
+              <a:spcBef>
+                <a:spcPts val="0"/>
+              </a:spcBef>
+              <a:spcAft>
+                <a:spcPts val="0"/>
+              </a:spcAft>
+              <a:buNone/>
+            </a:pPr>
+            <a:r>
+              <a:rPr b="1" i="0" lang="en-US" sz="1200">
+                <a:solidFill>
+                  <a:srgbClr val="F26351"/>
+                </a:solidFill>
+                <a:latin typeface="Calibri"/>
+                <a:ea typeface="Calibri"/>
+                <a:cs typeface="Calibri"/>
+                <a:sym typeface="Calibri"/>
+              </a:rPr>
+              <a:t>CORE'S HTMX CLASS</a:t>
+            </a:r>
+            <a:endParaRPr/>
+          </a:p>
+        </p:txBody>
+      </p:sp>
+      <p:sp>
+        <p:nvSpPr>
+          <p:cNvPr id="287" name="Google Shape;287;p33"/>
+          <p:cNvSpPr/>
+          <p:nvPr/>
+        </p:nvSpPr>
+        <p:spPr>
+          <a:xfrm>
+            <a:off x="640080" y="1723703"/>
+            <a:ext cx="10908900" cy="2724900"/>
+          </a:xfrm>
+          <a:prstGeom prst="roundRect">
+            <a:avLst>
+              <a:gd fmla="val 4000" name="adj"/>
+            </a:avLst>
+          </a:prstGeom>
+          <a:solidFill>
+            <a:srgbClr val="23325D"/>
+          </a:solidFill>
+          <a:ln>
+            <a:noFill/>
+          </a:ln>
+        </p:spPr>
+        <p:txBody>
+          <a:bodyPr anchorCtr="0" anchor="ctr" bIns="228600" lIns="320025" spcFirstLastPara="1" rIns="274300" wrap="square" tIns="228600">
+            <a:noAutofit/>
+          </a:bodyPr>
+          <a:lstStyle/>
+          <a:p>
+            <a:pPr indent="0" lvl="0" marL="0" marR="0" rtl="0" algn="l">
+              <a:lnSpc>
+                <a:spcPct val="122000"/>
+              </a:lnSpc>
+              <a:spcBef>
+                <a:spcPts val="0"/>
+              </a:spcBef>
+              <a:spcAft>
+                <a:spcPts val="0"/>
+              </a:spcAft>
+              <a:buNone/>
+            </a:pPr>
+            <a:r>
+              <a:rPr b="0" i="0" lang="en-US" sz="1250">
+                <a:solidFill>
+                  <a:srgbClr val="D8E4F5"/>
+                </a:solidFill>
+                <a:latin typeface="Courier New"/>
+                <a:ea typeface="Courier New"/>
+                <a:cs typeface="Courier New"/>
+                <a:sym typeface="Courier New"/>
+              </a:rPr>
+              <a:t>use Drupal\Core\Htmx\Htmx;</a:t>
+            </a:r>
+            <a:endParaRPr/>
+          </a:p>
+          <a:p>
+            <a:pPr indent="0" lvl="0" marL="0" marR="0" rtl="0" algn="l">
+              <a:lnSpc>
+                <a:spcPct val="122000"/>
+              </a:lnSpc>
+              <a:spcBef>
+                <a:spcPts val="0"/>
+              </a:spcBef>
+              <a:spcAft>
+                <a:spcPts val="0"/>
+              </a:spcAft>
+              <a:buNone/>
+            </a:pPr>
+            <a:r>
+              <a:rPr b="0" i="0" lang="en-US" sz="1250">
+                <a:solidFill>
+                  <a:srgbClr val="D8E4F5"/>
+                </a:solidFill>
+                <a:latin typeface="Courier New"/>
+                <a:ea typeface="Courier New"/>
+                <a:cs typeface="Courier New"/>
+                <a:sym typeface="Courier New"/>
+              </a:rPr>
+              <a:t> </a:t>
+            </a:r>
+            <a:endParaRPr/>
+          </a:p>
+          <a:p>
+            <a:pPr indent="0" lvl="0" marL="0" marR="0" rtl="0" algn="l">
+              <a:lnSpc>
+                <a:spcPct val="122000"/>
+              </a:lnSpc>
+              <a:spcBef>
+                <a:spcPts val="0"/>
+              </a:spcBef>
+              <a:spcAft>
+                <a:spcPts val="0"/>
+              </a:spcAft>
+              <a:buNone/>
+            </a:pPr>
+            <a:r>
+              <a:rPr b="0" i="0" lang="en-US" sz="1250">
+                <a:solidFill>
+                  <a:srgbClr val="D8E4F5"/>
+                </a:solidFill>
+                <a:latin typeface="Courier New"/>
+                <a:ea typeface="Courier New"/>
+                <a:cs typeface="Courier New"/>
+                <a:sym typeface="Courier New"/>
+              </a:rPr>
+              <a:t>(new Htmx())</a:t>
+            </a:r>
+            <a:endParaRPr/>
+          </a:p>
+          <a:p>
+            <a:pPr indent="0" lvl="0" marL="0" marR="0" rtl="0" algn="l">
+              <a:lnSpc>
+                <a:spcPct val="122000"/>
+              </a:lnSpc>
+              <a:spcBef>
+                <a:spcPts val="0"/>
+              </a:spcBef>
+              <a:spcAft>
+                <a:spcPts val="0"/>
+              </a:spcAft>
+              <a:buNone/>
+            </a:pPr>
+            <a:r>
+              <a:rPr b="0" i="0" lang="en-US" sz="1250">
+                <a:solidFill>
+                  <a:srgbClr val="D8E4F5"/>
+                </a:solidFill>
+                <a:latin typeface="Courier New"/>
+                <a:ea typeface="Courier New"/>
+                <a:cs typeface="Courier New"/>
+                <a:sym typeface="Courier New"/>
+              </a:rPr>
+              <a:t>  -&gt;get(Url::fromRoute('my_module.filter_results'))</a:t>
+            </a:r>
+            <a:endParaRPr/>
+          </a:p>
+          <a:p>
+            <a:pPr indent="0" lvl="0" marL="0" marR="0" rtl="0" algn="l">
+              <a:lnSpc>
+                <a:spcPct val="122000"/>
+              </a:lnSpc>
+              <a:spcBef>
+                <a:spcPts val="0"/>
+              </a:spcBef>
+              <a:spcAft>
+                <a:spcPts val="0"/>
+              </a:spcAft>
+              <a:buNone/>
+            </a:pPr>
+            <a:r>
+              <a:rPr b="0" i="0" lang="en-US" sz="1250">
+                <a:solidFill>
+                  <a:srgbClr val="D8E4F5"/>
+                </a:solidFill>
+                <a:latin typeface="Courier New"/>
+                <a:ea typeface="Courier New"/>
+                <a:cs typeface="Courier New"/>
+                <a:sym typeface="Courier New"/>
+              </a:rPr>
+              <a:t>  -&gt;trigger('change')</a:t>
+            </a:r>
+            <a:endParaRPr/>
+          </a:p>
+          <a:p>
+            <a:pPr indent="0" lvl="0" marL="0" marR="0" rtl="0" algn="l">
+              <a:lnSpc>
+                <a:spcPct val="122000"/>
+              </a:lnSpc>
+              <a:spcBef>
+                <a:spcPts val="0"/>
+              </a:spcBef>
+              <a:spcAft>
+                <a:spcPts val="0"/>
+              </a:spcAft>
+              <a:buNone/>
+            </a:pPr>
+            <a:r>
+              <a:rPr b="0" i="0" lang="en-US" sz="1250">
+                <a:solidFill>
+                  <a:srgbClr val="D8E4F5"/>
+                </a:solidFill>
+                <a:latin typeface="Courier New"/>
+                <a:ea typeface="Courier New"/>
+                <a:cs typeface="Courier New"/>
+                <a:sym typeface="Courier New"/>
+              </a:rPr>
+              <a:t>  -&gt;target('#results')</a:t>
+            </a:r>
+            <a:endParaRPr/>
+          </a:p>
+          <a:p>
+            <a:pPr indent="0" lvl="0" marL="0" marR="0" rtl="0" algn="l">
+              <a:lnSpc>
+                <a:spcPct val="122000"/>
+              </a:lnSpc>
+              <a:spcBef>
+                <a:spcPts val="0"/>
+              </a:spcBef>
+              <a:spcAft>
+                <a:spcPts val="0"/>
+              </a:spcAft>
+              <a:buNone/>
+            </a:pPr>
+            <a:r>
+              <a:rPr b="0" i="0" lang="en-US" sz="1250">
+                <a:solidFill>
+                  <a:srgbClr val="D8E4F5"/>
+                </a:solidFill>
+                <a:latin typeface="Courier New"/>
+                <a:ea typeface="Courier New"/>
+                <a:cs typeface="Courier New"/>
+                <a:sym typeface="Courier New"/>
+              </a:rPr>
+              <a:t>  -&gt;swap('innerHTML')</a:t>
+            </a:r>
+            <a:endParaRPr/>
+          </a:p>
+          <a:p>
+            <a:pPr indent="0" lvl="0" marL="0" marR="0" rtl="0" algn="l">
+              <a:lnSpc>
+                <a:spcPct val="122000"/>
+              </a:lnSpc>
+              <a:spcBef>
+                <a:spcPts val="0"/>
+              </a:spcBef>
+              <a:spcAft>
+                <a:spcPts val="0"/>
+              </a:spcAft>
+              <a:buNone/>
+            </a:pPr>
+            <a:r>
+              <a:rPr b="0" i="0" lang="en-US" sz="1250">
+                <a:solidFill>
+                  <a:srgbClr val="D8E4F5"/>
+                </a:solidFill>
+                <a:latin typeface="Courier New"/>
+                <a:ea typeface="Courier New"/>
+                <a:cs typeface="Courier New"/>
+                <a:sym typeface="Courier New"/>
+              </a:rPr>
+              <a:t>  -&gt;applyTo($form['filter']);</a:t>
+            </a:r>
+            <a:endParaRPr/>
+          </a:p>
+        </p:txBody>
+      </p:sp>
+      <p:sp>
+        <p:nvSpPr>
+          <p:cNvPr id="288" name="Google Shape;288;p33"/>
+          <p:cNvSpPr txBox="1"/>
+          <p:nvPr/>
+        </p:nvSpPr>
+        <p:spPr>
+          <a:xfrm>
+            <a:off x="640080" y="4585648"/>
+            <a:ext cx="10908900" cy="215400"/>
+          </a:xfrm>
+          <a:prstGeom prst="rect">
+            <a:avLst/>
+          </a:prstGeom>
+          <a:noFill/>
+          <a:ln>
+            <a:noFill/>
+          </a:ln>
+        </p:spPr>
+        <p:txBody>
+          <a:bodyPr anchorCtr="0" anchor="t" bIns="0" lIns="0" spcFirstLastPara="1" rIns="0" wrap="square" tIns="0">
+            <a:spAutoFit/>
+          </a:bodyPr>
+          <a:lstStyle/>
+          <a:p>
+            <a:pPr indent="0" lvl="0" marL="0" marR="0" rtl="0" algn="l">
+              <a:lnSpc>
+                <a:spcPct val="115000"/>
+              </a:lnSpc>
+              <a:spcBef>
+                <a:spcPts val="0"/>
+              </a:spcBef>
+              <a:spcAft>
+                <a:spcPts val="0"/>
+              </a:spcAft>
+              <a:buNone/>
+            </a:pPr>
+            <a:r>
+              <a:rPr b="0" i="0" lang="en-US" sz="1400">
+                <a:solidFill>
+                  <a:srgbClr val="5B6378"/>
+                </a:solidFill>
+                <a:latin typeface="Calibri"/>
+                <a:ea typeface="Calibri"/>
+                <a:cs typeface="Calibri"/>
+                <a:sym typeface="Calibri"/>
+              </a:rPr>
+              <a:t>The same four attributes from §3, built in PHP. applyTo() attaches core/drupal.htmx, which loads the response's assets and re-attaches Drupal.behaviors after every swap.</a:t>
+            </a:r>
+            <a:endParaRPr/>
+          </a:p>
+        </p:txBody>
+      </p:sp>
+      <p:sp>
+        <p:nvSpPr>
+          <p:cNvPr id="289" name="Google Shape;289;p33"/>
+          <p:cNvSpPr txBox="1"/>
+          <p:nvPr>
+            <p:ph type="title"/>
+          </p:nvPr>
+        </p:nvSpPr>
+        <p:spPr>
+          <a:xfrm>
+            <a:off x="525150" y="428675"/>
+            <a:ext cx="10773600" cy="627900"/>
+          </a:xfrm>
+          <a:prstGeom prst="rect">
+            <a:avLst/>
+          </a:prstGeom>
+          <a:noFill/>
+          <a:ln>
+            <a:noFill/>
+          </a:ln>
+        </p:spPr>
+        <p:txBody>
+          <a:bodyPr anchorCtr="0" anchor="ctr" bIns="45700" lIns="91425" spcFirstLastPara="1" rIns="91425" wrap="square" tIns="45700">
+            <a:normAutofit/>
+          </a:bodyPr>
+          <a:lstStyle/>
+          <a:p>
+            <a:pPr indent="0" lvl="0" marL="0" rtl="0" algn="l">
+              <a:spcBef>
+                <a:spcPts val="0"/>
+              </a:spcBef>
+              <a:spcAft>
+                <a:spcPts val="0"/>
+              </a:spcAft>
+              <a:buClr>
+                <a:srgbClr val="23325D"/>
+              </a:buClr>
+              <a:buSzPts val="3400"/>
+              <a:buFont typeface="Calibri"/>
+              <a:buNone/>
+            </a:pPr>
+            <a:r>
+              <a:rPr lang="en-US" sz="3400"/>
+              <a:t>Core does the glue</a:t>
+            </a:r>
+            <a:endParaRPr sz="3400"/>
+          </a:p>
+        </p:txBody>
+      </p:sp>
+      <p:sp>
+        <p:nvSpPr>
+          <p:cNvPr id="290" name="Google Shape;290;p33"/>
+          <p:cNvSpPr txBox="1"/>
+          <p:nvPr/>
+        </p:nvSpPr>
+        <p:spPr>
+          <a:xfrm>
+            <a:off x="640080" y="320040"/>
+            <a:ext cx="7315200" cy="215400"/>
+          </a:xfrm>
+          <a:prstGeom prst="rect">
+            <a:avLst/>
+          </a:prstGeom>
+          <a:noFill/>
+          <a:ln>
+            <a:noFill/>
+          </a:ln>
+        </p:spPr>
+        <p:txBody>
+          <a:bodyPr anchorCtr="0" anchor="t" bIns="0" lIns="0" spcFirstLastPara="1" rIns="0" wrap="square" tIns="0">
+            <a:spAutoFit/>
+          </a:bodyPr>
+          <a:lstStyle/>
+          <a:p>
+            <a:pPr indent="0" lvl="0" marL="0" marR="0" rtl="0" algn="l">
+              <a:spcBef>
+                <a:spcPts val="0"/>
+              </a:spcBef>
+              <a:spcAft>
+                <a:spcPts val="0"/>
+              </a:spcAft>
+              <a:buClr>
+                <a:srgbClr val="000000"/>
+              </a:buClr>
+              <a:buFont typeface="Arial"/>
+              <a:buNone/>
+            </a:pPr>
+            <a:r>
+              <a:t/>
+            </a:r>
+            <a:endParaRPr/>
+          </a:p>
+        </p:txBody>
+      </p:sp>
+    </p:spTree>
+  </p:cSld>
+  <p:clrMapOvr>
+    <a:masterClrMapping/>
+  </p:clrMapOvr>
+</p:sld>
+</file>
+
+<file path=ppt/slides/slide28.xml><?xml version="1.0" encoding="utf-8"?>
+<p:sld xmlns:a="http://schemas.openxmlformats.org/drawingml/2006/main" xmlns:r="http://schemas.openxmlformats.org/officeDocument/2006/relationships" xmlns:mc="http://schemas.openxmlformats.org/markup-compatibility/2006" xmlns:mv="urn:schemas-microsoft-com:mac:vml" xmlns:p="http://schemas.openxmlformats.org/presentationml/2006/main" xmlns:c="http://schemas.openxmlformats.org/drawingml/2006/chart" xmlns:dgm="http://schemas.openxmlformats.org/drawingml/2006/diagram" xmlns:o="urn:schemas-microsoft-com:office:office" xmlns:v="urn:schemas-microsoft-com:vml" xmlns:pvml="urn:schemas-microsoft-com:office:powerpoint" xmlns:com="http://schemas.openxmlformats.org/drawingml/2006/compatibility" xmlns:p14="http://schemas.microsoft.com/office/powerpoint/2010/main" xmlns:p15="http://schemas.microsoft.com/office/powerpoint/2012/main" xmlns:ahyp="http://schemas.microsoft.com/office/drawing/2018/hyperlinkcolor">
+  <p:cSld>
+    <p:spTree>
+      <p:nvGrpSpPr>
         <p:cNvPr id="295" name="Shape 295"/>
         <p:cNvGrpSpPr/>
         <p:nvPr/>
@@ -18396,7 +19517,7 @@
 </p:sld>
 </file>
 
-<file path=ppt/slides/slide28.xml><?xml version="1.0" encoding="utf-8"?>
+<file path=ppt/slides/slide29.xml><?xml version="1.0" encoding="utf-8"?>
 <p:sld xmlns:a="http://schemas.openxmlformats.org/drawingml/2006/main" xmlns:r="http://schemas.openxmlformats.org/officeDocument/2006/relationships" xmlns:mc="http://schemas.openxmlformats.org/markup-compatibility/2006" xmlns:mv="urn:schemas-microsoft-com:mac:vml" xmlns:p="http://schemas.openxmlformats.org/presentationml/2006/main" xmlns:c="http://schemas.openxmlformats.org/drawingml/2006/chart" xmlns:dgm="http://schemas.openxmlformats.org/drawingml/2006/diagram" xmlns:o="urn:schemas-microsoft-com:office:office" xmlns:v="urn:schemas-microsoft-com:vml" xmlns:pvml="urn:schemas-microsoft-com:office:powerpoint" xmlns:com="http://schemas.openxmlformats.org/drawingml/2006/compatibility" xmlns:p14="http://schemas.microsoft.com/office/powerpoint/2010/main" xmlns:p15="http://schemas.microsoft.com/office/powerpoint/2012/main" xmlns:ahyp="http://schemas.microsoft.com/office/drawing/2018/hyperlinkcolor">
   <p:cSld>
     <p:spTree>
@@ -18616,7 +19737,7 @@
                           <a:cs typeface="Calibri"/>
                           <a:sym typeface="Calibri"/>
                         </a:rPr>
-                        <a:t>A route + controller</a:t>
+                        <a:t>A route + controller (_htmx_route)</a:t>
                       </a:r>
                       <a:endParaRPr/>
                     </a:p>
@@ -18883,196 +20004,6 @@
 </p:sld>
 </file>
 
-<file path=ppt/slides/slide29.xml><?xml version="1.0" encoding="utf-8"?>
-<p:sld xmlns:a="http://schemas.openxmlformats.org/drawingml/2006/main" xmlns:r="http://schemas.openxmlformats.org/officeDocument/2006/relationships" xmlns:mc="http://schemas.openxmlformats.org/markup-compatibility/2006" xmlns:mv="urn:schemas-microsoft-com:mac:vml" xmlns:p="http://schemas.openxmlformats.org/presentationml/2006/main" xmlns:c="http://schemas.openxmlformats.org/drawingml/2006/chart" xmlns:dgm="http://schemas.openxmlformats.org/drawingml/2006/diagram" xmlns:o="urn:schemas-microsoft-com:office:office" xmlns:v="urn:schemas-microsoft-com:vml" xmlns:pvml="urn:schemas-microsoft-com:office:powerpoint" xmlns:com="http://schemas.openxmlformats.org/drawingml/2006/compatibility" xmlns:p14="http://schemas.microsoft.com/office/powerpoint/2010/main" xmlns:p15="http://schemas.microsoft.com/office/powerpoint/2012/main" xmlns:ahyp="http://schemas.microsoft.com/office/drawing/2018/hyperlinkcolor">
-  <p:cSld>
-    <p:spTree>
-      <p:nvGrpSpPr>
-        <p:cNvPr id="313" name="Shape 313"/>
-        <p:cNvGrpSpPr/>
-        <p:nvPr/>
-      </p:nvGrpSpPr>
-      <p:grpSpPr>
-        <a:xfrm>
-          <a:off x="0" y="0"/>
-          <a:ext cx="0" cy="0"/>
-          <a:chOff x="0" y="0"/>
-          <a:chExt cx="0" cy="0"/>
-        </a:xfrm>
-      </p:grpSpPr>
-      <p:sp>
-        <p:nvSpPr>
-          <p:cNvPr id="314" name="Google Shape;314;p36"/>
-          <p:cNvSpPr txBox="1"/>
-          <p:nvPr>
-            <p:ph type="title"/>
-          </p:nvPr>
-        </p:nvSpPr>
-        <p:spPr>
-          <a:xfrm>
-            <a:off x="887095" y="1533525"/>
-            <a:ext cx="10835640" cy="1085850"/>
-          </a:xfrm>
-          <a:prstGeom prst="rect">
-            <a:avLst/>
-          </a:prstGeom>
-          <a:noFill/>
-          <a:ln>
-            <a:noFill/>
-          </a:ln>
-        </p:spPr>
-        <p:txBody>
-          <a:bodyPr anchorCtr="0" anchor="t" bIns="45700" lIns="91425" spcFirstLastPara="1" rIns="91425" wrap="square" tIns="45700">
-            <a:normAutofit/>
-          </a:bodyPr>
-          <a:lstStyle/>
-          <a:p>
-            <a:pPr indent="0" lvl="0" marL="0" rtl="0" algn="l">
-              <a:lnSpc>
-                <a:spcPct val="90000"/>
-              </a:lnSpc>
-              <a:spcBef>
-                <a:spcPts val="0"/>
-              </a:spcBef>
-              <a:spcAft>
-                <a:spcPts val="0"/>
-              </a:spcAft>
-              <a:buClr>
-                <a:srgbClr val="23325D"/>
-              </a:buClr>
-              <a:buSzPts val="3600"/>
-              <a:buFont typeface="Calibri"/>
-              <a:buNone/>
-            </a:pPr>
-            <a:r>
-              <a:rPr lang="en-US" sz="3600">
-                <a:solidFill>
-                  <a:srgbClr val="23325D"/>
-                </a:solidFill>
-              </a:rPr>
-              <a:t>Live Demo</a:t>
-            </a:r>
-            <a:endParaRPr/>
-          </a:p>
-        </p:txBody>
-      </p:sp>
-      <p:sp>
-        <p:nvSpPr>
-          <p:cNvPr id="315" name="Google Shape;315;p36"/>
-          <p:cNvSpPr txBox="1"/>
-          <p:nvPr>
-            <p:ph idx="1" type="body"/>
-          </p:nvPr>
-        </p:nvSpPr>
-        <p:spPr>
-          <a:xfrm>
-            <a:off x="887095" y="2679065"/>
-            <a:ext cx="10835640" cy="1499870"/>
-          </a:xfrm>
-          <a:prstGeom prst="rect">
-            <a:avLst/>
-          </a:prstGeom>
-          <a:noFill/>
-          <a:ln>
-            <a:noFill/>
-          </a:ln>
-        </p:spPr>
-        <p:txBody>
-          <a:bodyPr anchorCtr="0" anchor="t" bIns="45700" lIns="91425" spcFirstLastPara="1" rIns="91425" wrap="square" tIns="45700">
-            <a:normAutofit/>
-          </a:bodyPr>
-          <a:lstStyle/>
-          <a:p>
-            <a:pPr indent="0" lvl="0" marL="0" rtl="0" algn="l">
-              <a:lnSpc>
-                <a:spcPct val="130000"/>
-              </a:lnSpc>
-              <a:spcBef>
-                <a:spcPts val="0"/>
-              </a:spcBef>
-              <a:spcAft>
-                <a:spcPts val="0"/>
-              </a:spcAft>
-              <a:buClr>
-                <a:srgbClr val="9AA3B5"/>
-              </a:buClr>
-              <a:buSzPts val="1800"/>
-              <a:buNone/>
-            </a:pPr>
-            <a:r>
-              <a:rPr b="0" i="1" lang="en-US" sz="1800">
-                <a:solidFill>
-                  <a:srgbClr val="9AA3B5"/>
-                </a:solidFill>
-                <a:latin typeface="Calibri"/>
-                <a:ea typeface="Calibri"/>
-                <a:cs typeface="Calibri"/>
-                <a:sym typeface="Calibri"/>
-              </a:rPr>
-              <a:t>PLACEHOLDER — dynamic form, filter &amp; partial update, one combined demo built/walked through live in the browser.</a:t>
-            </a:r>
-            <a:endParaRPr/>
-          </a:p>
-        </p:txBody>
-      </p:sp>
-      <p:sp>
-        <p:nvSpPr>
-          <p:cNvPr id="316" name="Google Shape;316;p36"/>
-          <p:cNvSpPr txBox="1"/>
-          <p:nvPr/>
-        </p:nvSpPr>
-        <p:spPr>
-          <a:xfrm>
-            <a:off x="7589520" y="4297680"/>
-            <a:ext cx="3931920" cy="2103120"/>
-          </a:xfrm>
-          <a:prstGeom prst="rect">
-            <a:avLst/>
-          </a:prstGeom>
-          <a:noFill/>
-          <a:ln>
-            <a:noFill/>
-          </a:ln>
-        </p:spPr>
-        <p:txBody>
-          <a:bodyPr anchorCtr="0" anchor="ctr" bIns="0" lIns="0" spcFirstLastPara="1" rIns="0" wrap="square" tIns="0">
-            <a:spAutoFit/>
-          </a:bodyPr>
-          <a:lstStyle/>
-          <a:p>
-            <a:pPr indent="0" lvl="0" marL="0" marR="0" rtl="0" algn="r">
-              <a:spcBef>
-                <a:spcPts val="0"/>
-              </a:spcBef>
-              <a:spcAft>
-                <a:spcPts val="0"/>
-              </a:spcAft>
-              <a:buNone/>
-            </a:pPr>
-            <a:r>
-              <a:rPr b="1" i="0" lang="en-US" sz="17000">
-                <a:solidFill>
-                  <a:srgbClr val="FBDAD3"/>
-                </a:solidFill>
-                <a:latin typeface="Courier New"/>
-                <a:ea typeface="Courier New"/>
-                <a:cs typeface="Courier New"/>
-                <a:sym typeface="Courier New"/>
-              </a:rPr>
-              <a:t>05</a:t>
-            </a:r>
-            <a:endParaRPr/>
-          </a:p>
-        </p:txBody>
-      </p:sp>
-    </p:spTree>
-  </p:cSld>
-  <p:clrMapOvr>
-    <a:masterClrMapping/>
-  </p:clrMapOvr>
-</p:sld>
-</file>
-
 <file path=ppt/slides/slide3.xml><?xml version="1.0" encoding="utf-8"?>
 <p:sld xmlns:a="http://schemas.openxmlformats.org/drawingml/2006/main" xmlns:r="http://schemas.openxmlformats.org/officeDocument/2006/relationships" xmlns:mc="http://schemas.openxmlformats.org/markup-compatibility/2006" xmlns:mv="urn:schemas-microsoft-com:mac:vml" xmlns:p="http://schemas.openxmlformats.org/presentationml/2006/main" xmlns:c="http://schemas.openxmlformats.org/drawingml/2006/chart" xmlns:dgm="http://schemas.openxmlformats.org/drawingml/2006/diagram" xmlns:o="urn:schemas-microsoft-com:office:office" xmlns:v="urn:schemas-microsoft-com:vml" xmlns:pvml="urn:schemas-microsoft-com:office:powerpoint" xmlns:com="http://schemas.openxmlformats.org/drawingml/2006/compatibility" xmlns:p14="http://schemas.microsoft.com/office/powerpoint/2010/main" xmlns:p15="http://schemas.microsoft.com/office/powerpoint/2012/main" xmlns:ahyp="http://schemas.microsoft.com/office/drawing/2018/hyperlinkcolor">
   <p:cSld>
@@ -19280,6 +20211,196 @@
   <p:cSld>
     <p:spTree>
       <p:nvGrpSpPr>
+        <p:cNvPr id="313" name="Shape 313"/>
+        <p:cNvGrpSpPr/>
+        <p:nvPr/>
+      </p:nvGrpSpPr>
+      <p:grpSpPr>
+        <a:xfrm>
+          <a:off x="0" y="0"/>
+          <a:ext cx="0" cy="0"/>
+          <a:chOff x="0" y="0"/>
+          <a:chExt cx="0" cy="0"/>
+        </a:xfrm>
+      </p:grpSpPr>
+      <p:sp>
+        <p:nvSpPr>
+          <p:cNvPr id="314" name="Google Shape;314;p36"/>
+          <p:cNvSpPr txBox="1"/>
+          <p:nvPr>
+            <p:ph type="title"/>
+          </p:nvPr>
+        </p:nvSpPr>
+        <p:spPr>
+          <a:xfrm>
+            <a:off x="887095" y="1533525"/>
+            <a:ext cx="10835640" cy="1085850"/>
+          </a:xfrm>
+          <a:prstGeom prst="rect">
+            <a:avLst/>
+          </a:prstGeom>
+          <a:noFill/>
+          <a:ln>
+            <a:noFill/>
+          </a:ln>
+        </p:spPr>
+        <p:txBody>
+          <a:bodyPr anchorCtr="0" anchor="t" bIns="45700" lIns="91425" spcFirstLastPara="1" rIns="91425" wrap="square" tIns="45700">
+            <a:normAutofit/>
+          </a:bodyPr>
+          <a:lstStyle/>
+          <a:p>
+            <a:pPr indent="0" lvl="0" marL="0" rtl="0" algn="l">
+              <a:lnSpc>
+                <a:spcPct val="90000"/>
+              </a:lnSpc>
+              <a:spcBef>
+                <a:spcPts val="0"/>
+              </a:spcBef>
+              <a:spcAft>
+                <a:spcPts val="0"/>
+              </a:spcAft>
+              <a:buClr>
+                <a:srgbClr val="23325D"/>
+              </a:buClr>
+              <a:buSzPts val="3600"/>
+              <a:buFont typeface="Calibri"/>
+              <a:buNone/>
+            </a:pPr>
+            <a:r>
+              <a:rPr lang="en-US" sz="3600">
+                <a:solidFill>
+                  <a:srgbClr val="23325D"/>
+                </a:solidFill>
+              </a:rPr>
+              <a:t>Live Demo</a:t>
+            </a:r>
+            <a:endParaRPr/>
+          </a:p>
+        </p:txBody>
+      </p:sp>
+      <p:sp>
+        <p:nvSpPr>
+          <p:cNvPr id="315" name="Google Shape;315;p36"/>
+          <p:cNvSpPr txBox="1"/>
+          <p:nvPr>
+            <p:ph idx="1" type="body"/>
+          </p:nvPr>
+        </p:nvSpPr>
+        <p:spPr>
+          <a:xfrm>
+            <a:off x="887095" y="2679065"/>
+            <a:ext cx="10835640" cy="1499870"/>
+          </a:xfrm>
+          <a:prstGeom prst="rect">
+            <a:avLst/>
+          </a:prstGeom>
+          <a:noFill/>
+          <a:ln>
+            <a:noFill/>
+          </a:ln>
+        </p:spPr>
+        <p:txBody>
+          <a:bodyPr anchorCtr="0" anchor="t" bIns="45700" lIns="91425" spcFirstLastPara="1" rIns="91425" wrap="square" tIns="45700">
+            <a:normAutofit/>
+          </a:bodyPr>
+          <a:lstStyle/>
+          <a:p>
+            <a:pPr indent="0" lvl="0" marL="0" rtl="0" algn="l">
+              <a:lnSpc>
+                <a:spcPct val="130000"/>
+              </a:lnSpc>
+              <a:spcBef>
+                <a:spcPts val="0"/>
+              </a:spcBef>
+              <a:spcAft>
+                <a:spcPts val="0"/>
+              </a:spcAft>
+              <a:buClr>
+                <a:srgbClr val="9AA3B5"/>
+              </a:buClr>
+              <a:buSzPts val="1800"/>
+              <a:buNone/>
+            </a:pPr>
+            <a:r>
+              <a:rPr b="0" i="1" lang="en-US" sz="1800">
+                <a:solidFill>
+                  <a:srgbClr val="9AA3B5"/>
+                </a:solidFill>
+                <a:latin typeface="Calibri"/>
+                <a:ea typeface="Calibri"/>
+                <a:cs typeface="Calibri"/>
+                <a:sym typeface="Calibri"/>
+              </a:rPr>
+              <a:t>PLACEHOLDER — dynamic form, filter &amp; partial update, one combined demo built/walked through live in the browser.</a:t>
+            </a:r>
+            <a:endParaRPr/>
+          </a:p>
+        </p:txBody>
+      </p:sp>
+      <p:sp>
+        <p:nvSpPr>
+          <p:cNvPr id="316" name="Google Shape;316;p36"/>
+          <p:cNvSpPr txBox="1"/>
+          <p:nvPr/>
+        </p:nvSpPr>
+        <p:spPr>
+          <a:xfrm>
+            <a:off x="7589520" y="4297680"/>
+            <a:ext cx="3931920" cy="2103120"/>
+          </a:xfrm>
+          <a:prstGeom prst="rect">
+            <a:avLst/>
+          </a:prstGeom>
+          <a:noFill/>
+          <a:ln>
+            <a:noFill/>
+          </a:ln>
+        </p:spPr>
+        <p:txBody>
+          <a:bodyPr anchorCtr="0" anchor="ctr" bIns="0" lIns="0" spcFirstLastPara="1" rIns="0" wrap="square" tIns="0">
+            <a:spAutoFit/>
+          </a:bodyPr>
+          <a:lstStyle/>
+          <a:p>
+            <a:pPr indent="0" lvl="0" marL="0" marR="0" rtl="0" algn="r">
+              <a:spcBef>
+                <a:spcPts val="0"/>
+              </a:spcBef>
+              <a:spcAft>
+                <a:spcPts val="0"/>
+              </a:spcAft>
+              <a:buNone/>
+            </a:pPr>
+            <a:r>
+              <a:rPr b="1" i="0" lang="en-US" sz="17000">
+                <a:solidFill>
+                  <a:srgbClr val="FBDAD3"/>
+                </a:solidFill>
+                <a:latin typeface="Courier New"/>
+                <a:ea typeface="Courier New"/>
+                <a:cs typeface="Courier New"/>
+                <a:sym typeface="Courier New"/>
+              </a:rPr>
+              <a:t>05</a:t>
+            </a:r>
+            <a:endParaRPr/>
+          </a:p>
+        </p:txBody>
+      </p:sp>
+    </p:spTree>
+  </p:cSld>
+  <p:clrMapOvr>
+    <a:masterClrMapping/>
+  </p:clrMapOvr>
+</p:sld>
+</file>
+
+<file path=ppt/slides/slide31.xml><?xml version="1.0" encoding="utf-8"?>
+<p:sld xmlns:a="http://schemas.openxmlformats.org/drawingml/2006/main" xmlns:r="http://schemas.openxmlformats.org/officeDocument/2006/relationships" xmlns:mc="http://schemas.openxmlformats.org/markup-compatibility/2006" xmlns:mv="urn:schemas-microsoft-com:mac:vml" xmlns:p="http://schemas.openxmlformats.org/presentationml/2006/main" xmlns:c="http://schemas.openxmlformats.org/drawingml/2006/chart" xmlns:dgm="http://schemas.openxmlformats.org/drawingml/2006/diagram" xmlns:o="urn:schemas-microsoft-com:office:office" xmlns:v="urn:schemas-microsoft-com:vml" xmlns:pvml="urn:schemas-microsoft-com:office:powerpoint" xmlns:com="http://schemas.openxmlformats.org/drawingml/2006/compatibility" xmlns:p14="http://schemas.microsoft.com/office/powerpoint/2010/main" xmlns:p15="http://schemas.microsoft.com/office/powerpoint/2012/main" xmlns:ahyp="http://schemas.microsoft.com/office/drawing/2018/hyperlinkcolor">
+  <p:cSld>
+    <p:spTree>
+      <p:nvGrpSpPr>
         <p:cNvPr id="321" name="Shape 321"/>
         <p:cNvGrpSpPr/>
         <p:nvPr/>
@@ -19422,7 +20543,7 @@
 </p:sld>
 </file>
 
-<file path=ppt/slides/slide31.xml><?xml version="1.0" encoding="utf-8"?>
+<file path=ppt/slides/slide32.xml><?xml version="1.0" encoding="utf-8"?>
 <p:sld xmlns:a="http://schemas.openxmlformats.org/drawingml/2006/main" xmlns:r="http://schemas.openxmlformats.org/officeDocument/2006/relationships" xmlns:mc="http://schemas.openxmlformats.org/markup-compatibility/2006" xmlns:mv="urn:schemas-microsoft-com:mac:vml" xmlns:p="http://schemas.openxmlformats.org/presentationml/2006/main" xmlns:c="http://schemas.openxmlformats.org/drawingml/2006/chart" xmlns:dgm="http://schemas.openxmlformats.org/drawingml/2006/diagram" xmlns:o="urn:schemas-microsoft-com:office:office" xmlns:v="urn:schemas-microsoft-com:vml" xmlns:pvml="urn:schemas-microsoft-com:office:powerpoint" xmlns:com="http://schemas.openxmlformats.org/drawingml/2006/compatibility" xmlns:p14="http://schemas.microsoft.com/office/powerpoint/2010/main" xmlns:p15="http://schemas.microsoft.com/office/powerpoint/2012/main" xmlns:ahyp="http://schemas.microsoft.com/office/drawing/2018/hyperlinkcolor">
   <p:cSld>
     <p:spTree>
@@ -19614,7 +20735,7 @@
                 <a:cs typeface="Calibri"/>
                 <a:sym typeface="Calibri"/>
               </a:rPr>
-              <a:t>More ceremony — but native Form API integration (wizards, validation) comes free.</a:t>
+              <a:t>More ceremony - but the most proven path for complex multi-step forms and wizards.</a:t>
             </a:r>
             <a:endParaRPr/>
           </a:p>
@@ -19695,7 +20816,7 @@
                 <a:cs typeface="Calibri"/>
                 <a:sym typeface="Calibri"/>
               </a:rPr>
-              <a:t>Far less ceremony — but state management for anything multi-step is on you.</a:t>
+              <a:t>Far less ceremony. 11.3 rebuilds forms from HTMX requests, but complex multi-step flows are less proven.</a:t>
             </a:r>
             <a:endParaRPr/>
           </a:p>
@@ -19826,7 +20947,7 @@
                 <a:cs typeface="Calibri"/>
                 <a:sym typeface="Calibri"/>
               </a:rPr>
-              <a:t>JSON command stack + behavior reattachment on every response.</a:t>
+              <a:t>JSON command stack, run command by command in the browser.</a:t>
             </a:r>
             <a:endParaRPr/>
           </a:p>
@@ -19907,7 +21028,7 @@
                 <a:cs typeface="Calibri"/>
                 <a:sym typeface="Calibri"/>
               </a:rPr>
-              <a:t>~14kb library; the response is the HTML fragment itself.</a:t>
+              <a:t>~16kb library; the response is the HTML itself. Up to 71% less JS loaded, per drupal.org.</a:t>
             </a:r>
             <a:endParaRPr/>
           </a:p>
@@ -19921,7 +21042,7 @@
 </p:sld>
 </file>
 
-<file path=ppt/slides/slide32.xml><?xml version="1.0" encoding="utf-8"?>
+<file path=ppt/slides/slide33.xml><?xml version="1.0" encoding="utf-8"?>
 <p:sld xmlns:a="http://schemas.openxmlformats.org/drawingml/2006/main" xmlns:r="http://schemas.openxmlformats.org/officeDocument/2006/relationships" xmlns:mc="http://schemas.openxmlformats.org/markup-compatibility/2006" xmlns:mv="urn:schemas-microsoft-com:mac:vml" xmlns:p="http://schemas.openxmlformats.org/presentationml/2006/main" xmlns:c="http://schemas.openxmlformats.org/drawingml/2006/chart" xmlns:dgm="http://schemas.openxmlformats.org/drawingml/2006/diagram" xmlns:o="urn:schemas-microsoft-com:office:office" xmlns:v="urn:schemas-microsoft-com:vml" xmlns:pvml="urn:schemas-microsoft-com:office:powerpoint" xmlns:com="http://schemas.openxmlformats.org/drawingml/2006/compatibility" xmlns:p14="http://schemas.microsoft.com/office/powerpoint/2010/main" xmlns:p15="http://schemas.microsoft.com/office/powerpoint/2012/main" xmlns:ahyp="http://schemas.microsoft.com/office/drawing/2018/hyperlinkcolor">
   <p:cSld>
     <p:spTree>
@@ -20311,7 +21432,7 @@
 </p:sld>
 </file>
 
-<file path=ppt/slides/slide33.xml><?xml version="1.0" encoding="utf-8"?>
+<file path=ppt/slides/slide34.xml><?xml version="1.0" encoding="utf-8"?>
 <p:sld xmlns:a="http://schemas.openxmlformats.org/drawingml/2006/main" xmlns:r="http://schemas.openxmlformats.org/officeDocument/2006/relationships" xmlns:mc="http://schemas.openxmlformats.org/markup-compatibility/2006" xmlns:mv="urn:schemas-microsoft-com:mac:vml" xmlns:p="http://schemas.openxmlformats.org/presentationml/2006/main" xmlns:c="http://schemas.openxmlformats.org/drawingml/2006/chart" xmlns:dgm="http://schemas.openxmlformats.org/drawingml/2006/diagram" xmlns:o="urn:schemas-microsoft-com:office:office" xmlns:v="urn:schemas-microsoft-com:vml" xmlns:pvml="urn:schemas-microsoft-com:office:powerpoint" xmlns:com="http://schemas.openxmlformats.org/drawingml/2006/compatibility" xmlns:p14="http://schemas.microsoft.com/office/powerpoint/2010/main" xmlns:p15="http://schemas.microsoft.com/office/powerpoint/2012/main" xmlns:ahyp="http://schemas.microsoft.com/office/drawing/2018/hyperlinkcolor">
   <p:cSld>
     <p:spTree>
@@ -20572,7 +21693,7 @@
                           <a:cs typeface="Calibri"/>
                           <a:sym typeface="Calibri"/>
                         </a:rPr>
-                        <a:t>More ceremony, native Form API integration</a:t>
+                        <a:t>More ceremony, most proven for complex multi-step forms</a:t>
                       </a:r>
                       <a:endParaRPr/>
                     </a:p>
@@ -20607,7 +21728,7 @@
                           <a:cs typeface="Calibri"/>
                           <a:sym typeface="Calibri"/>
                         </a:rPr>
-                        <a:t>Less ceremony, state management is on you</a:t>
+                        <a:t>Less ceremony, multi-step patterns still maturing</a:t>
                       </a:r>
                       <a:endParaRPr/>
                     </a:p>
@@ -20679,7 +21800,7 @@
                           <a:cs typeface="Calibri"/>
                           <a:sym typeface="Calibri"/>
                         </a:rPr>
-                        <a:t>Command-stack + behavior reattachment overhead</a:t>
+                        <a:t>JSON command stack, executed client-side</a:t>
                       </a:r>
                       <a:endParaRPr/>
                     </a:p>
@@ -20714,7 +21835,7 @@
                           <a:cs typeface="Calibri"/>
                           <a:sym typeface="Calibri"/>
                         </a:rPr>
-                        <a:t>Small library, HTML-fragment response</a:t>
+                        <a:t>Small library, HTML response, up to 71% less JS</a:t>
                       </a:r>
                       <a:endParaRPr/>
                     </a:p>
@@ -20918,7 +22039,7 @@
 </p:sld>
 </file>
 
-<file path=ppt/slides/slide34.xml><?xml version="1.0" encoding="utf-8"?>
+<file path=ppt/slides/slide35.xml><?xml version="1.0" encoding="utf-8"?>
 <p:sld xmlns:a="http://schemas.openxmlformats.org/drawingml/2006/main" xmlns:r="http://schemas.openxmlformats.org/officeDocument/2006/relationships" xmlns:mc="http://schemas.openxmlformats.org/markup-compatibility/2006" xmlns:mv="urn:schemas-microsoft-com:mac:vml" xmlns:p="http://schemas.openxmlformats.org/presentationml/2006/main" xmlns:c="http://schemas.openxmlformats.org/drawingml/2006/chart" xmlns:dgm="http://schemas.openxmlformats.org/drawingml/2006/diagram" xmlns:o="urn:schemas-microsoft-com:office:office" xmlns:v="urn:schemas-microsoft-com:vml" xmlns:pvml="urn:schemas-microsoft-com:office:powerpoint" xmlns:com="http://schemas.openxmlformats.org/drawingml/2006/compatibility" xmlns:p14="http://schemas.microsoft.com/office/powerpoint/2010/main" xmlns:p15="http://schemas.microsoft.com/office/powerpoint/2012/main" xmlns:ahyp="http://schemas.microsoft.com/office/drawing/2018/hyperlinkcolor">
   <p:cSld>
     <p:spTree>
@@ -21107,7 +22228,7 @@
                 <a:cs typeface="Calibri"/>
                 <a:sym typeface="Calibri"/>
               </a:rPr>
-              <a:t>where you need genuine multi-step state. This isn't a replace-everything story.</a:t>
+              <a:t>where it already works, and for complex multi-step flows, for now. This isn't a replace-everything story.</a:t>
             </a:r>
             <a:endParaRPr/>
           </a:p>
@@ -21121,7 +22242,7 @@
 </p:sld>
 </file>
 
-<file path=ppt/slides/slide35.xml><?xml version="1.0" encoding="utf-8"?>
+<file path=ppt/slides/slide36.xml><?xml version="1.0" encoding="utf-8"?>
 <p:sld xmlns:a="http://schemas.openxmlformats.org/drawingml/2006/main" xmlns:r="http://schemas.openxmlformats.org/officeDocument/2006/relationships" xmlns:mc="http://schemas.openxmlformats.org/markup-compatibility/2006" xmlns:mv="urn:schemas-microsoft-com:mac:vml" xmlns:p="http://schemas.openxmlformats.org/presentationml/2006/main" xmlns:c="http://schemas.openxmlformats.org/drawingml/2006/chart" xmlns:dgm="http://schemas.openxmlformats.org/drawingml/2006/diagram" xmlns:o="urn:schemas-microsoft-com:office:office" xmlns:v="urn:schemas-microsoft-com:vml" xmlns:pvml="urn:schemas-microsoft-com:office:powerpoint" xmlns:com="http://schemas.openxmlformats.org/drawingml/2006/compatibility" xmlns:p14="http://schemas.microsoft.com/office/powerpoint/2010/main" xmlns:p15="http://schemas.microsoft.com/office/powerpoint/2012/main" xmlns:ahyp="http://schemas.microsoft.com/office/drawing/2018/hyperlinkcolor">
   <p:cSld>
     <p:spTree>
@@ -21140,65 +22261,6 @@
       </p:grpSpPr>
       <p:sp>
         <p:nvSpPr>
-          <p:cNvPr id="366" name="Google Shape;366;p42"/>
-          <p:cNvSpPr txBox="1"/>
-          <p:nvPr>
-            <p:ph idx="1" type="body"/>
-          </p:nvPr>
-        </p:nvSpPr>
-        <p:spPr>
-          <a:xfrm>
-            <a:off x="887095" y="2679065"/>
-            <a:ext cx="10835640" cy="1499870"/>
-          </a:xfrm>
-          <a:prstGeom prst="rect">
-            <a:avLst/>
-          </a:prstGeom>
-          <a:noFill/>
-          <a:ln>
-            <a:noFill/>
-          </a:ln>
-        </p:spPr>
-        <p:txBody>
-          <a:bodyPr anchorCtr="0" anchor="t" bIns="45700" lIns="91425" spcFirstLastPara="1" rIns="91425" wrap="square" tIns="45700">
-            <a:normAutofit/>
-          </a:bodyPr>
-          <a:lstStyle/>
-          <a:p>
-            <a:pPr indent="0" lvl="0" marL="0" rtl="0" algn="l">
-              <a:lnSpc>
-                <a:spcPct val="130000"/>
-              </a:lnSpc>
-              <a:spcBef>
-                <a:spcPts val="0"/>
-              </a:spcBef>
-              <a:spcAft>
-                <a:spcPts val="0"/>
-              </a:spcAft>
-              <a:buClr>
-                <a:srgbClr val="9AA3B5"/>
-              </a:buClr>
-              <a:buSzPts val="1800"/>
-              <a:buNone/>
-            </a:pPr>
-            <a:r>
-              <a:rPr b="0" i="1" lang="en-US" sz="1800">
-                <a:solidFill>
-                  <a:srgbClr val="9AA3B5"/>
-                </a:solidFill>
-                <a:latin typeface="Calibri"/>
-                <a:ea typeface="Calibri"/>
-                <a:cs typeface="Calibri"/>
-                <a:sym typeface="Calibri"/>
-              </a:rPr>
-              <a:t>PLACEHOLDER — how to introduce HTMX into an existing Drupal project without a rewrite.</a:t>
-            </a:r>
-            <a:endParaRPr/>
-          </a:p>
-        </p:txBody>
-      </p:sp>
-      <p:sp>
-        <p:nvSpPr>
           <p:cNvPr id="367" name="Google Shape;367;p42"/>
           <p:cNvSpPr txBox="1"/>
           <p:nvPr/>
@@ -21293,6 +22355,968 @@
               <a:t>Incremental Adoption Strategy</a:t>
             </a:r>
             <a:endParaRPr sz="3600"/>
+          </a:p>
+        </p:txBody>
+      </p:sp>
+    </p:spTree>
+  </p:cSld>
+  <p:clrMapOvr>
+    <a:masterClrMapping/>
+  </p:clrMapOvr>
+</p:sld>
+</file>
+
+<file path=ppt/slides/slide37.xml><?xml version="1.0" encoding="utf-8"?>
+<p:sld xmlns:a="http://schemas.openxmlformats.org/drawingml/2006/main" xmlns:r="http://schemas.openxmlformats.org/officeDocument/2006/relationships" xmlns:mc="http://schemas.openxmlformats.org/markup-compatibility/2006" xmlns:mv="urn:schemas-microsoft-com:mac:vml" xmlns:p="http://schemas.openxmlformats.org/presentationml/2006/main" xmlns:c="http://schemas.openxmlformats.org/drawingml/2006/chart" xmlns:dgm="http://schemas.openxmlformats.org/drawingml/2006/diagram" xmlns:o="urn:schemas-microsoft-com:office:office" xmlns:v="urn:schemas-microsoft-com:vml" xmlns:pvml="urn:schemas-microsoft-com:office:powerpoint" xmlns:com="http://schemas.openxmlformats.org/drawingml/2006/compatibility" xmlns:p14="http://schemas.microsoft.com/office/powerpoint/2010/main" xmlns:p15="http://schemas.microsoft.com/office/powerpoint/2012/main" xmlns:ahyp="http://schemas.microsoft.com/office/drawing/2018/hyperlinkcolor">
+  <p:cSld>
+    <p:spTree>
+      <p:nvGrpSpPr>
+        <p:cNvPr id="268" name="Shape 268"/>
+        <p:cNvGrpSpPr/>
+        <p:nvPr/>
+      </p:nvGrpSpPr>
+      <p:grpSpPr>
+        <a:xfrm>
+          <a:off x="0" y="0"/>
+          <a:ext cx="0" cy="0"/>
+          <a:chOff x="0" y="0"/>
+          <a:chExt cx="0" cy="0"/>
+        </a:xfrm>
+      </p:grpSpPr>
+      <p:sp>
+        <p:nvSpPr>
+          <p:cNvPr id="269" name="Google Shape;269;p31"/>
+          <p:cNvSpPr txBox="1"/>
+          <p:nvPr>
+            <p:ph type="title"/>
+          </p:nvPr>
+        </p:nvSpPr>
+        <p:spPr>
+          <a:xfrm>
+            <a:off x="322580" y="2272665"/>
+            <a:ext cx="11376660" cy="948055"/>
+          </a:xfrm>
+          <a:prstGeom prst="rect">
+            <a:avLst/>
+          </a:prstGeom>
+          <a:noFill/>
+          <a:ln>
+            <a:noFill/>
+          </a:ln>
+        </p:spPr>
+        <p:txBody>
+          <a:bodyPr anchorCtr="0" anchor="ctr" bIns="45700" lIns="91425" spcFirstLastPara="1" rIns="91425" wrap="square" tIns="45700">
+            <a:normAutofit/>
+          </a:bodyPr>
+          <a:lstStyle/>
+          <a:p>
+            <a:pPr indent="0" lvl="0" marL="0" rtl="0" algn="ctr">
+              <a:lnSpc>
+                <a:spcPct val="90000"/>
+              </a:lnSpc>
+              <a:spcBef>
+                <a:spcPts val="0"/>
+              </a:spcBef>
+              <a:spcAft>
+                <a:spcPts val="0"/>
+              </a:spcAft>
+              <a:buClr>
+                <a:schemeClr val="lt1"/>
+              </a:buClr>
+              <a:buSzPts val="4400"/>
+              <a:buFont typeface="Calibri"/>
+              <a:buNone/>
+            </a:pPr>
+            <a:r>
+              <a:t/>
+            </a:r>
+            <a:endParaRPr b="1">
+              <a:solidFill>
+                <a:schemeClr val="lt1"/>
+              </a:solidFill>
+            </a:endParaRPr>
+          </a:p>
+        </p:txBody>
+      </p:sp>
+      <p:sp>
+        <p:nvSpPr>
+          <p:cNvPr id="270" name="Google Shape;270;p31"/>
+          <p:cNvSpPr txBox="1"/>
+          <p:nvPr/>
+        </p:nvSpPr>
+        <p:spPr>
+          <a:xfrm>
+            <a:off x="640080" y="320040"/>
+            <a:ext cx="7315200" cy="184800"/>
+          </a:xfrm>
+          <a:prstGeom prst="rect">
+            <a:avLst/>
+          </a:prstGeom>
+          <a:noFill/>
+          <a:ln>
+            <a:noFill/>
+          </a:ln>
+        </p:spPr>
+        <p:txBody>
+          <a:bodyPr anchorCtr="0" anchor="t" bIns="0" lIns="0" spcFirstLastPara="1" rIns="0" wrap="square" tIns="0">
+            <a:spAutoFit/>
+          </a:bodyPr>
+          <a:lstStyle/>
+          <a:p>
+            <a:pPr indent="0" lvl="0" marL="0" marR="0" rtl="0" algn="l">
+              <a:spcBef>
+                <a:spcPts val="0"/>
+              </a:spcBef>
+              <a:spcAft>
+                <a:spcPts val="0"/>
+              </a:spcAft>
+              <a:buNone/>
+            </a:pPr>
+            <a:r>
+              <a:rPr b="1" lang="en-US" sz="1200">
+                <a:solidFill>
+                  <a:srgbClr val="F26351"/>
+                </a:solidFill>
+                <a:latin typeface="Calibri"/>
+                <a:ea typeface="Calibri"/>
+                <a:cs typeface="Calibri"/>
+                <a:sym typeface="Calibri"/>
+              </a:rPr>
+              <a:t>— </a:t>
+            </a:r>
+            <a:r>
+              <a:rPr b="1" i="0" lang="en-US" sz="1200">
+                <a:solidFill>
+                  <a:srgbClr val="F26351"/>
+                </a:solidFill>
+                <a:latin typeface="Calibri"/>
+                <a:ea typeface="Calibri"/>
+                <a:cs typeface="Calibri"/>
+                <a:sym typeface="Calibri"/>
+              </a:rPr>
+              <a:t>NO REWRITE REQUIRED</a:t>
+            </a:r>
+            <a:endParaRPr/>
+          </a:p>
+        </p:txBody>
+      </p:sp>
+      <p:sp>
+        <p:nvSpPr>
+          <p:cNvPr id="271" name="Google Shape;271;p31"/>
+          <p:cNvSpPr txBox="1"/>
+          <p:nvPr/>
+        </p:nvSpPr>
+        <p:spPr>
+          <a:xfrm>
+            <a:off x="914400" y="2958740"/>
+            <a:ext cx="10332600" cy="940500"/>
+          </a:xfrm>
+          <a:prstGeom prst="rect">
+            <a:avLst/>
+          </a:prstGeom>
+          <a:noFill/>
+          <a:ln>
+            <a:noFill/>
+          </a:ln>
+        </p:spPr>
+        <p:txBody>
+          <a:bodyPr anchorCtr="0" anchor="ctr" bIns="0" lIns="0" spcFirstLastPara="1" rIns="0" wrap="square" tIns="0">
+            <a:spAutoFit/>
+          </a:bodyPr>
+          <a:lstStyle/>
+          <a:p>
+            <a:pPr indent="0" lvl="0" marL="0" marR="0" rtl="0" algn="l">
+              <a:lnSpc>
+                <a:spcPct val="135000"/>
+              </a:lnSpc>
+              <a:spcBef>
+                <a:spcPts val="0"/>
+              </a:spcBef>
+              <a:spcAft>
+                <a:spcPts val="0"/>
+              </a:spcAft>
+              <a:buNone/>
+            </a:pPr>
+            <a:r>
+              <a:rPr b="0" i="1" lang="en-US" sz="2600">
+                <a:solidFill>
+                  <a:srgbClr val="23325D"/>
+                </a:solidFill>
+                <a:latin typeface="Calibri"/>
+                <a:ea typeface="Calibri"/>
+                <a:cs typeface="Calibri"/>
+                <a:sym typeface="Calibri"/>
+              </a:rPr>
+              <a:t>You don't rip out the Ajax API to start using HTMX. </a:t>
+            </a:r>
+            <a:r>
+              <a:rPr b="1" i="1" lang="en-US" sz="2600">
+                <a:solidFill>
+                  <a:srgbClr val="23325D"/>
+                </a:solidFill>
+                <a:latin typeface="Calibri"/>
+                <a:ea typeface="Calibri"/>
+                <a:cs typeface="Calibri"/>
+                <a:sym typeface="Calibri"/>
+              </a:rPr>
+              <a:t>They coexist on the same page - HTMX doesn't touch anything #ajax owns.</a:t>
+            </a:r>
+            <a:endParaRPr b="1"/>
+          </a:p>
+        </p:txBody>
+      </p:sp>
+    </p:spTree>
+  </p:cSld>
+  <p:clrMapOvr>
+    <a:masterClrMapping/>
+  </p:clrMapOvr>
+</p:sld>
+</file>
+
+<file path=ppt/slides/slide38.xml><?xml version="1.0" encoding="utf-8"?>
+<p:sld xmlns:a="http://schemas.openxmlformats.org/drawingml/2006/main" xmlns:r="http://schemas.openxmlformats.org/officeDocument/2006/relationships" xmlns:mc="http://schemas.openxmlformats.org/markup-compatibility/2006" xmlns:mv="urn:schemas-microsoft-com:mac:vml" xmlns:p="http://schemas.openxmlformats.org/presentationml/2006/main" xmlns:c="http://schemas.openxmlformats.org/drawingml/2006/chart" xmlns:dgm="http://schemas.openxmlformats.org/drawingml/2006/diagram" xmlns:o="urn:schemas-microsoft-com:office:office" xmlns:v="urn:schemas-microsoft-com:vml" xmlns:pvml="urn:schemas-microsoft-com:office:powerpoint" xmlns:com="http://schemas.openxmlformats.org/drawingml/2006/compatibility" xmlns:p14="http://schemas.microsoft.com/office/powerpoint/2010/main" xmlns:p15="http://schemas.microsoft.com/office/powerpoint/2012/main" xmlns:ahyp="http://schemas.microsoft.com/office/drawing/2018/hyperlinkcolor">
+  <p:cSld>
+    <p:spTree>
+      <p:nvGrpSpPr>
+        <p:cNvPr id="276" name="Shape 276"/>
+        <p:cNvGrpSpPr/>
+        <p:nvPr/>
+      </p:nvGrpSpPr>
+      <p:grpSpPr>
+        <a:xfrm>
+          <a:off x="0" y="0"/>
+          <a:ext cx="0" cy="0"/>
+          <a:chOff x="0" y="0"/>
+          <a:chExt cx="0" cy="0"/>
+        </a:xfrm>
+      </p:grpSpPr>
+      <p:sp>
+        <p:nvSpPr>
+          <p:cNvPr id="277" name="Google Shape;277;p32"/>
+          <p:cNvSpPr txBox="1"/>
+          <p:nvPr>
+            <p:ph type="title"/>
+          </p:nvPr>
+        </p:nvSpPr>
+        <p:spPr>
+          <a:xfrm>
+            <a:off x="525150" y="428675"/>
+            <a:ext cx="10773600" cy="627900"/>
+          </a:xfrm>
+          <a:prstGeom prst="rect">
+            <a:avLst/>
+          </a:prstGeom>
+          <a:noFill/>
+          <a:ln>
+            <a:noFill/>
+          </a:ln>
+        </p:spPr>
+        <p:txBody>
+          <a:bodyPr anchorCtr="0" anchor="ctr" bIns="45700" lIns="91425" spcFirstLastPara="1" rIns="91425" wrap="square" tIns="45700">
+            <a:normAutofit/>
+          </a:bodyPr>
+          <a:lstStyle/>
+          <a:p>
+            <a:pPr indent="0" lvl="0" marL="0" rtl="0" algn="l">
+              <a:lnSpc>
+                <a:spcPct val="90000"/>
+              </a:lnSpc>
+              <a:spcBef>
+                <a:spcPts val="0"/>
+              </a:spcBef>
+              <a:spcAft>
+                <a:spcPts val="0"/>
+              </a:spcAft>
+              <a:buClr>
+                <a:srgbClr val="23325D"/>
+              </a:buClr>
+              <a:buSzPts val="3400"/>
+              <a:buFont typeface="Calibri"/>
+              <a:buNone/>
+            </a:pPr>
+            <a:r>
+              <a:rPr lang="en-US" sz="3400">
+                <a:solidFill>
+                  <a:srgbClr val="23325D"/>
+                </a:solidFill>
+              </a:rPr>
+              <a:t>Already in core</a:t>
+            </a:r>
+            <a:endParaRPr/>
+          </a:p>
+        </p:txBody>
+      </p:sp>
+      <p:sp>
+        <p:nvSpPr>
+          <p:cNvPr id="278" name="Google Shape;278;p32"/>
+          <p:cNvSpPr txBox="1"/>
+          <p:nvPr/>
+        </p:nvSpPr>
+        <p:spPr>
+          <a:xfrm>
+            <a:off x="640080" y="320040"/>
+            <a:ext cx="7315200" cy="184800"/>
+          </a:xfrm>
+          <a:prstGeom prst="rect">
+            <a:avLst/>
+          </a:prstGeom>
+          <a:noFill/>
+          <a:ln>
+            <a:noFill/>
+          </a:ln>
+        </p:spPr>
+        <p:txBody>
+          <a:bodyPr anchorCtr="0" anchor="t" bIns="0" lIns="0" spcFirstLastPara="1" rIns="0" wrap="square" tIns="0">
+            <a:spAutoFit/>
+          </a:bodyPr>
+          <a:lstStyle/>
+          <a:p>
+            <a:pPr indent="0" lvl="0" marL="0" marR="0" rtl="0" algn="l">
+              <a:spcBef>
+                <a:spcPts val="0"/>
+              </a:spcBef>
+              <a:spcAft>
+                <a:spcPts val="0"/>
+              </a:spcAft>
+              <a:buNone/>
+            </a:pPr>
+            <a:r>
+              <a:rPr b="1" lang="en-US" sz="1200">
+                <a:solidFill>
+                  <a:srgbClr val="F26351"/>
+                </a:solidFill>
+                <a:latin typeface="Calibri"/>
+                <a:ea typeface="Calibri"/>
+                <a:cs typeface="Calibri"/>
+                <a:sym typeface="Calibri"/>
+              </a:rPr>
+              <a:t>— </a:t>
+            </a:r>
+            <a:r>
+              <a:rPr b="1" i="0" lang="en-US" sz="1200">
+                <a:solidFill>
+                  <a:srgbClr val="F26351"/>
+                </a:solidFill>
+                <a:latin typeface="Calibri"/>
+                <a:ea typeface="Calibri"/>
+                <a:cs typeface="Calibri"/>
+                <a:sym typeface="Calibri"/>
+              </a:rPr>
+              <a:t>HTMX SHIPS WITH DRUPAL 11.3+</a:t>
+            </a:r>
+            <a:endParaRPr/>
+          </a:p>
+        </p:txBody>
+      </p:sp>
+      <p:sp>
+        <p:nvSpPr>
+          <p:cNvPr id="279" name="Google Shape;279;p32"/>
+          <p:cNvSpPr/>
+          <p:nvPr/>
+        </p:nvSpPr>
+        <p:spPr>
+          <a:xfrm>
+            <a:off x="640080" y="1600200"/>
+            <a:ext cx="10908900" cy="1188720"/>
+          </a:xfrm>
+          <a:prstGeom prst="roundRect">
+            <a:avLst>
+              <a:gd fmla="val 4000" name="adj"/>
+            </a:avLst>
+          </a:prstGeom>
+          <a:solidFill>
+            <a:srgbClr val="23325D"/>
+          </a:solidFill>
+          <a:ln>
+            <a:noFill/>
+          </a:ln>
+        </p:spPr>
+        <p:txBody>
+          <a:bodyPr anchorCtr="0" anchor="ctr" bIns="228600" lIns="320025" spcFirstLastPara="1" rIns="274300" wrap="square" tIns="228600">
+            <a:noAutofit/>
+          </a:bodyPr>
+          <a:lstStyle/>
+          <a:p>
+            <a:pPr indent="0" lvl="0" marL="0" marR="0" rtl="0" algn="l">
+              <a:lnSpc>
+                <a:spcPct val="122000"/>
+              </a:lnSpc>
+              <a:spcBef>
+                <a:spcPts val="0"/>
+              </a:spcBef>
+              <a:spcAft>
+                <a:spcPts val="0"/>
+              </a:spcAft>
+              <a:buNone/>
+            </a:pPr>
+            <a:r>
+              <a:rPr b="0" i="0" lang="en-US" sz="1250">
+                <a:solidFill>
+                  <a:srgbClr val="D8E4F5"/>
+                </a:solidFill>
+                <a:latin typeface="Courier New"/>
+                <a:ea typeface="Courier New"/>
+                <a:cs typeface="Courier New"/>
+                <a:sym typeface="Courier New"/>
+              </a:rPr>
+              <a:t/>
+            </a:r>
+            <a:r>
+              <a:rPr b="1" i="0" lang="en-US" sz="1250">
+                <a:solidFill>
+                  <a:srgbClr val="F26351"/>
+                </a:solidFill>
+                <a:latin typeface="Courier New"/>
+                <a:ea typeface="Courier New"/>
+                <a:cs typeface="Courier New"/>
+                <a:sym typeface="Courier New"/>
+              </a:rPr>
+              <a:t>// Using the Htmx class? It attaches core/drupal.htmx for you.</a:t>
+            </a:r>
+            <a:endParaRPr/>
+          </a:p>
+          <a:p>
+            <a:pPr indent="0" lvl="0" marL="0" marR="0" rtl="0" algn="l">
+              <a:lnSpc>
+                <a:spcPct val="122000"/>
+              </a:lnSpc>
+              <a:spcBef>
+                <a:spcPts val="0"/>
+              </a:spcBef>
+              <a:spcAft>
+                <a:spcPts val="0"/>
+              </a:spcAft>
+              <a:buNone/>
+            </a:pPr>
+            <a:r>
+              <a:rPr b="0" i="0" lang="en-US" sz="1250">
+                <a:solidFill>
+                  <a:srgbClr val="D8E4F5"/>
+                </a:solidFill>
+                <a:latin typeface="Courier New"/>
+                <a:ea typeface="Courier New"/>
+                <a:cs typeface="Courier New"/>
+                <a:sym typeface="Courier New"/>
+              </a:rPr>
+              <a:t/>
+            </a:r>
+            <a:r>
+              <a:rPr b="1" i="0" lang="en-US" sz="1250">
+                <a:solidFill>
+                  <a:srgbClr val="F26351"/>
+                </a:solidFill>
+                <a:latin typeface="Courier New"/>
+                <a:ea typeface="Courier New"/>
+                <a:cs typeface="Courier New"/>
+                <a:sym typeface="Courier New"/>
+              </a:rPr>
+              <a:t>// Hand-writing hx-* attributes in Twig? One line:</a:t>
+            </a:r>
+            <a:endParaRPr/>
+          </a:p>
+          <a:p>
+            <a:pPr indent="0" lvl="0" marL="0" marR="0" rtl="0" algn="l">
+              <a:lnSpc>
+                <a:spcPct val="122000"/>
+              </a:lnSpc>
+              <a:spcBef>
+                <a:spcPts val="0"/>
+              </a:spcBef>
+              <a:spcAft>
+                <a:spcPts val="0"/>
+              </a:spcAft>
+              <a:buNone/>
+            </a:pPr>
+            <a:r>
+              <a:rPr b="0" i="0" lang="en-US" sz="1250">
+                <a:solidFill>
+                  <a:srgbClr val="D8E4F5"/>
+                </a:solidFill>
+                <a:latin typeface="Courier New"/>
+                <a:ea typeface="Courier New"/>
+                <a:cs typeface="Courier New"/>
+                <a:sym typeface="Courier New"/>
+              </a:rPr>
+              <a:t>$build['#attached']['library'][] = </a:t>
+            </a:r>
+            <a:r>
+              <a:rPr b="1" i="0" lang="en-US" sz="1250">
+                <a:solidFill>
+                  <a:srgbClr val="F26351"/>
+                </a:solidFill>
+                <a:latin typeface="Courier New"/>
+                <a:ea typeface="Courier New"/>
+                <a:cs typeface="Courier New"/>
+                <a:sym typeface="Courier New"/>
+              </a:rPr>
+              <a:t>'core/drupal.htmx';</a:t>
+            </a:r>
+            <a:endParaRPr/>
+          </a:p>
+        </p:txBody>
+      </p:sp>
+      <p:sp>
+        <p:nvSpPr>
+          <p:cNvPr id="280" name="Google Shape;280;p32"/>
+          <p:cNvSpPr txBox="1"/>
+          <p:nvPr/>
+        </p:nvSpPr>
+        <p:spPr>
+          <a:xfrm>
+            <a:off x="640080" y="3017520"/>
+            <a:ext cx="10908900" cy="215400"/>
+          </a:xfrm>
+          <a:prstGeom prst="rect">
+            <a:avLst/>
+          </a:prstGeom>
+          <a:noFill/>
+          <a:ln>
+            <a:noFill/>
+          </a:ln>
+        </p:spPr>
+        <p:txBody>
+          <a:bodyPr anchorCtr="0" anchor="t" bIns="0" lIns="0" spcFirstLastPara="1" rIns="0" wrap="square" tIns="0">
+            <a:spAutoFit/>
+          </a:bodyPr>
+          <a:lstStyle/>
+          <a:p>
+            <a:pPr indent="0" lvl="0" marL="0" marR="0" rtl="0" algn="l">
+              <a:lnSpc>
+                <a:spcPct val="115000"/>
+              </a:lnSpc>
+              <a:spcBef>
+                <a:spcPts val="0"/>
+              </a:spcBef>
+              <a:spcAft>
+                <a:spcPts val="0"/>
+              </a:spcAft>
+              <a:buNone/>
+            </a:pPr>
+            <a:r>
+              <a:rPr b="0" i="0" lang="en-US" sz="1400">
+                <a:solidFill>
+                  <a:srgbClr val="5B6378"/>
+                </a:solidFill>
+                <a:latin typeface="Calibri"/>
+                <a:ea typeface="Calibri"/>
+                <a:cs typeface="Calibri"/>
+                <a:sym typeface="Calibri"/>
+              </a:rPr>
+              <a:t>Drupal 11.3+ ships core/htmx and core/drupal.htmx. No library definition, no CDN, no build step.</a:t>
+            </a:r>
+            <a:endParaRPr/>
+          </a:p>
+        </p:txBody>
+      </p:sp>
+    </p:spTree>
+  </p:cSld>
+  <p:clrMapOvr>
+    <a:masterClrMapping/>
+  </p:clrMapOvr>
+</p:sld>
+</file>
+
+<file path=ppt/slides/slide39.xml><?xml version="1.0" encoding="utf-8"?>
+<p:sld xmlns:a="http://schemas.openxmlformats.org/drawingml/2006/main" xmlns:r="http://schemas.openxmlformats.org/officeDocument/2006/relationships" xmlns:mc="http://schemas.openxmlformats.org/markup-compatibility/2006" xmlns:mv="urn:schemas-microsoft-com:mac:vml" xmlns:p="http://schemas.openxmlformats.org/presentationml/2006/main" xmlns:c="http://schemas.openxmlformats.org/drawingml/2006/chart" xmlns:dgm="http://schemas.openxmlformats.org/drawingml/2006/diagram" xmlns:o="urn:schemas-microsoft-com:office:office" xmlns:v="urn:schemas-microsoft-com:vml" xmlns:pvml="urn:schemas-microsoft-com:office:powerpoint" xmlns:com="http://schemas.openxmlformats.org/drawingml/2006/compatibility" xmlns:p14="http://schemas.microsoft.com/office/powerpoint/2010/main" xmlns:p15="http://schemas.microsoft.com/office/powerpoint/2012/main" xmlns:ahyp="http://schemas.microsoft.com/office/drawing/2018/hyperlinkcolor">
+  <p:cSld>
+    <p:spTree>
+      <p:nvGrpSpPr>
+        <p:cNvPr id="295" name="Shape 295"/>
+        <p:cNvGrpSpPr/>
+        <p:nvPr/>
+      </p:nvGrpSpPr>
+      <p:grpSpPr>
+        <a:xfrm>
+          <a:off x="0" y="0"/>
+          <a:ext cx="0" cy="0"/>
+          <a:chOff x="0" y="0"/>
+          <a:chExt cx="0" cy="0"/>
+        </a:xfrm>
+      </p:grpSpPr>
+      <p:sp>
+        <p:nvSpPr>
+          <p:cNvPr id="296" name="Google Shape;296;p34"/>
+          <p:cNvSpPr txBox="1"/>
+          <p:nvPr/>
+        </p:nvSpPr>
+        <p:spPr>
+          <a:xfrm>
+            <a:off x="640080" y="320040"/>
+            <a:ext cx="7315200" cy="320040"/>
+          </a:xfrm>
+          <a:prstGeom prst="rect">
+            <a:avLst/>
+          </a:prstGeom>
+          <a:noFill/>
+          <a:ln>
+            <a:noFill/>
+          </a:ln>
+        </p:spPr>
+        <p:txBody>
+          <a:bodyPr anchorCtr="0" anchor="t" bIns="0" lIns="0" spcFirstLastPara="1" rIns="0" wrap="square" tIns="0">
+            <a:spAutoFit/>
+          </a:bodyPr>
+          <a:lstStyle/>
+          <a:p>
+            <a:pPr indent="0" lvl="0" marL="0" marR="0" rtl="0" algn="l">
+              <a:spcBef>
+                <a:spcPts val="0"/>
+              </a:spcBef>
+              <a:spcAft>
+                <a:spcPts val="0"/>
+              </a:spcAft>
+              <a:buNone/>
+            </a:pPr>
+            <a:r>
+              <a:rPr b="1" i="0" lang="en-US" sz="1200">
+                <a:solidFill>
+                  <a:srgbClr val="F26351"/>
+                </a:solidFill>
+                <a:latin typeface="Calibri"/>
+                <a:ea typeface="Calibri"/>
+                <a:cs typeface="Calibri"/>
+                <a:sym typeface="Calibri"/>
+              </a:rPr>
+              <a:t>PICK CANDIDATES, DON'T DO A SWEEP</a:t>
+            </a:r>
+            <a:endParaRPr/>
+          </a:p>
+        </p:txBody>
+      </p:sp>
+      <p:sp>
+        <p:nvSpPr>
+          <p:cNvPr id="297" name="Google Shape;297;p34"/>
+          <p:cNvSpPr/>
+          <p:nvPr/>
+        </p:nvSpPr>
+        <p:spPr>
+          <a:xfrm>
+            <a:off x="640080" y="1234440"/>
+            <a:ext cx="5317200" cy="1417200"/>
+          </a:xfrm>
+          <a:prstGeom prst="roundRect">
+            <a:avLst>
+              <a:gd fmla="val 6000" name="adj"/>
+            </a:avLst>
+          </a:prstGeom>
+          <a:solidFill>
+            <a:srgbClr val="EAF6FC"/>
+          </a:solidFill>
+          <a:ln>
+            <a:noFill/>
+          </a:ln>
+        </p:spPr>
+        <p:txBody>
+          <a:bodyPr anchorCtr="0" anchor="ctr" bIns="164575" lIns="228600" spcFirstLastPara="1" rIns="228600" wrap="square" tIns="164575">
+            <a:noAutofit/>
+          </a:bodyPr>
+          <a:lstStyle/>
+          <a:p>
+            <a:pPr indent="0" lvl="0" marL="0" marR="0" rtl="0" algn="l">
+              <a:spcBef>
+                <a:spcPts val="0"/>
+              </a:spcBef>
+              <a:spcAft>
+                <a:spcPts val="0"/>
+              </a:spcAft>
+              <a:buNone/>
+            </a:pPr>
+            <a:r>
+              <a:rPr b="1" i="0" lang="en-US" sz="1400">
+                <a:solidFill>
+                  <a:srgbClr val="0D6DAC"/>
+                </a:solidFill>
+                <a:latin typeface="Courier New"/>
+                <a:ea typeface="Courier New"/>
+                <a:cs typeface="Courier New"/>
+                <a:sym typeface="Courier New"/>
+              </a:rPr>
+              <a:t>LEAVE IT</a:t>
+            </a:r>
+            <a:endParaRPr/>
+          </a:p>
+          <a:p>
+            <a:pPr indent="0" lvl="0" marL="0" marR="0" rtl="0" algn="l">
+              <a:lnSpc>
+                <a:spcPct val="120000"/>
+              </a:lnSpc>
+              <a:spcBef>
+                <a:spcPts val="0"/>
+              </a:spcBef>
+              <a:spcAft>
+                <a:spcPts val="0"/>
+              </a:spcAft>
+              <a:buNone/>
+            </a:pPr>
+            <a:r>
+              <a:rPr b="0" i="0" lang="en-US" sz="1350">
+                <a:solidFill>
+                  <a:srgbClr val="5B6378"/>
+                </a:solidFill>
+                <a:latin typeface="Calibri"/>
+                <a:ea typeface="Calibri"/>
+                <a:cs typeface="Calibri"/>
+                <a:sym typeface="Calibri"/>
+              </a:rPr>
+              <a:t>Existing Ajax API code that already works. No sweep, no module-wide rewrite.</a:t>
+            </a:r>
+            <a:endParaRPr/>
+          </a:p>
+        </p:txBody>
+      </p:sp>
+      <p:sp>
+        <p:nvSpPr>
+          <p:cNvPr id="298" name="Google Shape;298;p34"/>
+          <p:cNvSpPr/>
+          <p:nvPr/>
+        </p:nvSpPr>
+        <p:spPr>
+          <a:xfrm>
+            <a:off x="6231636" y="1234440"/>
+            <a:ext cx="5317200" cy="1417200"/>
+          </a:xfrm>
+          <a:prstGeom prst="roundRect">
+            <a:avLst>
+              <a:gd fmla="val 6000" name="adj"/>
+            </a:avLst>
+          </a:prstGeom>
+          <a:solidFill>
+            <a:srgbClr val="FBE4DF"/>
+          </a:solidFill>
+          <a:ln>
+            <a:noFill/>
+          </a:ln>
+        </p:spPr>
+        <p:txBody>
+          <a:bodyPr anchorCtr="0" anchor="ctr" bIns="164575" lIns="228600" spcFirstLastPara="1" rIns="228600" wrap="square" tIns="164575">
+            <a:noAutofit/>
+          </a:bodyPr>
+          <a:lstStyle/>
+          <a:p>
+            <a:pPr indent="0" lvl="0" marL="0" marR="0" rtl="0" algn="l">
+              <a:spcBef>
+                <a:spcPts val="0"/>
+              </a:spcBef>
+              <a:spcAft>
+                <a:spcPts val="0"/>
+              </a:spcAft>
+              <a:buNone/>
+            </a:pPr>
+            <a:r>
+              <a:rPr b="1" i="0" lang="en-US" sz="1400">
+                <a:solidFill>
+                  <a:srgbClr val="F26351"/>
+                </a:solidFill>
+                <a:latin typeface="Courier New"/>
+                <a:ea typeface="Courier New"/>
+                <a:cs typeface="Courier New"/>
+                <a:sym typeface="Courier New"/>
+              </a:rPr>
+              <a:t>HTMX CANDIDATES</a:t>
+            </a:r>
+            <a:endParaRPr/>
+          </a:p>
+          <a:p>
+            <a:pPr indent="0" lvl="0" marL="0" marR="0" rtl="0" algn="l">
+              <a:lnSpc>
+                <a:spcPct val="120000"/>
+              </a:lnSpc>
+              <a:spcBef>
+                <a:spcPts val="0"/>
+              </a:spcBef>
+              <a:spcAft>
+                <a:spcPts val="0"/>
+              </a:spcAft>
+              <a:buNone/>
+            </a:pPr>
+            <a:r>
+              <a:rPr b="0" i="0" lang="en-US" sz="1350">
+                <a:solidFill>
+                  <a:srgbClr val="5B6378"/>
+                </a:solidFill>
+                <a:latin typeface="Calibri"/>
+                <a:ea typeface="Calibri"/>
+                <a:cs typeface="Calibri"/>
+                <a:sym typeface="Calibri"/>
+              </a:rPr>
+              <a:t>New interactive spots, or the small annoying ones - a filter, a load-more pager, an autocomplete list.</a:t>
+            </a:r>
+            <a:endParaRPr/>
+          </a:p>
+        </p:txBody>
+      </p:sp>
+      <p:sp>
+        <p:nvSpPr>
+          <p:cNvPr id="299" name="Google Shape;299;p34"/>
+          <p:cNvSpPr txBox="1"/>
+          <p:nvPr/>
+        </p:nvSpPr>
+        <p:spPr>
+          <a:xfrm>
+            <a:off x="640080" y="320040"/>
+            <a:ext cx="7315200" cy="215400"/>
+          </a:xfrm>
+          <a:prstGeom prst="rect">
+            <a:avLst/>
+          </a:prstGeom>
+          <a:noFill/>
+          <a:ln>
+            <a:noFill/>
+          </a:ln>
+        </p:spPr>
+        <p:txBody>
+          <a:bodyPr anchorCtr="0" anchor="t" bIns="0" lIns="0" spcFirstLastPara="1" rIns="0" wrap="square" tIns="0">
+            <a:spAutoFit/>
+          </a:bodyPr>
+          <a:lstStyle/>
+          <a:p>
+            <a:pPr indent="0" lvl="0" marL="0" marR="0" rtl="0" algn="l">
+              <a:spcBef>
+                <a:spcPts val="0"/>
+              </a:spcBef>
+              <a:spcAft>
+                <a:spcPts val="0"/>
+              </a:spcAft>
+              <a:buNone/>
+            </a:pPr>
+            <a:r>
+              <a:t/>
+            </a:r>
+            <a:endParaRPr/>
+          </a:p>
+        </p:txBody>
+      </p:sp>
+      <p:sp>
+        <p:nvSpPr>
+          <p:cNvPr id="2000" name="Shape 2000"/>
+          <p:cNvSpPr/>
+          <p:nvPr/>
+        </p:nvSpPr>
+        <p:spPr>
+          <a:xfrm>
+            <a:off x="640080" y="3063240"/>
+            <a:ext cx="10908792" cy="685800"/>
+          </a:xfrm>
+          <a:prstGeom prst="roundRect">
+            <a:avLst>
+              <a:gd fmla="val 4000" name="adj"/>
+            </a:avLst>
+          </a:prstGeom>
+          <a:solidFill>
+            <a:srgbClr val="23325D"/>
+          </a:solidFill>
+          <a:ln>
+            <a:noFill/>
+          </a:ln>
+        </p:spPr>
+        <p:txBody>
+          <a:bodyPr anchorCtr="0" anchor="ctr" bIns="228600" lIns="320025" spcFirstLastPara="1" rIns="274300" wrap="square" tIns="228600">
+            <a:noAutofit/>
+          </a:bodyPr>
+          <a:lstStyle/>
+          <a:p>
+            <a:pPr indent="0" lvl="0" marL="0" marR="0" rtl="0" algn="l">
+              <a:lnSpc>
+                <a:spcPct val="122000"/>
+              </a:lnSpc>
+              <a:spcBef>
+                <a:spcPts val="0"/>
+              </a:spcBef>
+              <a:spcAft>
+                <a:spcPts val="0"/>
+              </a:spcAft>
+              <a:buNone/>
+            </a:pPr>
+            <a:r>
+              <a:rPr b="0" i="0" lang="en-US" sz="1250">
+                <a:solidFill>
+                  <a:srgbClr val="D8E4F5"/>
+                </a:solidFill>
+                <a:latin typeface="Courier New"/>
+                <a:ea typeface="Courier New"/>
+                <a:cs typeface="Courier New"/>
+                <a:sym typeface="Courier New"/>
+              </a:rPr>
+              <a:t>&lt;nav </a:t>
+            </a:r>
+            <a:r>
+              <a:rPr b="1" i="0" lang="en-US" sz="1250">
+                <a:solidFill>
+                  <a:srgbClr val="F26351"/>
+                </a:solidFill>
+                <a:latin typeface="Courier New"/>
+                <a:ea typeface="Courier New"/>
+                <a:cs typeface="Courier New"/>
+                <a:sym typeface="Courier New"/>
+              </a:rPr>
+              <a:t>hx-boost="true"</a:t>
+            </a:r>
+            <a:r>
+              <a:rPr b="0" i="0" lang="en-US" sz="1250">
+                <a:solidFill>
+                  <a:srgbClr val="D8E4F5"/>
+                </a:solidFill>
+                <a:latin typeface="Courier New"/>
+                <a:ea typeface="Courier New"/>
+                <a:cs typeface="Courier New"/>
+                <a:sym typeface="Courier New"/>
+              </a:rPr>
+              <a:t>&gt;</a:t>
+            </a:r>
+            <a:endParaRPr/>
+          </a:p>
+        </p:txBody>
+      </p:sp>
+      <p:sp>
+        <p:nvSpPr>
+          <p:cNvPr id="2001" name="Shape 2001"/>
+          <p:cNvSpPr txBox="1"/>
+          <p:nvPr/>
+        </p:nvSpPr>
+        <p:spPr>
+          <a:xfrm>
+            <a:off x="640080" y="3886200"/>
+            <a:ext cx="10908792" cy="457200"/>
+          </a:xfrm>
+          <a:prstGeom prst="rect">
+            <a:avLst/>
+          </a:prstGeom>
+          <a:noFill/>
+          <a:ln>
+            <a:noFill/>
+          </a:ln>
+        </p:spPr>
+        <p:txBody>
+          <a:bodyPr anchorCtr="0" anchor="t" bIns="0" lIns="0" spcFirstLastPara="1" rIns="0" wrap="square" tIns="0">
+            <a:spAutoFit/>
+          </a:bodyPr>
+          <a:lstStyle/>
+          <a:p>
+            <a:pPr indent="0" lvl="0" marL="0" marR="0" rtl="0" algn="l">
+              <a:lnSpc>
+                <a:spcPct val="115000"/>
+              </a:lnSpc>
+              <a:spcBef>
+                <a:spcPts val="0"/>
+              </a:spcBef>
+              <a:spcAft>
+                <a:spcPts val="0"/>
+              </a:spcAft>
+              <a:buNone/>
+            </a:pPr>
+            <a:r>
+              <a:rPr b="0" i="0" lang="en-US" sz="1400">
+                <a:solidFill>
+                  <a:srgbClr val="5B6378"/>
+                </a:solidFill>
+                <a:latin typeface="Calibri"/>
+                <a:ea typeface="Calibri"/>
+                <a:cs typeface="Calibri"/>
+                <a:sym typeface="Calibri"/>
+              </a:rPr>
+              <a:t>A low-effort on-ramp: links and forms inside become HTMX requests. Start with one region - each boosted request still swaps the whole &lt;body&gt;, so test page-level JS like the toolbar.</a:t>
+            </a:r>
+            <a:endParaRPr/>
           </a:p>
         </p:txBody>
       </p:sp>
@@ -21557,6 +23581,2528 @@
 </p:sld>
 </file>
 
+<file path=ppt/slides/slide40.xml><?xml version="1.0" encoding="utf-8"?>
+<p:sld xmlns:a="http://schemas.openxmlformats.org/drawingml/2006/main" xmlns:r="http://schemas.openxmlformats.org/officeDocument/2006/relationships" xmlns:mc="http://schemas.openxmlformats.org/markup-compatibility/2006" xmlns:mv="urn:schemas-microsoft-com:mac:vml" xmlns:p="http://schemas.openxmlformats.org/presentationml/2006/main" xmlns:c="http://schemas.openxmlformats.org/drawingml/2006/chart" xmlns:dgm="http://schemas.openxmlformats.org/drawingml/2006/diagram" xmlns:o="urn:schemas-microsoft-com:office:office" xmlns:v="urn:schemas-microsoft-com:vml" xmlns:pvml="urn:schemas-microsoft-com:office:powerpoint" xmlns:com="http://schemas.openxmlformats.org/drawingml/2006/compatibility" xmlns:p14="http://schemas.microsoft.com/office/powerpoint/2010/main" xmlns:p15="http://schemas.microsoft.com/office/powerpoint/2012/main" xmlns:ahyp="http://schemas.microsoft.com/office/drawing/2018/hyperlinkcolor">
+  <p:cSld>
+    <p:spTree>
+      <p:nvGrpSpPr>
+        <p:cNvPr id="304" name="Shape 304"/>
+        <p:cNvGrpSpPr/>
+        <p:nvPr/>
+      </p:nvGrpSpPr>
+      <p:grpSpPr>
+        <a:xfrm>
+          <a:off x="0" y="0"/>
+          <a:ext cx="0" cy="0"/>
+          <a:chOff x="0" y="0"/>
+          <a:chExt cx="0" cy="0"/>
+        </a:xfrm>
+      </p:grpSpPr>
+      <p:sp>
+        <p:nvSpPr>
+          <p:cNvPr id="305" name="Google Shape;305;p35"/>
+          <p:cNvSpPr txBox="1"/>
+          <p:nvPr/>
+        </p:nvSpPr>
+        <p:spPr>
+          <a:xfrm>
+            <a:off x="640080" y="320040"/>
+            <a:ext cx="7315200" cy="320040"/>
+          </a:xfrm>
+          <a:prstGeom prst="rect">
+            <a:avLst/>
+          </a:prstGeom>
+          <a:noFill/>
+          <a:ln>
+            <a:noFill/>
+          </a:ln>
+        </p:spPr>
+        <p:txBody>
+          <a:bodyPr anchorCtr="0" anchor="t" bIns="0" lIns="0" spcFirstLastPara="1" rIns="0" wrap="square" tIns="0">
+            <a:spAutoFit/>
+          </a:bodyPr>
+          <a:lstStyle/>
+          <a:p>
+            <a:pPr indent="0" lvl="0" marL="0" marR="0" rtl="0" algn="l">
+              <a:spcBef>
+                <a:spcPts val="0"/>
+              </a:spcBef>
+              <a:spcAft>
+                <a:spcPts val="0"/>
+              </a:spcAft>
+              <a:buNone/>
+            </a:pPr>
+            <a:r>
+              <a:rPr b="1" i="0" lang="en-US" sz="1200">
+                <a:solidFill>
+                  <a:srgbClr val="F26351"/>
+                </a:solidFill>
+                <a:latin typeface="Calibri"/>
+                <a:ea typeface="Calibri"/>
+                <a:cs typeface="Calibri"/>
+                <a:sym typeface="Calibri"/>
+              </a:rPr>
+              <a:t>THE RULE OF THUMB</a:t>
+            </a:r>
+            <a:endParaRPr/>
+          </a:p>
+        </p:txBody>
+      </p:sp>
+      <p:graphicFrame>
+        <p:nvGraphicFramePr>
+          <p:cNvPr id="306" name="Google Shape;306;p35"/>
+          <p:cNvGraphicFramePr/>
+          <p:nvPr/>
+        </p:nvGraphicFramePr>
+        <p:xfrm>
+          <a:off x="640080" y="1920240"/>
+          <a:ext cx="3000000" cy="3000000"/>
+        </p:xfrm>
+        <a:graphic>
+          <a:graphicData uri="http://schemas.openxmlformats.org/drawingml/2006/table">
+            <a:tbl>
+              <a:tblPr bandRow="1" firstRow="1">
+                <a:noFill/>
+                <a:tableStyleId>{82BA0FA9-774D-4D84-A5C6-C2667BA39461}</a:tableStyleId>
+              </a:tblPr>
+              <a:tblGrid>
+                <a:gridCol w="5454400"/>
+                <a:gridCol w="5454400"/>
+              </a:tblGrid>
+              <a:tr h="502925">
+                <a:tc>
+                  <a:txBody>
+                    <a:bodyPr/>
+                    <a:lstStyle/>
+                    <a:p>
+                      <a:pPr indent="0" lvl="0" marL="0" marR="0" rtl="0" algn="l">
+                        <a:spcBef>
+                          <a:spcPts val="0"/>
+                        </a:spcBef>
+                        <a:spcAft>
+                          <a:spcPts val="0"/>
+                        </a:spcAft>
+                        <a:buNone/>
+                      </a:pPr>
+                      <a:r>
+                        <a:rPr b="1" i="0" lang="en-US" sz="1400" u="none" cap="none" strike="noStrike">
+                          <a:solidFill>
+                            <a:srgbClr val="FFFFFF"/>
+                          </a:solidFill>
+                          <a:latin typeface="Calibri"/>
+                          <a:ea typeface="Calibri"/>
+                          <a:cs typeface="Calibri"/>
+                          <a:sym typeface="Calibri"/>
+                        </a:rPr>
+                        <a:t>Situation</a:t>
+                      </a:r>
+                      <a:endParaRPr/>
+                    </a:p>
+                  </a:txBody>
+                  <a:tcPr marT="45725" marB="45725" marR="91450" marL="91450" anchor="ctr">
+                    <a:solidFill>
+                      <a:srgbClr val="23325D"/>
+                    </a:solidFill>
+                  </a:tcPr>
+                </a:tc>
+                <a:tc>
+                  <a:txBody>
+                    <a:bodyPr/>
+                    <a:lstStyle/>
+                    <a:p>
+                      <a:pPr indent="0" lvl="0" marL="0" marR="0" rtl="0" algn="l">
+                        <a:spcBef>
+                          <a:spcPts val="0"/>
+                        </a:spcBef>
+                        <a:spcAft>
+                          <a:spcPts val="0"/>
+                        </a:spcAft>
+                        <a:buNone/>
+                      </a:pPr>
+                      <a:r>
+                        <a:rPr b="1" i="0" lang="en-US" sz="1400">
+                          <a:solidFill>
+                            <a:srgbClr val="FFFFFF"/>
+                          </a:solidFill>
+                          <a:latin typeface="Calibri"/>
+                          <a:ea typeface="Calibri"/>
+                          <a:cs typeface="Calibri"/>
+                          <a:sym typeface="Calibri"/>
+                        </a:rPr>
+                        <a:t>Reach for</a:t>
+                      </a:r>
+                      <a:endParaRPr/>
+                    </a:p>
+                  </a:txBody>
+                  <a:tcPr marT="45725" marB="45725" marR="91450" marL="91450" anchor="ctr">
+                    <a:solidFill>
+                      <a:srgbClr val="23325D"/>
+                    </a:solidFill>
+                  </a:tcPr>
+                </a:tc>
+              </a:tr>
+              <a:tr h="502925">
+                <a:tc>
+                  <a:txBody>
+                    <a:bodyPr/>
+                    <a:lstStyle/>
+                    <a:p>
+                      <a:pPr indent="0" lvl="0" marL="0" marR="0" rtl="0" algn="l">
+                        <a:spcBef>
+                          <a:spcPts val="0"/>
+                        </a:spcBef>
+                        <a:spcAft>
+                          <a:spcPts val="0"/>
+                        </a:spcAft>
+                        <a:buNone/>
+                      </a:pPr>
+                      <a:r>
+                        <a:rPr b="1" i="0" lang="en-US" sz="1350">
+                          <a:solidFill>
+                            <a:srgbClr val="F26351"/>
+                          </a:solidFill>
+                          <a:latin typeface="Calibri"/>
+                          <a:ea typeface="Calibri"/>
+                          <a:cs typeface="Calibri"/>
+                          <a:sym typeface="Calibri"/>
+                        </a:rPr>
+                        <a:t>New interactive feature</a:t>
+                      </a:r>
+                      <a:endParaRPr/>
+                    </a:p>
+                  </a:txBody>
+                  <a:tcPr marT="45725" marB="45725" marR="91450" marL="91450" anchor="ctr">
+                    <a:solidFill>
+                      <a:srgbClr val="FFFFFF"/>
+                    </a:solidFill>
+                  </a:tcPr>
+                </a:tc>
+                <a:tc>
+                  <a:txBody>
+                    <a:bodyPr/>
+                    <a:lstStyle/>
+                    <a:p>
+                      <a:pPr indent="0" lvl="0" marL="0" marR="0" rtl="0" algn="l">
+                        <a:spcBef>
+                          <a:spcPts val="0"/>
+                        </a:spcBef>
+                        <a:spcAft>
+                          <a:spcPts val="0"/>
+                        </a:spcAft>
+                        <a:buNone/>
+                      </a:pPr>
+                      <a:r>
+                        <a:rPr b="0" i="0" lang="en-US" sz="1350">
+                          <a:solidFill>
+                            <a:srgbClr val="5B6378"/>
+                          </a:solidFill>
+                          <a:latin typeface="Calibri"/>
+                          <a:ea typeface="Calibri"/>
+                          <a:cs typeface="Calibri"/>
+                          <a:sym typeface="Calibri"/>
+                        </a:rPr>
+                        <a:t>HTMX by default.</a:t>
+                      </a:r>
+                      <a:endParaRPr/>
+                    </a:p>
+                  </a:txBody>
+                  <a:tcPr marT="45725" marB="45725" marR="91450" marL="91450" anchor="ctr">
+                    <a:solidFill>
+                      <a:srgbClr val="FFFFFF"/>
+                    </a:solidFill>
+                  </a:tcPr>
+                </a:tc>
+              </a:tr>
+              <a:tr h="502925">
+                <a:tc>
+                  <a:txBody>
+                    <a:bodyPr/>
+                    <a:lstStyle/>
+                    <a:p>
+                      <a:pPr indent="0" lvl="0" marL="0" marR="0" rtl="0" algn="l">
+                        <a:spcBef>
+                          <a:spcPts val="0"/>
+                        </a:spcBef>
+                        <a:spcAft>
+                          <a:spcPts val="0"/>
+                        </a:spcAft>
+                        <a:buNone/>
+                      </a:pPr>
+                      <a:r>
+                        <a:rPr b="1" i="0" lang="en-US" sz="1350">
+                          <a:solidFill>
+                            <a:srgbClr val="F26351"/>
+                          </a:solidFill>
+                          <a:latin typeface="Calibri"/>
+                          <a:ea typeface="Calibri"/>
+                          <a:cs typeface="Calibri"/>
+                          <a:sym typeface="Calibri"/>
+                        </a:rPr>
+                        <a:t>Existing, working Ajax API code</a:t>
+                      </a:r>
+                      <a:endParaRPr/>
+                    </a:p>
+                  </a:txBody>
+                  <a:tcPr marT="45725" marB="45725" marR="91450" marL="91450" anchor="ctr">
+                    <a:solidFill>
+                      <a:srgbClr val="EAF6FC"/>
+                    </a:solidFill>
+                  </a:tcPr>
+                </a:tc>
+                <a:tc>
+                  <a:txBody>
+                    <a:bodyPr/>
+                    <a:lstStyle/>
+                    <a:p>
+                      <a:pPr indent="0" lvl="0" marL="0" marR="0" rtl="0" algn="l">
+                        <a:spcBef>
+                          <a:spcPts val="0"/>
+                        </a:spcBef>
+                        <a:spcAft>
+                          <a:spcPts val="0"/>
+                        </a:spcAft>
+                        <a:buNone/>
+                      </a:pPr>
+                      <a:r>
+                        <a:rPr b="0" i="0" lang="en-US" sz="1350">
+                          <a:solidFill>
+                            <a:srgbClr val="5B6378"/>
+                          </a:solidFill>
+                          <a:latin typeface="Calibri"/>
+                          <a:ea typeface="Calibri"/>
+                          <a:cs typeface="Calibri"/>
+                          <a:sym typeface="Calibri"/>
+                        </a:rPr>
+                        <a:t>Leave it alone.</a:t>
+                      </a:r>
+                      <a:endParaRPr/>
+                    </a:p>
+                  </a:txBody>
+                  <a:tcPr marT="45725" marB="45725" marR="91450" marL="91450" anchor="ctr">
+                    <a:solidFill>
+                      <a:srgbClr val="EAF6FC"/>
+                    </a:solidFill>
+                  </a:tcPr>
+                </a:tc>
+              </a:tr>
+              <a:tr h="502925">
+                <a:tc>
+                  <a:txBody>
+                    <a:bodyPr/>
+                    <a:lstStyle/>
+                    <a:p>
+                      <a:pPr indent="0" lvl="0" marL="0" marR="0" rtl="0" algn="l">
+                        <a:spcBef>
+                          <a:spcPts val="0"/>
+                        </a:spcBef>
+                        <a:spcAft>
+                          <a:spcPts val="0"/>
+                        </a:spcAft>
+                        <a:buNone/>
+                      </a:pPr>
+                      <a:r>
+                        <a:rPr b="1" i="0" lang="en-US" sz="1350">
+                          <a:solidFill>
+                            <a:srgbClr val="F26351"/>
+                          </a:solidFill>
+                          <a:latin typeface="Calibri"/>
+                          <a:ea typeface="Calibri"/>
+                          <a:cs typeface="Calibri"/>
+                          <a:sym typeface="Calibri"/>
+                        </a:rPr>
+                        <a:t>Complex multi-step forms (wizards, heavy Form API flows)</a:t>
+                      </a:r>
+                      <a:endParaRPr/>
+                    </a:p>
+                  </a:txBody>
+                  <a:tcPr marT="45725" marB="45725" marR="91450" marL="91450" anchor="ctr">
+                    <a:solidFill>
+                      <a:srgbClr val="FFFFFF"/>
+                    </a:solidFill>
+                  </a:tcPr>
+                </a:tc>
+                <a:tc>
+                  <a:txBody>
+                    <a:bodyPr/>
+                    <a:lstStyle/>
+                    <a:p>
+                      <a:pPr indent="0" lvl="0" marL="0" marR="0" rtl="0" algn="l">
+                        <a:spcBef>
+                          <a:spcPts val="0"/>
+                        </a:spcBef>
+                        <a:spcAft>
+                          <a:spcPts val="0"/>
+                        </a:spcAft>
+                        <a:buNone/>
+                      </a:pPr>
+                      <a:r>
+                        <a:rPr b="0" i="0" lang="en-US" sz="1350">
+                          <a:solidFill>
+                            <a:srgbClr val="5B6378"/>
+                          </a:solidFill>
+                          <a:latin typeface="Calibri"/>
+                          <a:ea typeface="Calibri"/>
+                          <a:cs typeface="Calibri"/>
+                          <a:sym typeface="Calibri"/>
+                        </a:rPr>
+                        <a:t>Keep them on the Ajax API for now, per §6's verdict.</a:t>
+                      </a:r>
+                      <a:endParaRPr/>
+                    </a:p>
+                  </a:txBody>
+                  <a:tcPr marT="45725" marB="45725" marR="91450" marL="91450" anchor="ctr">
+                    <a:solidFill>
+                      <a:srgbClr val="FFFFFF"/>
+                    </a:solidFill>
+                  </a:tcPr>
+                </a:tc>
+              </a:tr>
+            </a:tbl>
+          </a:graphicData>
+        </a:graphic>
+      </p:graphicFrame>
+      <p:sp>
+        <p:nvSpPr>
+          <p:cNvPr id="308" name="Google Shape;308;p35"/>
+          <p:cNvSpPr txBox="1"/>
+          <p:nvPr>
+            <p:ph type="title"/>
+          </p:nvPr>
+        </p:nvSpPr>
+        <p:spPr>
+          <a:xfrm>
+            <a:off x="525150" y="428675"/>
+            <a:ext cx="10773600" cy="627900"/>
+          </a:xfrm>
+          <a:prstGeom prst="rect">
+            <a:avLst/>
+          </a:prstGeom>
+          <a:noFill/>
+          <a:ln>
+            <a:noFill/>
+          </a:ln>
+        </p:spPr>
+        <p:txBody>
+          <a:bodyPr anchorCtr="0" anchor="ctr" bIns="45700" lIns="91425" spcFirstLastPara="1" rIns="91425" wrap="square" tIns="45700">
+            <a:normAutofit/>
+          </a:bodyPr>
+          <a:lstStyle/>
+          <a:p>
+            <a:pPr indent="0" lvl="0" marL="0" rtl="0" algn="l">
+              <a:spcBef>
+                <a:spcPts val="0"/>
+              </a:spcBef>
+              <a:spcAft>
+                <a:spcPts val="0"/>
+              </a:spcAft>
+              <a:buClr>
+                <a:srgbClr val="23325D"/>
+              </a:buClr>
+              <a:buSzPts val="3200"/>
+              <a:buFont typeface="Calibri"/>
+              <a:buNone/>
+            </a:pPr>
+            <a:r>
+              <a:rPr lang="en-US" sz="3200"/>
+              <a:t>Which tool, when</a:t>
+            </a:r>
+            <a:endParaRPr sz="3400"/>
+          </a:p>
+        </p:txBody>
+      </p:sp>
+    </p:spTree>
+  </p:cSld>
+  <p:clrMapOvr>
+    <a:masterClrMapping/>
+  </p:clrMapOvr>
+</p:sld>
+</file>
+
+<file path=ppt/slides/slide41.xml><?xml version="1.0" encoding="utf-8"?>
+<p:sld xmlns:a="http://schemas.openxmlformats.org/drawingml/2006/main" xmlns:r="http://schemas.openxmlformats.org/officeDocument/2006/relationships" xmlns:mc="http://schemas.openxmlformats.org/markup-compatibility/2006" xmlns:mv="urn:schemas-microsoft-com:mac:vml" xmlns:p="http://schemas.openxmlformats.org/presentationml/2006/main" xmlns:c="http://schemas.openxmlformats.org/drawingml/2006/chart" xmlns:dgm="http://schemas.openxmlformats.org/drawingml/2006/diagram" xmlns:o="urn:schemas-microsoft-com:office:office" xmlns:v="urn:schemas-microsoft-com:vml" xmlns:pvml="urn:schemas-microsoft-com:office:powerpoint" xmlns:com="http://schemas.openxmlformats.org/drawingml/2006/compatibility" xmlns:p14="http://schemas.microsoft.com/office/powerpoint/2010/main" xmlns:p15="http://schemas.microsoft.com/office/powerpoint/2012/main" xmlns:ahyp="http://schemas.microsoft.com/office/drawing/2018/hyperlinkcolor">
+  <p:cSld>
+    <p:spTree>
+      <p:nvGrpSpPr>
+        <p:cNvPr id="194" name="Shape 194"/>
+        <p:cNvGrpSpPr/>
+        <p:nvPr/>
+      </p:nvGrpSpPr>
+      <p:grpSpPr>
+        <a:xfrm>
+          <a:off x="0" y="0"/>
+          <a:ext cx="0" cy="0"/>
+          <a:chOff x="0" y="0"/>
+          <a:chExt cx="0" cy="0"/>
+        </a:xfrm>
+      </p:grpSpPr>
+      <p:sp>
+        <p:nvSpPr>
+          <p:cNvPr id="195" name="Google Shape;195;p22"/>
+          <p:cNvSpPr txBox="1"/>
+          <p:nvPr>
+            <p:ph type="title"/>
+          </p:nvPr>
+        </p:nvSpPr>
+        <p:spPr>
+          <a:xfrm>
+            <a:off x="553725" y="2904920"/>
+            <a:ext cx="10760700" cy="577200"/>
+          </a:xfrm>
+          <a:prstGeom prst="rect">
+            <a:avLst/>
+          </a:prstGeom>
+          <a:noFill/>
+          <a:ln>
+            <a:noFill/>
+          </a:ln>
+        </p:spPr>
+        <p:txBody>
+          <a:bodyPr anchorCtr="0" anchor="t" bIns="45700" lIns="91425" spcFirstLastPara="1" rIns="91425" wrap="square" tIns="45700">
+            <a:normAutofit/>
+          </a:bodyPr>
+          <a:lstStyle/>
+          <a:p>
+            <a:pPr indent="0" lvl="0" marL="0" rtl="0" algn="ctr">
+              <a:lnSpc>
+                <a:spcPct val="90000"/>
+              </a:lnSpc>
+              <a:spcBef>
+                <a:spcPts val="0"/>
+              </a:spcBef>
+              <a:spcAft>
+                <a:spcPts val="0"/>
+              </a:spcAft>
+              <a:buClr>
+                <a:srgbClr val="FFFFFF"/>
+              </a:buClr>
+              <a:buSzPts val="3200"/>
+              <a:buFont typeface="Calibri"/>
+              <a:buNone/>
+            </a:pPr>
+            <a:r>
+              <a:rPr b="1" i="0" lang="en-US" sz="3200">
+                <a:solidFill>
+                  <a:srgbClr val="FFFFFF"/>
+                </a:solidFill>
+                <a:latin typeface="Calibri"/>
+                <a:ea typeface="Calibri"/>
+                <a:cs typeface="Calibri"/>
+                <a:sym typeface="Calibri"/>
+              </a:rPr>
+              <a:t>A second tool in the same box, not a rewrite.</a:t>
+            </a:r>
+            <a:endParaRPr/>
+          </a:p>
+        </p:txBody>
+      </p:sp>
+      <p:sp>
+        <p:nvSpPr>
+          <p:cNvPr id="196" name="Google Shape;196;p22"/>
+          <p:cNvSpPr txBox="1"/>
+          <p:nvPr>
+            <p:ph idx="1" type="body"/>
+          </p:nvPr>
+        </p:nvSpPr>
+        <p:spPr>
+          <a:xfrm>
+            <a:off x="593100" y="3482125"/>
+            <a:ext cx="10760700" cy="822960"/>
+          </a:xfrm>
+          <a:prstGeom prst="rect">
+            <a:avLst/>
+          </a:prstGeom>
+          <a:noFill/>
+          <a:ln>
+            <a:noFill/>
+          </a:ln>
+        </p:spPr>
+        <p:txBody>
+          <a:bodyPr anchorCtr="0" anchor="t" bIns="45700" lIns="91425" spcFirstLastPara="1" rIns="91425" wrap="square" tIns="45700">
+            <a:normAutofit/>
+          </a:bodyPr>
+          <a:lstStyle/>
+          <a:p>
+            <a:pPr indent="0" lvl="0" marL="0" rtl="0" algn="ctr">
+              <a:lnSpc>
+                <a:spcPct val="125000"/>
+              </a:lnSpc>
+              <a:spcBef>
+                <a:spcPts val="0"/>
+              </a:spcBef>
+              <a:spcAft>
+                <a:spcPts val="0"/>
+              </a:spcAft>
+              <a:buClr>
+                <a:srgbClr val="FFC427"/>
+              </a:buClr>
+              <a:buSzPts val="1800"/>
+              <a:buNone/>
+            </a:pPr>
+            <a:r>
+              <a:rPr b="0" i="0" lang="en-US" sz="1800">
+                <a:solidFill>
+                  <a:srgbClr val="FFC427"/>
+                </a:solidFill>
+                <a:latin typeface="Calibri"/>
+                <a:ea typeface="Calibri"/>
+                <a:cs typeface="Calibri"/>
+                <a:sym typeface="Calibri"/>
+              </a:rPr>
+              <a:t>Use what core ships, pick a handful of low-risk candidates, boost one region to get a feel for it. No migration weekend required.</a:t>
+            </a:r>
+            <a:endParaRPr/>
+          </a:p>
+        </p:txBody>
+      </p:sp>
+      <p:sp>
+        <p:nvSpPr>
+          <p:cNvPr id="197" name="Google Shape;197;p22"/>
+          <p:cNvSpPr txBox="1"/>
+          <p:nvPr/>
+        </p:nvSpPr>
+        <p:spPr>
+          <a:xfrm>
+            <a:off x="6468100" y="6355080"/>
+            <a:ext cx="4846200" cy="200100"/>
+          </a:xfrm>
+          <a:prstGeom prst="rect">
+            <a:avLst/>
+          </a:prstGeom>
+          <a:noFill/>
+          <a:ln>
+            <a:noFill/>
+          </a:ln>
+        </p:spPr>
+        <p:txBody>
+          <a:bodyPr anchorCtr="0" anchor="t" bIns="0" lIns="0" spcFirstLastPara="1" rIns="0" wrap="square" tIns="0">
+            <a:spAutoFit/>
+          </a:bodyPr>
+          <a:lstStyle/>
+          <a:p>
+            <a:pPr indent="0" lvl="0" marL="0" marR="0" rtl="0" algn="r">
+              <a:spcBef>
+                <a:spcPts val="0"/>
+              </a:spcBef>
+              <a:spcAft>
+                <a:spcPts val="0"/>
+              </a:spcAft>
+              <a:buNone/>
+            </a:pPr>
+            <a:r>
+              <a:rPr b="1" i="0" lang="en-US" sz="1300">
+                <a:solidFill>
+                  <a:srgbClr val="FFC427"/>
+                </a:solidFill>
+                <a:latin typeface="Calibri"/>
+                <a:ea typeface="Calibri"/>
+                <a:cs typeface="Calibri"/>
+                <a:sym typeface="Calibri"/>
+              </a:rPr>
+              <a:t>→ next: current status + contributing</a:t>
+            </a:r>
+            <a:endParaRPr/>
+          </a:p>
+        </p:txBody>
+      </p:sp>
+      <p:sp>
+        <p:nvSpPr>
+          <p:cNvPr id="198" name="Google Shape;198;p22"/>
+          <p:cNvSpPr txBox="1"/>
+          <p:nvPr/>
+        </p:nvSpPr>
+        <p:spPr>
+          <a:xfrm>
+            <a:off x="640075" y="320047"/>
+            <a:ext cx="7315200" cy="184800"/>
+          </a:xfrm>
+          <a:prstGeom prst="rect">
+            <a:avLst/>
+          </a:prstGeom>
+          <a:noFill/>
+          <a:ln>
+            <a:noFill/>
+          </a:ln>
+        </p:spPr>
+        <p:txBody>
+          <a:bodyPr anchorCtr="0" anchor="t" bIns="0" lIns="0" spcFirstLastPara="1" rIns="0" wrap="square" tIns="0">
+            <a:spAutoFit/>
+          </a:bodyPr>
+          <a:lstStyle/>
+          <a:p>
+            <a:pPr indent="0" lvl="0" marL="0" marR="0" rtl="0" algn="l">
+              <a:spcBef>
+                <a:spcPts val="0"/>
+              </a:spcBef>
+              <a:spcAft>
+                <a:spcPts val="0"/>
+              </a:spcAft>
+              <a:buNone/>
+            </a:pPr>
+            <a:r>
+              <a:rPr b="1" lang="en-US" sz="1200">
+                <a:solidFill>
+                  <a:srgbClr val="FFC427"/>
+                </a:solidFill>
+                <a:latin typeface="Calibri"/>
+                <a:ea typeface="Calibri"/>
+                <a:cs typeface="Calibri"/>
+                <a:sym typeface="Calibri"/>
+              </a:rPr>
+              <a:t>— </a:t>
+            </a:r>
+            <a:r>
+              <a:rPr b="1" lang="en-US" sz="1200">
+                <a:solidFill>
+                  <a:srgbClr val="FFC427"/>
+                </a:solidFill>
+                <a:latin typeface="Calibri"/>
+                <a:ea typeface="Calibri"/>
+                <a:cs typeface="Calibri"/>
+                <a:sym typeface="Calibri"/>
+              </a:rPr>
+              <a:t>THE TAKE</a:t>
+            </a:r>
+            <a:endParaRPr>
+              <a:solidFill>
+                <a:srgbClr val="FFC427"/>
+              </a:solidFill>
+            </a:endParaRPr>
+          </a:p>
+        </p:txBody>
+      </p:sp>
+    </p:spTree>
+  </p:cSld>
+  <p:clrMapOvr>
+    <a:masterClrMapping/>
+  </p:clrMapOvr>
+</p:sld>
+</file>
+
+<file path=ppt/slides/slide42.xml><?xml version="1.0" encoding="utf-8"?>
+<p:sld xmlns:a="http://schemas.openxmlformats.org/drawingml/2006/main" xmlns:r="http://schemas.openxmlformats.org/officeDocument/2006/relationships" xmlns:mc="http://schemas.openxmlformats.org/markup-compatibility/2006" xmlns:mv="urn:schemas-microsoft-com:mac:vml" xmlns:p="http://schemas.openxmlformats.org/presentationml/2006/main" xmlns:c="http://schemas.openxmlformats.org/drawingml/2006/chart" xmlns:dgm="http://schemas.openxmlformats.org/drawingml/2006/diagram" xmlns:o="urn:schemas-microsoft-com:office:office" xmlns:v="urn:schemas-microsoft-com:vml" xmlns:pvml="urn:schemas-microsoft-com:office:powerpoint" xmlns:com="http://schemas.openxmlformats.org/drawingml/2006/compatibility" xmlns:p14="http://schemas.microsoft.com/office/powerpoint/2010/main" xmlns:p15="http://schemas.microsoft.com/office/powerpoint/2012/main" xmlns:ahyp="http://schemas.microsoft.com/office/drawing/2018/hyperlinkcolor">
+  <p:cSld>
+    <p:spTree>
+      <p:nvGrpSpPr>
+        <p:cNvPr id="365" name="Shape 365"/>
+        <p:cNvGrpSpPr/>
+        <p:nvPr/>
+      </p:nvGrpSpPr>
+      <p:grpSpPr>
+        <a:xfrm>
+          <a:off x="0" y="0"/>
+          <a:ext cx="0" cy="0"/>
+          <a:chOff x="0" y="0"/>
+          <a:chExt cx="0" cy="0"/>
+        </a:xfrm>
+      </p:grpSpPr>
+      <p:sp>
+        <p:nvSpPr>
+          <p:cNvPr id="367" name="Google Shape;367;p42"/>
+          <p:cNvSpPr txBox="1"/>
+          <p:nvPr/>
+        </p:nvSpPr>
+        <p:spPr>
+          <a:xfrm>
+            <a:off x="7589520" y="4297680"/>
+            <a:ext cx="3931920" cy="2103120"/>
+          </a:xfrm>
+          <a:prstGeom prst="rect">
+            <a:avLst/>
+          </a:prstGeom>
+          <a:noFill/>
+          <a:ln>
+            <a:noFill/>
+          </a:ln>
+        </p:spPr>
+        <p:txBody>
+          <a:bodyPr anchorCtr="0" anchor="ctr" bIns="0" lIns="0" spcFirstLastPara="1" rIns="0" wrap="square" tIns="0">
+            <a:spAutoFit/>
+          </a:bodyPr>
+          <a:lstStyle/>
+          <a:p>
+            <a:pPr indent="0" lvl="0" marL="0" marR="0" rtl="0" algn="r">
+              <a:spcBef>
+                <a:spcPts val="0"/>
+              </a:spcBef>
+              <a:spcAft>
+                <a:spcPts val="0"/>
+              </a:spcAft>
+              <a:buNone/>
+            </a:pPr>
+            <a:r>
+              <a:rPr b="1" i="0" lang="en-US" sz="17000">
+                <a:solidFill>
+                  <a:srgbClr val="FBDAD3"/>
+                </a:solidFill>
+                <a:latin typeface="Courier New"/>
+                <a:ea typeface="Courier New"/>
+                <a:cs typeface="Courier New"/>
+                <a:sym typeface="Courier New"/>
+              </a:rPr>
+              <a:t>08</a:t>
+            </a:r>
+            <a:endParaRPr/>
+          </a:p>
+        </p:txBody>
+      </p:sp>
+      <p:sp>
+        <p:nvSpPr>
+          <p:cNvPr id="368" name="Google Shape;368;p42"/>
+          <p:cNvSpPr txBox="1"/>
+          <p:nvPr>
+            <p:ph type="title"/>
+          </p:nvPr>
+        </p:nvSpPr>
+        <p:spPr>
+          <a:xfrm>
+            <a:off x="799925" y="1847575"/>
+            <a:ext cx="10922700" cy="1086000"/>
+          </a:xfrm>
+          <a:prstGeom prst="rect">
+            <a:avLst/>
+          </a:prstGeom>
+          <a:noFill/>
+          <a:ln>
+            <a:noFill/>
+          </a:ln>
+        </p:spPr>
+        <p:txBody>
+          <a:bodyPr anchorCtr="0" anchor="t" bIns="45700" lIns="91425" spcFirstLastPara="1" rIns="91425" wrap="square" tIns="45700">
+            <a:normAutofit/>
+          </a:bodyPr>
+          <a:lstStyle/>
+          <a:p>
+            <a:pPr indent="0" lvl="0" marL="0" rtl="0" algn="l">
+              <a:spcBef>
+                <a:spcPts val="0"/>
+              </a:spcBef>
+              <a:spcAft>
+                <a:spcPts val="0"/>
+              </a:spcAft>
+              <a:buClr>
+                <a:srgbClr val="23325D"/>
+              </a:buClr>
+              <a:buSzPts val="3600"/>
+              <a:buFont typeface="Calibri"/>
+              <a:buNone/>
+            </a:pPr>
+            <a:r>
+              <a:rPr lang="en-US" sz="3600"/>
+              <a:t>Current Status + How to Contribute</a:t>
+            </a:r>
+            <a:endParaRPr sz="3600"/>
+          </a:p>
+        </p:txBody>
+      </p:sp>
+    </p:spTree>
+  </p:cSld>
+  <p:clrMapOvr>
+    <a:masterClrMapping/>
+  </p:clrMapOvr>
+</p:sld>
+</file>
+
+<file path=ppt/slides/slide43.xml><?xml version="1.0" encoding="utf-8"?>
+<p:sld xmlns:a="http://schemas.openxmlformats.org/drawingml/2006/main" xmlns:r="http://schemas.openxmlformats.org/officeDocument/2006/relationships" xmlns:mc="http://schemas.openxmlformats.org/markup-compatibility/2006" xmlns:mv="urn:schemas-microsoft-com:mac:vml" xmlns:p="http://schemas.openxmlformats.org/presentationml/2006/main" xmlns:c="http://schemas.openxmlformats.org/drawingml/2006/chart" xmlns:dgm="http://schemas.openxmlformats.org/drawingml/2006/diagram" xmlns:o="urn:schemas-microsoft-com:office:office" xmlns:v="urn:schemas-microsoft-com:vml" xmlns:pvml="urn:schemas-microsoft-com:office:powerpoint" xmlns:com="http://schemas.openxmlformats.org/drawingml/2006/compatibility" xmlns:p14="http://schemas.microsoft.com/office/powerpoint/2010/main" xmlns:p15="http://schemas.microsoft.com/office/powerpoint/2012/main" xmlns:ahyp="http://schemas.microsoft.com/office/drawing/2018/hyperlinkcolor">
+  <p:cSld>
+    <p:spTree>
+      <p:nvGrpSpPr>
+        <p:cNvPr id="295" name="Shape 295"/>
+        <p:cNvGrpSpPr/>
+        <p:nvPr/>
+      </p:nvGrpSpPr>
+      <p:grpSpPr>
+        <a:xfrm>
+          <a:off x="0" y="0"/>
+          <a:ext cx="0" cy="0"/>
+          <a:chOff x="0" y="0"/>
+          <a:chExt cx="0" cy="0"/>
+        </a:xfrm>
+      </p:grpSpPr>
+      <p:sp>
+        <p:nvSpPr>
+          <p:cNvPr id="296" name="Google Shape;296;p34"/>
+          <p:cNvSpPr txBox="1"/>
+          <p:nvPr/>
+        </p:nvSpPr>
+        <p:spPr>
+          <a:xfrm>
+            <a:off x="640080" y="320040"/>
+            <a:ext cx="7315200" cy="320040"/>
+          </a:xfrm>
+          <a:prstGeom prst="rect">
+            <a:avLst/>
+          </a:prstGeom>
+          <a:noFill/>
+          <a:ln>
+            <a:noFill/>
+          </a:ln>
+        </p:spPr>
+        <p:txBody>
+          <a:bodyPr anchorCtr="0" anchor="t" bIns="0" lIns="0" spcFirstLastPara="1" rIns="0" wrap="square" tIns="0">
+            <a:spAutoFit/>
+          </a:bodyPr>
+          <a:lstStyle/>
+          <a:p>
+            <a:pPr indent="0" lvl="0" marL="0" marR="0" rtl="0" algn="l">
+              <a:spcBef>
+                <a:spcPts val="0"/>
+              </a:spcBef>
+              <a:spcAft>
+                <a:spcPts val="0"/>
+              </a:spcAft>
+              <a:buNone/>
+            </a:pPr>
+            <a:r>
+              <a:rPr b="1" i="0" lang="en-US" sz="1200">
+                <a:solidFill>
+                  <a:srgbClr val="F26351"/>
+                </a:solidFill>
+                <a:latin typeface="Calibri"/>
+                <a:ea typeface="Calibri"/>
+                <a:cs typeface="Calibri"/>
+                <a:sym typeface="Calibri"/>
+              </a:rPr>
+              <a:t>WHERE THINGS STAND TODAY</a:t>
+            </a:r>
+            <a:endParaRPr/>
+          </a:p>
+        </p:txBody>
+      </p:sp>
+      <p:sp>
+        <p:nvSpPr>
+          <p:cNvPr id="297" name="Google Shape;297;p34"/>
+          <p:cNvSpPr/>
+          <p:nvPr/>
+        </p:nvSpPr>
+        <p:spPr>
+          <a:xfrm>
+            <a:off x="640080" y="2697480"/>
+            <a:ext cx="5317200" cy="1417200"/>
+          </a:xfrm>
+          <a:prstGeom prst="roundRect">
+            <a:avLst>
+              <a:gd fmla="val 6000" name="adj"/>
+            </a:avLst>
+          </a:prstGeom>
+          <a:solidFill>
+            <a:srgbClr val="FBE4DF"/>
+          </a:solidFill>
+          <a:ln>
+            <a:noFill/>
+          </a:ln>
+        </p:spPr>
+        <p:txBody>
+          <a:bodyPr anchorCtr="0" anchor="ctr" bIns="164575" lIns="228600" spcFirstLastPara="1" rIns="228600" wrap="square" tIns="164575">
+            <a:noAutofit/>
+          </a:bodyPr>
+          <a:lstStyle/>
+          <a:p>
+            <a:pPr indent="0" lvl="0" marL="0" marR="0" rtl="0" algn="l">
+              <a:spcBef>
+                <a:spcPts val="0"/>
+              </a:spcBef>
+              <a:spcAft>
+                <a:spcPts val="0"/>
+              </a:spcAft>
+              <a:buNone/>
+            </a:pPr>
+            <a:r>
+              <a:rPr b="1" i="0" lang="en-US" sz="1400">
+                <a:solidFill>
+                  <a:srgbClr val="F26351"/>
+                </a:solidFill>
+                <a:latin typeface="Courier New"/>
+                <a:ea typeface="Courier New"/>
+                <a:cs typeface="Courier New"/>
+                <a:sym typeface="Courier New"/>
+              </a:rPr>
+              <a:t>CORE INITIATIVE</a:t>
+            </a:r>
+            <a:endParaRPr/>
+          </a:p>
+          <a:p>
+            <a:pPr indent="0" lvl="0" marL="0" marR="0" rtl="0" algn="l">
+              <a:lnSpc>
+                <a:spcPct val="120000"/>
+              </a:lnSpc>
+              <a:spcBef>
+                <a:spcPts val="0"/>
+              </a:spcBef>
+              <a:spcAft>
+                <a:spcPts val="0"/>
+              </a:spcAft>
+              <a:buNone/>
+            </a:pPr>
+            <a:r>
+              <a:rPr b="0" i="0" lang="en-US" sz="1350">
+                <a:solidFill>
+                  <a:srgbClr val="5B6378"/>
+                </a:solidFill>
+                <a:latin typeface="Calibri"/>
+                <a:ea typeface="Calibri"/>
+                <a:cs typeface="Calibri"/>
+                <a:sym typeface="Calibri"/>
+              </a:rPr>
+              <a:t>"Gradually replace Drupal's AJAX system with HTMX" - still active. Both APIs run side by side until contrib has time to convert.</a:t>
+            </a:r>
+            <a:endParaRPr/>
+          </a:p>
+        </p:txBody>
+      </p:sp>
+      <p:sp>
+        <p:nvSpPr>
+          <p:cNvPr id="298" name="Google Shape;298;p34"/>
+          <p:cNvSpPr/>
+          <p:nvPr/>
+        </p:nvSpPr>
+        <p:spPr>
+          <a:xfrm>
+            <a:off x="6231636" y="2697480"/>
+            <a:ext cx="5317200" cy="1417200"/>
+          </a:xfrm>
+          <a:prstGeom prst="roundRect">
+            <a:avLst>
+              <a:gd fmla="val 6000" name="adj"/>
+            </a:avLst>
+          </a:prstGeom>
+          <a:solidFill>
+            <a:srgbClr val="FBE4DF"/>
+          </a:solidFill>
+          <a:ln>
+            <a:noFill/>
+          </a:ln>
+        </p:spPr>
+        <p:txBody>
+          <a:bodyPr anchorCtr="0" anchor="ctr" bIns="164575" lIns="228600" spcFirstLastPara="1" rIns="228600" wrap="square" tIns="164575">
+            <a:noAutofit/>
+          </a:bodyPr>
+          <a:lstStyle/>
+          <a:p>
+            <a:pPr indent="0" lvl="0" marL="0" marR="0" rtl="0" algn="l">
+              <a:spcBef>
+                <a:spcPts val="0"/>
+              </a:spcBef>
+              <a:spcAft>
+                <a:spcPts val="0"/>
+              </a:spcAft>
+              <a:buNone/>
+            </a:pPr>
+            <a:r>
+              <a:rPr b="1" i="0" lang="en-US" sz="1400">
+                <a:solidFill>
+                  <a:srgbClr val="F26351"/>
+                </a:solidFill>
+                <a:latin typeface="Courier New"/>
+                <a:ea typeface="Courier New"/>
+                <a:cs typeface="Courier New"/>
+                <a:sym typeface="Courier New"/>
+              </a:rPr>
+              <a:t>CONTRIB MODULE</a:t>
+            </a:r>
+            <a:endParaRPr/>
+          </a:p>
+          <a:p>
+            <a:pPr indent="0" lvl="0" marL="0" marR="0" rtl="0" algn="l">
+              <a:lnSpc>
+                <a:spcPct val="120000"/>
+              </a:lnSpc>
+              <a:spcBef>
+                <a:spcPts val="0"/>
+              </a:spcBef>
+              <a:spcAft>
+                <a:spcPts val="0"/>
+              </a:spcAft>
+              <a:buNone/>
+            </a:pPr>
+            <a:r>
+              <a:rPr b="0" i="0" lang="en-US" sz="1350">
+                <a:solidFill>
+                  <a:srgbClr val="5B6378"/>
+                </a:solidFill>
+                <a:latin typeface="Calibri"/>
+                <a:ea typeface="Calibri"/>
+                <a:cs typeface="Calibri"/>
+                <a:sym typeface="Calibri"/>
+              </a:rPr>
+              <a:t>drupal/htmx adds extra tooling on top of core - 1,156 sites already using it.</a:t>
+            </a:r>
+            <a:endParaRPr/>
+          </a:p>
+        </p:txBody>
+      </p:sp>
+      <p:sp>
+        <p:nvSpPr>
+          <p:cNvPr id="299" name="Google Shape;299;p34"/>
+          <p:cNvSpPr txBox="1"/>
+          <p:nvPr/>
+        </p:nvSpPr>
+        <p:spPr>
+          <a:xfrm>
+            <a:off x="640080" y="320040"/>
+            <a:ext cx="7315200" cy="215400"/>
+          </a:xfrm>
+          <a:prstGeom prst="rect">
+            <a:avLst/>
+          </a:prstGeom>
+          <a:noFill/>
+          <a:ln>
+            <a:noFill/>
+          </a:ln>
+        </p:spPr>
+        <p:txBody>
+          <a:bodyPr anchorCtr="0" anchor="t" bIns="0" lIns="0" spcFirstLastPara="1" rIns="0" wrap="square" tIns="0">
+            <a:spAutoFit/>
+          </a:bodyPr>
+          <a:lstStyle/>
+          <a:p>
+            <a:pPr indent="0" lvl="0" marL="0" marR="0" rtl="0" algn="l">
+              <a:spcBef>
+                <a:spcPts val="0"/>
+              </a:spcBef>
+              <a:spcAft>
+                <a:spcPts val="0"/>
+              </a:spcAft>
+              <a:buNone/>
+            </a:pPr>
+            <a:r>
+              <a:t/>
+            </a:r>
+            <a:endParaRPr/>
+          </a:p>
+        </p:txBody>
+      </p:sp>
+      <p:sp>
+        <p:nvSpPr>
+          <p:cNvPr id="2002" name="Shape 2002"/>
+          <p:cNvSpPr txBox="1"/>
+          <p:nvPr/>
+        </p:nvSpPr>
+        <p:spPr>
+          <a:xfrm>
+            <a:off x="640080" y="1143000"/>
+            <a:ext cx="10241280" cy="822960"/>
+          </a:xfrm>
+          <a:prstGeom prst="rect">
+            <a:avLst/>
+          </a:prstGeom>
+          <a:noFill/>
+          <a:ln>
+            <a:noFill/>
+          </a:ln>
+        </p:spPr>
+        <p:txBody>
+          <a:bodyPr anchorCtr="0" anchor="t" bIns="0" lIns="0" spcFirstLastPara="1" rIns="0" wrap="square" tIns="0">
+            <a:spAutoFit/>
+          </a:bodyPr>
+          <a:lstStyle/>
+          <a:p>
+            <a:pPr indent="0" lvl="0" marL="0" marR="0" rtl="0" algn="l">
+              <a:lnSpc>
+                <a:spcPct val="115000"/>
+              </a:lnSpc>
+              <a:spcBef>
+                <a:spcPts val="0"/>
+              </a:spcBef>
+              <a:spcAft>
+                <a:spcPts val="0"/>
+              </a:spcAft>
+              <a:buNone/>
+            </a:pPr>
+            <a:r>
+              <a:rPr b="0" i="0" lang="en-US" sz="2000">
+                <a:solidFill>
+                  <a:srgbClr val="23325D"/>
+                </a:solidFill>
+                <a:latin typeface="Calibri"/>
+                <a:ea typeface="Calibri"/>
+                <a:cs typeface="Calibri"/>
+                <a:sym typeface="Calibri"/>
+              </a:rPr>
+              <a:t>This isn't a someday story - HTMX arrived in core in 11.2 and became fully featured in 11.3, as part of an active initiative to replace the Ajax system.</a:t>
+            </a:r>
+            <a:endParaRPr/>
+          </a:p>
+        </p:txBody>
+      </p:sp>
+      <p:sp>
+        <p:nvSpPr>
+          <p:cNvPr id="4000" name="Shape 4000"/>
+          <p:cNvSpPr txBox="1"/>
+          <p:nvPr/>
+        </p:nvSpPr>
+        <p:spPr>
+          <a:xfrm>
+            <a:off x="640080" y="4434840"/>
+            <a:ext cx="10241280" cy="457200"/>
+          </a:xfrm>
+          <a:prstGeom prst="rect">
+            <a:avLst/>
+          </a:prstGeom>
+          <a:noFill/>
+          <a:ln>
+            <a:noFill/>
+          </a:ln>
+        </p:spPr>
+        <p:txBody>
+          <a:bodyPr anchorCtr="0" anchor="t" bIns="0" lIns="0" spcFirstLastPara="1" rIns="0" wrap="square" tIns="0">
+            <a:spAutoFit/>
+          </a:bodyPr>
+          <a:lstStyle/>
+          <a:p>
+            <a:pPr indent="0" lvl="0" marL="0" marR="0" rtl="0" algn="l">
+              <a:lnSpc>
+                <a:spcPct val="115000"/>
+              </a:lnSpc>
+              <a:spcBef>
+                <a:spcPts val="0"/>
+              </a:spcBef>
+              <a:spcAft>
+                <a:spcPts val="0"/>
+              </a:spcAft>
+              <a:buNone/>
+            </a:pPr>
+            <a:r>
+              <a:rPr b="1" i="0" lang="en-US" sz="2000">
+                <a:solidFill>
+                  <a:srgbClr val="23325D"/>
+                </a:solidFill>
+                <a:latin typeface="Calibri"/>
+                <a:ea typeface="Calibri"/>
+                <a:cs typeface="Calibri"/>
+                <a:sym typeface="Calibri"/>
+              </a:rPr>
+              <a:t>Up to 71% less JavaScript</a:t>
+            </a:r>
+            <a:r>
+              <a:rPr b="0" i="0" lang="en-US" sz="2000">
+                <a:solidFill>
+                  <a:srgbClr val="23325D"/>
+                </a:solidFill>
+                <a:latin typeface="Calibri"/>
+                <a:ea typeface="Calibri"/>
+                <a:cs typeface="Calibri"/>
+                <a:sym typeface="Calibri"/>
+              </a:rPr>
+              <a:t> loaded for browser-server interactions with native HTMX, per drupal.org.</a:t>
+            </a:r>
+            <a:endParaRPr/>
+          </a:p>
+        </p:txBody>
+      </p:sp>
+    </p:spTree>
+  </p:cSld>
+  <p:clrMapOvr>
+    <a:masterClrMapping/>
+  </p:clrMapOvr>
+</p:sld>
+</file>
+
+<file path=ppt/slides/slide44.xml><?xml version="1.0" encoding="utf-8"?>
+<p:sld xmlns:a="http://schemas.openxmlformats.org/drawingml/2006/main" xmlns:r="http://schemas.openxmlformats.org/officeDocument/2006/relationships" xmlns:mc="http://schemas.openxmlformats.org/markup-compatibility/2006" xmlns:mv="urn:schemas-microsoft-com:mac:vml" xmlns:p="http://schemas.openxmlformats.org/presentationml/2006/main" xmlns:c="http://schemas.openxmlformats.org/drawingml/2006/chart" xmlns:dgm="http://schemas.openxmlformats.org/drawingml/2006/diagram" xmlns:o="urn:schemas-microsoft-com:office:office" xmlns:v="urn:schemas-microsoft-com:vml" xmlns:pvml="urn:schemas-microsoft-com:office:powerpoint" xmlns:com="http://schemas.openxmlformats.org/drawingml/2006/compatibility" xmlns:p14="http://schemas.microsoft.com/office/powerpoint/2010/main" xmlns:p15="http://schemas.microsoft.com/office/powerpoint/2012/main" xmlns:ahyp="http://schemas.microsoft.com/office/drawing/2018/hyperlinkcolor">
+  <p:cSld>
+    <p:spTree>
+      <p:nvGrpSpPr>
+        <p:cNvPr id="295" name="Shape 295"/>
+        <p:cNvGrpSpPr/>
+        <p:nvPr/>
+      </p:nvGrpSpPr>
+      <p:grpSpPr>
+        <a:xfrm>
+          <a:off x="0" y="0"/>
+          <a:ext cx="0" cy="0"/>
+          <a:chOff x="0" y="0"/>
+          <a:chExt cx="0" cy="0"/>
+        </a:xfrm>
+      </p:grpSpPr>
+      <p:sp>
+        <p:nvSpPr>
+          <p:cNvPr id="296" name="Google Shape;296;p34"/>
+          <p:cNvSpPr txBox="1"/>
+          <p:nvPr/>
+        </p:nvSpPr>
+        <p:spPr>
+          <a:xfrm>
+            <a:off x="640080" y="320040"/>
+            <a:ext cx="7315200" cy="320040"/>
+          </a:xfrm>
+          <a:prstGeom prst="rect">
+            <a:avLst/>
+          </a:prstGeom>
+          <a:noFill/>
+          <a:ln>
+            <a:noFill/>
+          </a:ln>
+        </p:spPr>
+        <p:txBody>
+          <a:bodyPr anchorCtr="0" anchor="t" bIns="0" lIns="0" spcFirstLastPara="1" rIns="0" wrap="square" tIns="0">
+            <a:spAutoFit/>
+          </a:bodyPr>
+          <a:lstStyle/>
+          <a:p>
+            <a:pPr indent="0" lvl="0" marL="0" marR="0" rtl="0" algn="l">
+              <a:spcBef>
+                <a:spcPts val="0"/>
+              </a:spcBef>
+              <a:spcAft>
+                <a:spcPts val="0"/>
+              </a:spcAft>
+              <a:buNone/>
+            </a:pPr>
+            <a:r>
+              <a:rPr b="1" i="0" lang="en-US" sz="1200">
+                <a:solidFill>
+                  <a:srgbClr val="F26351"/>
+                </a:solidFill>
+                <a:latin typeface="Calibri"/>
+                <a:ea typeface="Calibri"/>
+                <a:cs typeface="Calibri"/>
+                <a:sym typeface="Calibri"/>
+              </a:rPr>
+              <a:t>BOTH APIS, ON PURPOSE</a:t>
+            </a:r>
+            <a:endParaRPr/>
+          </a:p>
+        </p:txBody>
+      </p:sp>
+      <p:sp>
+        <p:nvSpPr>
+          <p:cNvPr id="297" name="Google Shape;297;p34"/>
+          <p:cNvSpPr/>
+          <p:nvPr/>
+        </p:nvSpPr>
+        <p:spPr>
+          <a:xfrm>
+            <a:off x="640080" y="2697480"/>
+            <a:ext cx="5317200" cy="1417200"/>
+          </a:xfrm>
+          <a:prstGeom prst="roundRect">
+            <a:avLst>
+              <a:gd fmla="val 6000" name="adj"/>
+            </a:avLst>
+          </a:prstGeom>
+          <a:solidFill>
+            <a:srgbClr val="EAF6FC"/>
+          </a:solidFill>
+          <a:ln>
+            <a:noFill/>
+          </a:ln>
+        </p:spPr>
+        <p:txBody>
+          <a:bodyPr anchorCtr="0" anchor="ctr" bIns="164575" lIns="228600" spcFirstLastPara="1" rIns="228600" wrap="square" tIns="164575">
+            <a:noAutofit/>
+          </a:bodyPr>
+          <a:lstStyle/>
+          <a:p>
+            <a:pPr indent="0" lvl="0" marL="0" marR="0" rtl="0" algn="l">
+              <a:spcBef>
+                <a:spcPts val="0"/>
+              </a:spcBef>
+              <a:spcAft>
+                <a:spcPts val="0"/>
+              </a:spcAft>
+              <a:buNone/>
+            </a:pPr>
+            <a:r>
+              <a:rPr b="1" i="0" lang="en-US" sz="1400">
+                <a:solidFill>
+                  <a:srgbClr val="0D6DAC"/>
+                </a:solidFill>
+                <a:latin typeface="Courier New"/>
+                <a:ea typeface="Courier New"/>
+                <a:cs typeface="Courier New"/>
+                <a:sym typeface="Courier New"/>
+              </a:rPr>
+              <a:t>EXPERIENCE BUILDER</a:t>
+            </a:r>
+            <a:endParaRPr/>
+          </a:p>
+          <a:p>
+            <a:pPr indent="0" lvl="0" marL="0" marR="0" rtl="0" algn="l">
+              <a:lnSpc>
+                <a:spcPct val="120000"/>
+              </a:lnSpc>
+              <a:spcBef>
+                <a:spcPts val="0"/>
+              </a:spcBef>
+              <a:spcAft>
+                <a:spcPts val="0"/>
+              </a:spcAft>
+              <a:buNone/>
+            </a:pPr>
+            <a:r>
+              <a:rPr b="0" i="0" lang="en-US" sz="1350">
+                <a:solidFill>
+                  <a:srgbClr val="5B6378"/>
+                </a:solidFill>
+                <a:latin typeface="Calibri"/>
+                <a:ea typeface="Calibri"/>
+                <a:cs typeface="Calibri"/>
+                <a:sym typeface="Calibri"/>
+              </a:rPr>
+              <a:t>Page/layout building - not interaction plumbing.</a:t>
+            </a:r>
+            <a:endParaRPr/>
+          </a:p>
+        </p:txBody>
+      </p:sp>
+      <p:sp>
+        <p:nvSpPr>
+          <p:cNvPr id="298" name="Google Shape;298;p34"/>
+          <p:cNvSpPr/>
+          <p:nvPr/>
+        </p:nvSpPr>
+        <p:spPr>
+          <a:xfrm>
+            <a:off x="6231636" y="2697480"/>
+            <a:ext cx="5317200" cy="1417200"/>
+          </a:xfrm>
+          <a:prstGeom prst="roundRect">
+            <a:avLst>
+              <a:gd fmla="val 6000" name="adj"/>
+            </a:avLst>
+          </a:prstGeom>
+          <a:solidFill>
+            <a:srgbClr val="EAF6FC"/>
+          </a:solidFill>
+          <a:ln>
+            <a:noFill/>
+          </a:ln>
+        </p:spPr>
+        <p:txBody>
+          <a:bodyPr anchorCtr="0" anchor="ctr" bIns="164575" lIns="228600" spcFirstLastPara="1" rIns="228600" wrap="square" tIns="164575">
+            <a:noAutofit/>
+          </a:bodyPr>
+          <a:lstStyle/>
+          <a:p>
+            <a:pPr indent="0" lvl="0" marL="0" marR="0" rtl="0" algn="l">
+              <a:spcBef>
+                <a:spcPts val="0"/>
+              </a:spcBef>
+              <a:spcAft>
+                <a:spcPts val="0"/>
+              </a:spcAft>
+              <a:buNone/>
+            </a:pPr>
+            <a:r>
+              <a:rPr b="1" i="0" lang="en-US" sz="1400">
+                <a:solidFill>
+                  <a:srgbClr val="0D6DAC"/>
+                </a:solidFill>
+                <a:latin typeface="Courier New"/>
+                <a:ea typeface="Courier New"/>
+                <a:cs typeface="Courier New"/>
+                <a:sym typeface="Courier New"/>
+              </a:rPr>
+              <a:t>SINGLE DIRECTORY COMPONENTS</a:t>
+            </a:r>
+            <a:endParaRPr/>
+          </a:p>
+          <a:p>
+            <a:pPr indent="0" lvl="0" marL="0" marR="0" rtl="0" algn="l">
+              <a:lnSpc>
+                <a:spcPct val="120000"/>
+              </a:lnSpc>
+              <a:spcBef>
+                <a:spcPts val="0"/>
+              </a:spcBef>
+              <a:spcAft>
+                <a:spcPts val="0"/>
+              </a:spcAft>
+              <a:buNone/>
+            </a:pPr>
+            <a:r>
+              <a:rPr b="0" i="0" lang="en-US" sz="1350">
+                <a:solidFill>
+                  <a:srgbClr val="5B6378"/>
+                </a:solidFill>
+                <a:latin typeface="Calibri"/>
+                <a:ea typeface="Calibri"/>
+                <a:cs typeface="Calibri"/>
+                <a:sym typeface="Calibri"/>
+              </a:rPr>
+              <a:t>Component authoring - not interaction plumbing.</a:t>
+            </a:r>
+            <a:endParaRPr/>
+          </a:p>
+        </p:txBody>
+      </p:sp>
+      <p:sp>
+        <p:nvSpPr>
+          <p:cNvPr id="299" name="Google Shape;299;p34"/>
+          <p:cNvSpPr txBox="1"/>
+          <p:nvPr/>
+        </p:nvSpPr>
+        <p:spPr>
+          <a:xfrm>
+            <a:off x="640080" y="320040"/>
+            <a:ext cx="7315200" cy="215400"/>
+          </a:xfrm>
+          <a:prstGeom prst="rect">
+            <a:avLst/>
+          </a:prstGeom>
+          <a:noFill/>
+          <a:ln>
+            <a:noFill/>
+          </a:ln>
+        </p:spPr>
+        <p:txBody>
+          <a:bodyPr anchorCtr="0" anchor="t" bIns="0" lIns="0" spcFirstLastPara="1" rIns="0" wrap="square" tIns="0">
+            <a:spAutoFit/>
+          </a:bodyPr>
+          <a:lstStyle/>
+          <a:p>
+            <a:pPr indent="0" lvl="0" marL="0" marR="0" rtl="0" algn="l">
+              <a:spcBef>
+                <a:spcPts val="0"/>
+              </a:spcBef>
+              <a:spcAft>
+                <a:spcPts val="0"/>
+              </a:spcAft>
+              <a:buNone/>
+            </a:pPr>
+            <a:r>
+              <a:t/>
+            </a:r>
+            <a:endParaRPr/>
+          </a:p>
+        </p:txBody>
+      </p:sp>
+      <p:sp>
+        <p:nvSpPr>
+          <p:cNvPr id="2003" name="Shape 2003"/>
+          <p:cNvSpPr txBox="1"/>
+          <p:nvPr/>
+        </p:nvSpPr>
+        <p:spPr>
+          <a:xfrm>
+            <a:off x="640080" y="1143000"/>
+            <a:ext cx="10241280" cy="822960"/>
+          </a:xfrm>
+          <a:prstGeom prst="rect">
+            <a:avLst/>
+          </a:prstGeom>
+          <a:noFill/>
+          <a:ln>
+            <a:noFill/>
+          </a:ln>
+        </p:spPr>
+        <p:txBody>
+          <a:bodyPr anchorCtr="0" anchor="t" bIns="0" lIns="0" spcFirstLastPara="1" rIns="0" wrap="square" tIns="0">
+            <a:spAutoFit/>
+          </a:bodyPr>
+          <a:lstStyle/>
+          <a:p>
+            <a:pPr indent="0" lvl="0" marL="0" marR="0" rtl="0" algn="l">
+              <a:lnSpc>
+                <a:spcPct val="115000"/>
+              </a:lnSpc>
+              <a:spcBef>
+                <a:spcPts val="0"/>
+              </a:spcBef>
+              <a:spcAft>
+                <a:spcPts val="0"/>
+              </a:spcAft>
+              <a:buNone/>
+            </a:pPr>
+            <a:r>
+              <a:rPr b="0" i="0" lang="en-US" sz="2000">
+                <a:solidFill>
+                  <a:srgbClr val="23325D"/>
+                </a:solidFill>
+                <a:latin typeface="Calibri"/>
+                <a:ea typeface="Calibri"/>
+                <a:cs typeface="Calibri"/>
+                <a:sym typeface="Calibri"/>
+              </a:rPr>
+              <a:t>Same incremental philosophy as §7 - just scaled up to core. Full deprecation waits until contrib has had real time to convert.</a:t>
+            </a:r>
+            <a:endParaRPr/>
+          </a:p>
+        </p:txBody>
+      </p:sp>
+      <p:sp>
+        <p:nvSpPr>
+          <p:cNvPr id="2004" name="Shape 2004"/>
+          <p:cNvSpPr txBox="1"/>
+          <p:nvPr/>
+        </p:nvSpPr>
+        <p:spPr>
+          <a:xfrm>
+            <a:off x="640080" y="2286000"/>
+            <a:ext cx="5486400" cy="228600"/>
+          </a:xfrm>
+          <a:prstGeom prst="rect">
+            <a:avLst/>
+          </a:prstGeom>
+          <a:noFill/>
+          <a:ln>
+            <a:noFill/>
+          </a:ln>
+        </p:spPr>
+        <p:txBody>
+          <a:bodyPr anchorCtr="0" anchor="t" bIns="0" lIns="0" spcFirstLastPara="1" rIns="0" wrap="square" tIns="0">
+            <a:spAutoFit/>
+          </a:bodyPr>
+          <a:lstStyle/>
+          <a:p>
+            <a:pPr indent="0" lvl="0" marL="0" marR="0" rtl="0" algn="l">
+              <a:spcBef>
+                <a:spcPts val="0"/>
+              </a:spcBef>
+              <a:spcAft>
+                <a:spcPts val="0"/>
+              </a:spcAft>
+              <a:buNone/>
+            </a:pPr>
+            <a:r>
+              <a:rPr b="1" i="0" lang="en-US" sz="1500">
+                <a:solidFill>
+                  <a:srgbClr val="5B6378"/>
+                </a:solidFill>
+                <a:latin typeface="Calibri"/>
+                <a:ea typeface="Calibri"/>
+                <a:cs typeface="Calibri"/>
+                <a:sym typeface="Calibri"/>
+              </a:rPr>
+              <a:t>NOT TO BE CONFUSED WITH</a:t>
+            </a:r>
+            <a:endParaRPr b="1"/>
+          </a:p>
+        </p:txBody>
+      </p:sp>
+    </p:spTree>
+  </p:cSld>
+  <p:clrMapOvr>
+    <a:masterClrMapping/>
+  </p:clrMapOvr>
+</p:sld>
+</file>
+
+<file path=ppt/slides/slide45.xml><?xml version="1.0" encoding="utf-8"?>
+<p:sld xmlns:a="http://schemas.openxmlformats.org/drawingml/2006/main" xmlns:r="http://schemas.openxmlformats.org/officeDocument/2006/relationships" xmlns:mc="http://schemas.openxmlformats.org/markup-compatibility/2006" xmlns:mv="urn:schemas-microsoft-com:mac:vml" xmlns:p="http://schemas.openxmlformats.org/presentationml/2006/main" xmlns:c="http://schemas.openxmlformats.org/drawingml/2006/chart" xmlns:dgm="http://schemas.openxmlformats.org/drawingml/2006/diagram" xmlns:o="urn:schemas-microsoft-com:office:office" xmlns:v="urn:schemas-microsoft-com:vml" xmlns:pvml="urn:schemas-microsoft-com:office:powerpoint" xmlns:com="http://schemas.openxmlformats.org/drawingml/2006/compatibility" xmlns:p14="http://schemas.microsoft.com/office/powerpoint/2010/main" xmlns:p15="http://schemas.microsoft.com/office/powerpoint/2012/main" xmlns:ahyp="http://schemas.microsoft.com/office/drawing/2018/hyperlinkcolor">
+  <p:cSld>
+    <p:spTree>
+      <p:nvGrpSpPr>
+        <p:cNvPr id="244" name="Shape 244"/>
+        <p:cNvGrpSpPr/>
+        <p:nvPr/>
+      </p:nvGrpSpPr>
+      <p:grpSpPr>
+        <a:xfrm>
+          <a:off x="0" y="0"/>
+          <a:ext cx="0" cy="0"/>
+          <a:chOff x="0" y="0"/>
+          <a:chExt cx="0" cy="0"/>
+        </a:xfrm>
+      </p:grpSpPr>
+      <p:sp>
+        <p:nvSpPr>
+          <p:cNvPr id="245" name="Google Shape;245;p28"/>
+          <p:cNvSpPr txBox="1"/>
+          <p:nvPr>
+            <p:ph type="title"/>
+          </p:nvPr>
+        </p:nvSpPr>
+        <p:spPr>
+          <a:xfrm>
+            <a:off x="548700" y="365125"/>
+            <a:ext cx="10805100" cy="1325700"/>
+          </a:xfrm>
+          <a:prstGeom prst="rect">
+            <a:avLst/>
+          </a:prstGeom>
+          <a:noFill/>
+          <a:ln>
+            <a:noFill/>
+          </a:ln>
+        </p:spPr>
+        <p:txBody>
+          <a:bodyPr anchorCtr="0" anchor="ctr" bIns="45700" lIns="91425" spcFirstLastPara="1" rIns="91425" wrap="square" tIns="45700">
+            <a:normAutofit/>
+          </a:bodyPr>
+          <a:lstStyle/>
+          <a:p>
+            <a:pPr indent="0" lvl="0" marL="0" rtl="0" algn="l">
+              <a:lnSpc>
+                <a:spcPct val="90000"/>
+              </a:lnSpc>
+              <a:spcBef>
+                <a:spcPts val="0"/>
+              </a:spcBef>
+              <a:spcAft>
+                <a:spcPts val="0"/>
+              </a:spcAft>
+              <a:buClr>
+                <a:srgbClr val="23325D"/>
+              </a:buClr>
+              <a:buSzPts val="3400"/>
+              <a:buFont typeface="Calibri"/>
+              <a:buNone/>
+            </a:pPr>
+            <a:r>
+              <a:rPr lang="en-US" sz="3400">
+                <a:solidFill>
+                  <a:srgbClr val="23325D"/>
+                </a:solidFill>
+              </a:rPr>
+              <a:t>How to contribute</a:t>
+            </a:r>
+            <a:endParaRPr/>
+          </a:p>
+        </p:txBody>
+      </p:sp>
+      <p:sp>
+        <p:nvSpPr>
+          <p:cNvPr id="246" name="Google Shape;246;p28"/>
+          <p:cNvSpPr/>
+          <p:nvPr/>
+        </p:nvSpPr>
+        <p:spPr>
+          <a:xfrm>
+            <a:off x="640080" y="1783080"/>
+            <a:ext cx="5317236" cy="1417320"/>
+          </a:xfrm>
+          <a:prstGeom prst="roundRect">
+            <a:avLst>
+              <a:gd fmla="val 6000" name="adj"/>
+            </a:avLst>
+          </a:prstGeom>
+          <a:solidFill>
+            <a:srgbClr val="FBE4DF"/>
+          </a:solidFill>
+          <a:ln>
+            <a:noFill/>
+          </a:ln>
+        </p:spPr>
+        <p:txBody>
+          <a:bodyPr anchorCtr="0" anchor="ctr" bIns="164575" lIns="228600" spcFirstLastPara="1" rIns="228600" wrap="square" tIns="164575">
+            <a:noAutofit/>
+          </a:bodyPr>
+          <a:lstStyle/>
+          <a:p>
+            <a:pPr indent="0" lvl="0" marL="0" marR="0" rtl="0" algn="l">
+              <a:spcBef>
+                <a:spcPts val="0"/>
+              </a:spcBef>
+              <a:spcAft>
+                <a:spcPts val="0"/>
+              </a:spcAft>
+              <a:buNone/>
+            </a:pPr>
+            <a:r>
+              <a:rPr b="1" i="0" lang="en-US" sz="1400">
+                <a:solidFill>
+                  <a:srgbClr val="F26351"/>
+                </a:solidFill>
+                <a:latin typeface="Courier New"/>
+                <a:ea typeface="Courier New"/>
+                <a:cs typeface="Courier New"/>
+                <a:sym typeface="Courier New"/>
+              </a:rPr>
+              <a:t>CORE INITIATIVE</a:t>
+            </a:r>
+            <a:endParaRPr/>
+          </a:p>
+          <a:p>
+            <a:pPr indent="0" lvl="0" marL="0" marR="0" rtl="0" algn="l">
+              <a:lnSpc>
+                <a:spcPct val="120000"/>
+              </a:lnSpc>
+              <a:spcBef>
+                <a:spcPts val="0"/>
+              </a:spcBef>
+              <a:spcAft>
+                <a:spcPts val="0"/>
+              </a:spcAft>
+              <a:buNone/>
+            </a:pPr>
+            <a:r>
+              <a:rPr b="0" i="0" lang="en-US" sz="1350">
+                <a:solidFill>
+                  <a:srgbClr val="5B6378"/>
+                </a:solidFill>
+                <a:latin typeface="Calibri"/>
+                <a:ea typeface="Calibri"/>
+                <a:cs typeface="Calibri"/>
+                <a:sym typeface="Calibri"/>
+              </a:rPr>
+              <a:t>Plan issue + POC issue in the core queue.</a:t>
+            </a:r>
+            <a:endParaRPr/>
+          </a:p>
+        </p:txBody>
+      </p:sp>
+      <p:sp>
+        <p:nvSpPr>
+          <p:cNvPr id="247" name="Google Shape;247;p28"/>
+          <p:cNvSpPr/>
+          <p:nvPr/>
+        </p:nvSpPr>
+        <p:spPr>
+          <a:xfrm>
+            <a:off x="6231636" y="1783080"/>
+            <a:ext cx="5317236" cy="1417320"/>
+          </a:xfrm>
+          <a:prstGeom prst="roundRect">
+            <a:avLst>
+              <a:gd fmla="val 6000" name="adj"/>
+            </a:avLst>
+          </a:prstGeom>
+          <a:solidFill>
+            <a:srgbClr val="FBE4DF"/>
+          </a:solidFill>
+          <a:ln>
+            <a:noFill/>
+          </a:ln>
+        </p:spPr>
+        <p:txBody>
+          <a:bodyPr anchorCtr="0" anchor="ctr" bIns="164575" lIns="228600" spcFirstLastPara="1" rIns="228600" wrap="square" tIns="164575">
+            <a:noAutofit/>
+          </a:bodyPr>
+          <a:lstStyle/>
+          <a:p>
+            <a:pPr indent="0" lvl="0" marL="0" marR="0" rtl="0" algn="l">
+              <a:spcBef>
+                <a:spcPts val="0"/>
+              </a:spcBef>
+              <a:spcAft>
+                <a:spcPts val="0"/>
+              </a:spcAft>
+              <a:buNone/>
+            </a:pPr>
+            <a:r>
+              <a:rPr b="1" i="0" lang="en-US" sz="1400">
+                <a:solidFill>
+                  <a:srgbClr val="F26351"/>
+                </a:solidFill>
+                <a:latin typeface="Courier New"/>
+                <a:ea typeface="Courier New"/>
+                <a:cs typeface="Courier New"/>
+                <a:sym typeface="Courier New"/>
+              </a:rPr>
+              <a:t>CONTRIB MODULE</a:t>
+            </a:r>
+            <a:endParaRPr/>
+          </a:p>
+          <a:p>
+            <a:pPr indent="0" lvl="0" marL="0" marR="0" rtl="0" algn="l">
+              <a:lnSpc>
+                <a:spcPct val="120000"/>
+              </a:lnSpc>
+              <a:spcBef>
+                <a:spcPts val="0"/>
+              </a:spcBef>
+              <a:spcAft>
+                <a:spcPts val="0"/>
+              </a:spcAft>
+              <a:buNone/>
+            </a:pPr>
+            <a:r>
+              <a:rPr b="0" i="0" lang="en-US" sz="1350">
+                <a:solidFill>
+                  <a:srgbClr val="5B6378"/>
+                </a:solidFill>
+                <a:latin typeface="Calibri"/>
+                <a:ea typeface="Calibri"/>
+                <a:cs typeface="Calibri"/>
+                <a:sym typeface="Calibri"/>
+              </a:rPr>
+              <a:t>drupal.org/project/htmx issue queue.</a:t>
+            </a:r>
+            <a:endParaRPr/>
+          </a:p>
+        </p:txBody>
+      </p:sp>
+      <p:sp>
+        <p:nvSpPr>
+          <p:cNvPr id="248" name="Google Shape;248;p28"/>
+          <p:cNvSpPr/>
+          <p:nvPr/>
+        </p:nvSpPr>
+        <p:spPr>
+          <a:xfrm>
+            <a:off x="640080" y="3474720"/>
+            <a:ext cx="5317236" cy="1417320"/>
+          </a:xfrm>
+          <a:prstGeom prst="roundRect">
+            <a:avLst>
+              <a:gd fmla="val 6000" name="adj"/>
+            </a:avLst>
+          </a:prstGeom>
+          <a:solidFill>
+            <a:srgbClr val="FBE4DF"/>
+          </a:solidFill>
+          <a:ln>
+            <a:noFill/>
+          </a:ln>
+        </p:spPr>
+        <p:txBody>
+          <a:bodyPr anchorCtr="0" anchor="ctr" bIns="164575" lIns="228600" spcFirstLastPara="1" rIns="228600" wrap="square" tIns="164575">
+            <a:noAutofit/>
+          </a:bodyPr>
+          <a:lstStyle/>
+          <a:p>
+            <a:pPr indent="0" lvl="0" marL="0" marR="0" rtl="0" algn="l">
+              <a:spcBef>
+                <a:spcPts val="0"/>
+              </a:spcBef>
+              <a:spcAft>
+                <a:spcPts val="0"/>
+              </a:spcAft>
+              <a:buNone/>
+            </a:pPr>
+            <a:r>
+              <a:rPr b="1" i="0" lang="en-US" sz="1400">
+                <a:solidFill>
+                  <a:srgbClr val="F26351"/>
+                </a:solidFill>
+                <a:latin typeface="Courier New"/>
+                <a:ea typeface="Courier New"/>
+                <a:cs typeface="Courier New"/>
+                <a:sym typeface="Courier New"/>
+              </a:rPr>
+              <a:t>COMMUNITY</a:t>
+            </a:r>
+            <a:endParaRPr/>
+          </a:p>
+          <a:p>
+            <a:pPr indent="0" lvl="0" marL="0" marR="0" rtl="0" algn="l">
+              <a:lnSpc>
+                <a:spcPct val="120000"/>
+              </a:lnSpc>
+              <a:spcBef>
+                <a:spcPts val="0"/>
+              </a:spcBef>
+              <a:spcAft>
+                <a:spcPts val="0"/>
+              </a:spcAft>
+              <a:buNone/>
+            </a:pPr>
+            <a:r>
+              <a:rPr b="0" i="0" lang="en-US" sz="1350">
+                <a:solidFill>
+                  <a:srgbClr val="5B6378"/>
+                </a:solidFill>
+                <a:latin typeface="Calibri"/>
+                <a:ea typeface="Calibri"/>
+                <a:cs typeface="Calibri"/>
+                <a:sym typeface="Calibri"/>
+              </a:rPr>
+              <a:t>#htmx on Drupal Slack.</a:t>
+            </a:r>
+            <a:endParaRPr/>
+          </a:p>
+        </p:txBody>
+      </p:sp>
+      <p:sp>
+        <p:nvSpPr>
+          <p:cNvPr id="249" name="Google Shape;249;p28"/>
+          <p:cNvSpPr/>
+          <p:nvPr/>
+        </p:nvSpPr>
+        <p:spPr>
+          <a:xfrm>
+            <a:off x="6231636" y="3474720"/>
+            <a:ext cx="5317236" cy="1417320"/>
+          </a:xfrm>
+          <a:prstGeom prst="roundRect">
+            <a:avLst>
+              <a:gd fmla="val 6000" name="adj"/>
+            </a:avLst>
+          </a:prstGeom>
+          <a:solidFill>
+            <a:srgbClr val="FBE4DF"/>
+          </a:solidFill>
+          <a:ln>
+            <a:noFill/>
+          </a:ln>
+        </p:spPr>
+        <p:txBody>
+          <a:bodyPr anchorCtr="0" anchor="ctr" bIns="164575" lIns="228600" spcFirstLastPara="1" rIns="228600" wrap="square" tIns="164575">
+            <a:noAutofit/>
+          </a:bodyPr>
+          <a:lstStyle/>
+          <a:p>
+            <a:pPr indent="0" lvl="0" marL="0" marR="0" rtl="0" algn="l">
+              <a:spcBef>
+                <a:spcPts val="0"/>
+              </a:spcBef>
+              <a:spcAft>
+                <a:spcPts val="0"/>
+              </a:spcAft>
+              <a:buNone/>
+            </a:pPr>
+            <a:r>
+              <a:rPr b="1" i="0" lang="en-US" sz="1400">
+                <a:solidFill>
+                  <a:srgbClr val="F26351"/>
+                </a:solidFill>
+                <a:latin typeface="Courier New"/>
+                <a:ea typeface="Courier New"/>
+                <a:cs typeface="Courier New"/>
+                <a:sym typeface="Courier New"/>
+              </a:rPr>
+              <a:t>ENTRY POINTS</a:t>
+            </a:r>
+            <a:endParaRPr/>
+          </a:p>
+          <a:p>
+            <a:pPr indent="0" lvl="0" marL="0" marR="0" rtl="0" algn="l">
+              <a:lnSpc>
+                <a:spcPct val="120000"/>
+              </a:lnSpc>
+              <a:spcBef>
+                <a:spcPts val="0"/>
+              </a:spcBef>
+              <a:spcAft>
+                <a:spcPts val="0"/>
+              </a:spcAft>
+              <a:buNone/>
+            </a:pPr>
+            <a:r>
+              <a:rPr b="0" i="0" lang="en-US" sz="1350">
+                <a:solidFill>
+                  <a:srgbClr val="5B6378"/>
+                </a:solidFill>
+                <a:latin typeface="Calibri"/>
+                <a:ea typeface="Calibri"/>
+                <a:cs typeface="Calibri"/>
+                <a:sym typeface="Calibri"/>
+              </a:rPr>
+              <a:t>Triage issues, convert one #ajax callback, write docs, build a case study.</a:t>
+            </a:r>
+            <a:endParaRPr/>
+          </a:p>
+        </p:txBody>
+      </p:sp>
+    </p:spTree>
+  </p:cSld>
+  <p:clrMapOvr>
+    <a:masterClrMapping/>
+  </p:clrMapOvr>
+</p:sld>
+</file>
+
+<file path=ppt/slides/slide46.xml><?xml version="1.0" encoding="utf-8"?>
+<p:sld xmlns:a="http://schemas.openxmlformats.org/drawingml/2006/main" xmlns:r="http://schemas.openxmlformats.org/officeDocument/2006/relationships" xmlns:mc="http://schemas.openxmlformats.org/markup-compatibility/2006" xmlns:mv="urn:schemas-microsoft-com:mac:vml" xmlns:p="http://schemas.openxmlformats.org/presentationml/2006/main" xmlns:c="http://schemas.openxmlformats.org/drawingml/2006/chart" xmlns:dgm="http://schemas.openxmlformats.org/drawingml/2006/diagram" xmlns:o="urn:schemas-microsoft-com:office:office" xmlns:v="urn:schemas-microsoft-com:vml" xmlns:pvml="urn:schemas-microsoft-com:office:powerpoint" xmlns:com="http://schemas.openxmlformats.org/drawingml/2006/compatibility" xmlns:p14="http://schemas.microsoft.com/office/powerpoint/2010/main" xmlns:p15="http://schemas.microsoft.com/office/powerpoint/2012/main" xmlns:ahyp="http://schemas.microsoft.com/office/drawing/2018/hyperlinkcolor">
+  <p:cSld>
+    <p:spTree>
+      <p:nvGrpSpPr>
+        <p:cNvPr id="194" name="Shape 194"/>
+        <p:cNvGrpSpPr/>
+        <p:nvPr/>
+      </p:nvGrpSpPr>
+      <p:grpSpPr>
+        <a:xfrm>
+          <a:off x="0" y="0"/>
+          <a:ext cx="0" cy="0"/>
+          <a:chOff x="0" y="0"/>
+          <a:chExt cx="0" cy="0"/>
+        </a:xfrm>
+      </p:grpSpPr>
+      <p:sp>
+        <p:nvSpPr>
+          <p:cNvPr id="195" name="Google Shape;195;p22"/>
+          <p:cNvSpPr txBox="1"/>
+          <p:nvPr>
+            <p:ph type="title"/>
+          </p:nvPr>
+        </p:nvSpPr>
+        <p:spPr>
+          <a:xfrm>
+            <a:off x="553725" y="2904920"/>
+            <a:ext cx="10760700" cy="577200"/>
+          </a:xfrm>
+          <a:prstGeom prst="rect">
+            <a:avLst/>
+          </a:prstGeom>
+          <a:noFill/>
+          <a:ln>
+            <a:noFill/>
+          </a:ln>
+        </p:spPr>
+        <p:txBody>
+          <a:bodyPr anchorCtr="0" anchor="t" bIns="45700" lIns="91425" spcFirstLastPara="1" rIns="91425" wrap="square" tIns="45700">
+            <a:normAutofit/>
+          </a:bodyPr>
+          <a:lstStyle/>
+          <a:p>
+            <a:pPr indent="0" lvl="0" marL="0" rtl="0" algn="ctr">
+              <a:lnSpc>
+                <a:spcPct val="90000"/>
+              </a:lnSpc>
+              <a:spcBef>
+                <a:spcPts val="0"/>
+              </a:spcBef>
+              <a:spcAft>
+                <a:spcPts val="0"/>
+              </a:spcAft>
+              <a:buClr>
+                <a:srgbClr val="FFFFFF"/>
+              </a:buClr>
+              <a:buSzPts val="3200"/>
+              <a:buFont typeface="Calibri"/>
+              <a:buNone/>
+            </a:pPr>
+            <a:r>
+              <a:rPr b="1" i="0" lang="en-US" sz="3200">
+                <a:solidFill>
+                  <a:srgbClr val="FFFFFF"/>
+                </a:solidFill>
+                <a:latin typeface="Calibri"/>
+                <a:ea typeface="Calibri"/>
+                <a:cs typeface="Calibri"/>
+                <a:sym typeface="Calibri"/>
+              </a:rPr>
+              <a:t>It's not waiting on permission.</a:t>
+            </a:r>
+            <a:endParaRPr/>
+          </a:p>
+        </p:txBody>
+      </p:sp>
+      <p:sp>
+        <p:nvSpPr>
+          <p:cNvPr id="196" name="Google Shape;196;p22"/>
+          <p:cNvSpPr txBox="1"/>
+          <p:nvPr>
+            <p:ph idx="1" type="body"/>
+          </p:nvPr>
+        </p:nvSpPr>
+        <p:spPr>
+          <a:xfrm>
+            <a:off x="593100" y="3482125"/>
+            <a:ext cx="10760700" cy="822960"/>
+          </a:xfrm>
+          <a:prstGeom prst="rect">
+            <a:avLst/>
+          </a:prstGeom>
+          <a:noFill/>
+          <a:ln>
+            <a:noFill/>
+          </a:ln>
+        </p:spPr>
+        <p:txBody>
+          <a:bodyPr anchorCtr="0" anchor="t" bIns="45700" lIns="91425" spcFirstLastPara="1" rIns="91425" wrap="square" tIns="45700">
+            <a:normAutofit/>
+          </a:bodyPr>
+          <a:lstStyle/>
+          <a:p>
+            <a:pPr indent="0" lvl="0" marL="0" rtl="0" algn="ctr">
+              <a:lnSpc>
+                <a:spcPct val="125000"/>
+              </a:lnSpc>
+              <a:spcBef>
+                <a:spcPts val="0"/>
+              </a:spcBef>
+              <a:spcAft>
+                <a:spcPts val="0"/>
+              </a:spcAft>
+              <a:buClr>
+                <a:srgbClr val="FFC427"/>
+              </a:buClr>
+              <a:buSzPts val="1800"/>
+              <a:buNone/>
+            </a:pPr>
+            <a:r>
+              <a:rPr b="0" i="0" lang="en-US" sz="1800">
+                <a:solidFill>
+                  <a:srgbClr val="FFC427"/>
+                </a:solidFill>
+                <a:latin typeface="Calibri"/>
+                <a:ea typeface="Calibri"/>
+                <a:cs typeface="Calibri"/>
+                <a:sym typeface="Calibri"/>
+              </a:rPr>
+              <a:t>Already in core, actively being worked, and it needs hands. On 11.3? Convert one #ajax callback and see how it feels.</a:t>
+            </a:r>
+            <a:endParaRPr/>
+          </a:p>
+        </p:txBody>
+      </p:sp>
+      <p:sp>
+        <p:nvSpPr>
+          <p:cNvPr id="197" name="Google Shape;197;p22"/>
+          <p:cNvSpPr txBox="1"/>
+          <p:nvPr/>
+        </p:nvSpPr>
+        <p:spPr>
+          <a:xfrm>
+            <a:off x="6468100" y="6355080"/>
+            <a:ext cx="4846200" cy="200100"/>
+          </a:xfrm>
+          <a:prstGeom prst="rect">
+            <a:avLst/>
+          </a:prstGeom>
+          <a:noFill/>
+          <a:ln>
+            <a:noFill/>
+          </a:ln>
+        </p:spPr>
+        <p:txBody>
+          <a:bodyPr anchorCtr="0" anchor="t" bIns="0" lIns="0" spcFirstLastPara="1" rIns="0" wrap="square" tIns="0">
+            <a:spAutoFit/>
+          </a:bodyPr>
+          <a:lstStyle/>
+          <a:p>
+            <a:pPr indent="0" lvl="0" marL="0" marR="0" rtl="0" algn="r">
+              <a:spcBef>
+                <a:spcPts val="0"/>
+              </a:spcBef>
+              <a:spcAft>
+                <a:spcPts val="0"/>
+              </a:spcAft>
+              <a:buNone/>
+            </a:pPr>
+            <a:r>
+              <a:rPr b="1" i="0" lang="en-US" sz="1300">
+                <a:solidFill>
+                  <a:srgbClr val="FFC427"/>
+                </a:solidFill>
+                <a:latin typeface="Calibri"/>
+                <a:ea typeface="Calibri"/>
+                <a:cs typeface="Calibri"/>
+                <a:sym typeface="Calibri"/>
+              </a:rPr>
+              <a:t>→ next: wrap-up + Q&amp;A</a:t>
+            </a:r>
+            <a:endParaRPr/>
+          </a:p>
+        </p:txBody>
+      </p:sp>
+      <p:sp>
+        <p:nvSpPr>
+          <p:cNvPr id="198" name="Google Shape;198;p22"/>
+          <p:cNvSpPr txBox="1"/>
+          <p:nvPr/>
+        </p:nvSpPr>
+        <p:spPr>
+          <a:xfrm>
+            <a:off x="640075" y="320047"/>
+            <a:ext cx="7315200" cy="184800"/>
+          </a:xfrm>
+          <a:prstGeom prst="rect">
+            <a:avLst/>
+          </a:prstGeom>
+          <a:noFill/>
+          <a:ln>
+            <a:noFill/>
+          </a:ln>
+        </p:spPr>
+        <p:txBody>
+          <a:bodyPr anchorCtr="0" anchor="t" bIns="0" lIns="0" spcFirstLastPara="1" rIns="0" wrap="square" tIns="0">
+            <a:spAutoFit/>
+          </a:bodyPr>
+          <a:lstStyle/>
+          <a:p>
+            <a:pPr indent="0" lvl="0" marL="0" marR="0" rtl="0" algn="l">
+              <a:spcBef>
+                <a:spcPts val="0"/>
+              </a:spcBef>
+              <a:spcAft>
+                <a:spcPts val="0"/>
+              </a:spcAft>
+              <a:buNone/>
+            </a:pPr>
+            <a:r>
+              <a:rPr b="1" lang="en-US" sz="1200">
+                <a:solidFill>
+                  <a:srgbClr val="FFC427"/>
+                </a:solidFill>
+                <a:latin typeface="Calibri"/>
+                <a:ea typeface="Calibri"/>
+                <a:cs typeface="Calibri"/>
+                <a:sym typeface="Calibri"/>
+              </a:rPr>
+              <a:t>— </a:t>
+            </a:r>
+            <a:r>
+              <a:rPr b="1" lang="en-US" sz="1200">
+                <a:solidFill>
+                  <a:srgbClr val="FFC427"/>
+                </a:solidFill>
+                <a:latin typeface="Calibri"/>
+                <a:ea typeface="Calibri"/>
+                <a:cs typeface="Calibri"/>
+                <a:sym typeface="Calibri"/>
+              </a:rPr>
+              <a:t>THE CLOSE</a:t>
+            </a:r>
+            <a:endParaRPr>
+              <a:solidFill>
+                <a:srgbClr val="FFC427"/>
+              </a:solidFill>
+            </a:endParaRPr>
+          </a:p>
+        </p:txBody>
+      </p:sp>
+    </p:spTree>
+  </p:cSld>
+  <p:clrMapOvr>
+    <a:masterClrMapping/>
+  </p:clrMapOvr>
+</p:sld>
+</file>
+
+<file path=ppt/slides/slide47.xml><?xml version="1.0" encoding="utf-8"?>
+<p:sld xmlns:a="http://schemas.openxmlformats.org/drawingml/2006/main" xmlns:r="http://schemas.openxmlformats.org/officeDocument/2006/relationships" xmlns:mc="http://schemas.openxmlformats.org/markup-compatibility/2006" xmlns:mv="urn:schemas-microsoft-com:mac:vml" xmlns:p="http://schemas.openxmlformats.org/presentationml/2006/main" xmlns:c="http://schemas.openxmlformats.org/drawingml/2006/chart" xmlns:dgm="http://schemas.openxmlformats.org/drawingml/2006/diagram" xmlns:o="urn:schemas-microsoft-com:office:office" xmlns:v="urn:schemas-microsoft-com:vml" xmlns:pvml="urn:schemas-microsoft-com:office:powerpoint" xmlns:com="http://schemas.openxmlformats.org/drawingml/2006/compatibility" xmlns:p14="http://schemas.microsoft.com/office/powerpoint/2010/main" xmlns:p15="http://schemas.microsoft.com/office/powerpoint/2012/main" xmlns:ahyp="http://schemas.microsoft.com/office/drawing/2018/hyperlinkcolor">
+  <p:cSld>
+    <p:spTree>
+      <p:nvGrpSpPr>
+        <p:cNvPr id="50" name="Shape 50"/>
+        <p:cNvGrpSpPr/>
+        <p:nvPr/>
+      </p:nvGrpSpPr>
+      <p:grpSpPr>
+        <a:xfrm>
+          <a:off x="0" y="0"/>
+          <a:ext cx="0" cy="0"/>
+          <a:chOff x="0" y="0"/>
+          <a:chExt cx="0" cy="0"/>
+        </a:xfrm>
+      </p:grpSpPr>
+      <p:sp>
+        <p:nvSpPr>
+          <p:cNvPr id="51" name="Google Shape;51;p8"/>
+          <p:cNvSpPr txBox="1"/>
+          <p:nvPr/>
+        </p:nvSpPr>
+        <p:spPr>
+          <a:xfrm>
+            <a:off x="640080" y="4846320"/>
+            <a:ext cx="5486400" cy="369300"/>
+          </a:xfrm>
+          <a:prstGeom prst="rect">
+            <a:avLst/>
+          </a:prstGeom>
+          <a:noFill/>
+          <a:ln>
+            <a:noFill/>
+          </a:ln>
+        </p:spPr>
+        <p:txBody>
+          <a:bodyPr anchorCtr="0" anchor="t" bIns="0" lIns="0" spcFirstLastPara="1" rIns="0" wrap="square" tIns="0">
+            <a:spAutoFit/>
+          </a:bodyPr>
+          <a:lstStyle/>
+          <a:p>
+            <a:pPr indent="0" lvl="0" marL="0" marR="0" rtl="0" algn="l">
+              <a:spcBef>
+                <a:spcPts val="0"/>
+              </a:spcBef>
+              <a:spcAft>
+                <a:spcPts val="0"/>
+              </a:spcAft>
+              <a:buNone/>
+            </a:pPr>
+            <a:r>
+              <a:rPr b="0" i="0" lang="en-US" sz="1200" u="none" cap="none" strike="noStrike">
+                <a:solidFill>
+                  <a:srgbClr val="5B6378"/>
+                </a:solidFill>
+                <a:latin typeface="Calibri"/>
+                <a:ea typeface="Calibri"/>
+                <a:cs typeface="Calibri"/>
+                <a:sym typeface="Calibri"/>
+              </a:rPr>
+              <a:t>Ruturaj Chaubey – </a:t>
+            </a:r>
+            <a:r>
+              <a:rPr i="1" lang="en-US" sz="1200">
+                <a:solidFill>
+                  <a:srgbClr val="9AA3B5"/>
+                </a:solidFill>
+                <a:latin typeface="Calibri"/>
+                <a:ea typeface="Calibri"/>
+                <a:cs typeface="Calibri"/>
+                <a:sym typeface="Calibri"/>
+              </a:rPr>
+              <a:t>Full Stack Engineer</a:t>
+            </a:r>
+            <a:r>
+              <a:rPr b="0" i="1" lang="en-US" sz="1200" u="none" cap="none" strike="noStrike">
+                <a:solidFill>
+                  <a:srgbClr val="9AA3B5"/>
+                </a:solidFill>
+                <a:latin typeface="Calibri"/>
+                <a:ea typeface="Calibri"/>
+                <a:cs typeface="Calibri"/>
+                <a:sym typeface="Calibri"/>
+              </a:rPr>
+              <a:t> </a:t>
+            </a:r>
+            <a:r>
+              <a:rPr i="1" lang="en-US" sz="1200">
+                <a:solidFill>
+                  <a:srgbClr val="9AA3B5"/>
+                </a:solidFill>
+                <a:latin typeface="Calibri"/>
+                <a:ea typeface="Calibri"/>
+                <a:cs typeface="Calibri"/>
+                <a:sym typeface="Calibri"/>
+              </a:rPr>
+              <a:t>@ QED42</a:t>
+            </a:r>
+            <a:endParaRPr i="1" sz="1200">
+              <a:solidFill>
+                <a:srgbClr val="9AA3B5"/>
+              </a:solidFill>
+              <a:latin typeface="Calibri"/>
+              <a:ea typeface="Calibri"/>
+              <a:cs typeface="Calibri"/>
+              <a:sym typeface="Calibri"/>
+            </a:endParaRPr>
+          </a:p>
+          <a:p>
+            <a:pPr indent="0" lvl="0" marL="0" rtl="0" algn="l">
+              <a:spcBef>
+                <a:spcPts val="0"/>
+              </a:spcBef>
+              <a:spcAft>
+                <a:spcPts val="0"/>
+              </a:spcAft>
+              <a:buNone/>
+            </a:pPr>
+            <a:r>
+              <a:rPr lang="en-US" sz="1200">
+                <a:solidFill>
+                  <a:srgbClr val="5B6378"/>
+                </a:solidFill>
+                <a:latin typeface="Calibri"/>
+                <a:ea typeface="Calibri"/>
+                <a:cs typeface="Calibri"/>
+                <a:sym typeface="Calibri"/>
+              </a:rPr>
+              <a:t>Vighnesh</a:t>
+            </a:r>
+            <a:r>
+              <a:rPr lang="en-US" sz="1200">
+                <a:solidFill>
+                  <a:srgbClr val="5B6378"/>
+                </a:solidFill>
+                <a:latin typeface="Calibri"/>
+                <a:ea typeface="Calibri"/>
+                <a:cs typeface="Calibri"/>
+                <a:sym typeface="Calibri"/>
+              </a:rPr>
+              <a:t> Sadagopal – </a:t>
+            </a:r>
+            <a:r>
+              <a:rPr i="1" lang="en-US" sz="1200">
+                <a:solidFill>
+                  <a:srgbClr val="9AA3B5"/>
+                </a:solidFill>
+                <a:latin typeface="Calibri"/>
+                <a:ea typeface="Calibri"/>
+                <a:cs typeface="Calibri"/>
+                <a:sym typeface="Calibri"/>
+              </a:rPr>
+              <a:t>Full Stack Drupal Engineer @ QED42</a:t>
+            </a:r>
+            <a:endParaRPr i="1" sz="1200">
+              <a:solidFill>
+                <a:srgbClr val="9AA3B5"/>
+              </a:solidFill>
+              <a:latin typeface="Calibri"/>
+              <a:ea typeface="Calibri"/>
+              <a:cs typeface="Calibri"/>
+              <a:sym typeface="Calibri"/>
+            </a:endParaRPr>
+          </a:p>
+        </p:txBody>
+      </p:sp>
+      <p:sp>
+        <p:nvSpPr>
+          <p:cNvPr id="52" name="Google Shape;52;p8"/>
+          <p:cNvSpPr txBox="1"/>
+          <p:nvPr>
+            <p:ph type="ctrTitle"/>
+          </p:nvPr>
+        </p:nvSpPr>
+        <p:spPr>
+          <a:xfrm>
+            <a:off x="640075" y="1009650"/>
+            <a:ext cx="8677800" cy="1339800"/>
+          </a:xfrm>
+          <a:prstGeom prst="rect">
+            <a:avLst/>
+          </a:prstGeom>
+          <a:noFill/>
+          <a:ln>
+            <a:noFill/>
+          </a:ln>
+        </p:spPr>
+        <p:txBody>
+          <a:bodyPr anchorCtr="0" anchor="b" bIns="45700" lIns="91425" spcFirstLastPara="1" rIns="91425" wrap="square" tIns="45700">
+            <a:normAutofit fontScale="90000"/>
+          </a:bodyPr>
+          <a:lstStyle/>
+          <a:p>
+            <a:pPr indent="0" lvl="0" marL="0" rtl="0" algn="l">
+              <a:lnSpc>
+                <a:spcPct val="90000"/>
+              </a:lnSpc>
+              <a:spcBef>
+                <a:spcPts val="0"/>
+              </a:spcBef>
+              <a:spcAft>
+                <a:spcPts val="0"/>
+              </a:spcAft>
+              <a:buClr>
+                <a:srgbClr val="23325D"/>
+              </a:buClr>
+              <a:buSzPct val="100000"/>
+              <a:buFont typeface="Calibri"/>
+              <a:buNone/>
+            </a:pPr>
+            <a:r>
+              <a:rPr lang="en-US" sz="5400">
+                <a:solidFill>
+                  <a:srgbClr val="23325D"/>
+                </a:solidFill>
+              </a:rPr>
+              <a:t>Thank you!</a:t>
+            </a:r>
+            <a:endParaRPr/>
+          </a:p>
+          <a:p>
+            <a:pPr indent="0" lvl="0" marL="0" rtl="0" algn="l">
+              <a:lnSpc>
+                <a:spcPct val="90000"/>
+              </a:lnSpc>
+              <a:spcBef>
+                <a:spcPts val="0"/>
+              </a:spcBef>
+              <a:spcAft>
+                <a:spcPts val="0"/>
+              </a:spcAft>
+              <a:buClr>
+                <a:srgbClr val="23325D"/>
+              </a:buClr>
+              <a:buSzPct val="100000"/>
+              <a:buFont typeface="Calibri"/>
+              <a:buNone/>
+            </a:pPr>
+            <a:r>
+              <a:rPr lang="en-US" sz="5400">
+                <a:solidFill>
+                  <a:srgbClr val="F26351"/>
+                </a:solidFill>
+              </a:rPr>
+              <a:t>Questions?</a:t>
+            </a:r>
+            <a:endParaRPr/>
+          </a:p>
+        </p:txBody>
+      </p:sp>
+    </p:spTree>
+  </p:cSld>
+  <p:clrMapOvr>
+    <a:masterClrMapping/>
+  </p:clrMapOvr>
+</p:sld>
+</file>
+
 <file path=ppt/slides/slide5.xml><?xml version="1.0" encoding="utf-8"?>
 <p:sld xmlns:a="http://schemas.openxmlformats.org/drawingml/2006/main" xmlns:r="http://schemas.openxmlformats.org/officeDocument/2006/relationships" xmlns:mc="http://schemas.openxmlformats.org/markup-compatibility/2006" xmlns:mv="urn:schemas-microsoft-com:mac:vml" xmlns:p="http://schemas.openxmlformats.org/presentationml/2006/main" xmlns:c="http://schemas.openxmlformats.org/drawingml/2006/chart" xmlns:dgm="http://schemas.openxmlformats.org/drawingml/2006/diagram" xmlns:o="urn:schemas-microsoft-com:office:office" xmlns:v="urn:schemas-microsoft-com:vml" xmlns:pvml="urn:schemas-microsoft-com:office:powerpoint" xmlns:com="http://schemas.openxmlformats.org/drawingml/2006/compatibility" xmlns:p14="http://schemas.microsoft.com/office/powerpoint/2010/main" xmlns:p15="http://schemas.microsoft.com/office/powerpoint/2012/main" xmlns:ahyp="http://schemas.microsoft.com/office/drawing/2018/hyperlinkcolor">
   <p:cSld>
@@ -21811,7 +26357,7 @@
         </p:nvSpPr>
         <p:spPr>
           <a:xfrm>
-            <a:off x="640075" y="1417325"/>
+            <a:off x="603504" y="1325880"/>
             <a:ext cx="592200" cy="504600"/>
           </a:xfrm>
           <a:prstGeom prst="ellipse">
@@ -21863,7 +26409,7 @@
         </p:nvSpPr>
         <p:spPr>
           <a:xfrm>
-            <a:off x="1325880" y="1538818"/>
+            <a:off x="1325880" y="1444752"/>
             <a:ext cx="9875400" cy="261600"/>
           </a:xfrm>
           <a:prstGeom prst="rect">
@@ -21913,7 +26459,7 @@
         </p:nvCxnSpPr>
         <p:spPr>
           <a:xfrm>
-            <a:off x="640080" y="2057398"/>
+            <a:off x="640080" y="1892807"/>
             <a:ext cx="10515600" cy="0"/>
           </a:xfrm>
           <a:prstGeom prst="straightConnector1">
@@ -21939,7 +26485,7 @@
         </p:nvSpPr>
         <p:spPr>
           <a:xfrm>
-            <a:off x="1325880" y="2283212"/>
+            <a:off x="1325880" y="2084831"/>
             <a:ext cx="9875400" cy="261600"/>
           </a:xfrm>
           <a:prstGeom prst="rect">
@@ -21989,7 +26535,7 @@
         </p:nvCxnSpPr>
         <p:spPr>
           <a:xfrm>
-            <a:off x="640080" y="2770630"/>
+            <a:off x="640080" y="2532888"/>
             <a:ext cx="10515600" cy="0"/>
           </a:xfrm>
           <a:prstGeom prst="straightConnector1">
@@ -22015,7 +26561,7 @@
         </p:nvSpPr>
         <p:spPr>
           <a:xfrm>
-            <a:off x="1325880" y="2996444"/>
+            <a:off x="1325880" y="2724911"/>
             <a:ext cx="9875400" cy="261600"/>
           </a:xfrm>
           <a:prstGeom prst="rect">
@@ -22065,7 +26611,7 @@
         </p:nvCxnSpPr>
         <p:spPr>
           <a:xfrm>
-            <a:off x="640080" y="3483862"/>
+            <a:off x="640080" y="3172968"/>
             <a:ext cx="10515600" cy="0"/>
           </a:xfrm>
           <a:prstGeom prst="straightConnector1">
@@ -22091,7 +26637,7 @@
         </p:nvSpPr>
         <p:spPr>
           <a:xfrm>
-            <a:off x="1325880" y="3709664"/>
+            <a:off x="1325880" y="3364991"/>
             <a:ext cx="9875400" cy="261600"/>
           </a:xfrm>
           <a:prstGeom prst="rect">
@@ -22141,7 +26687,7 @@
         </p:nvCxnSpPr>
         <p:spPr>
           <a:xfrm>
-            <a:off x="640080" y="4197094"/>
+            <a:off x="640080" y="3813048"/>
             <a:ext cx="10515600" cy="0"/>
           </a:xfrm>
           <a:prstGeom prst="straightConnector1">
@@ -22167,7 +26713,7 @@
         </p:nvSpPr>
         <p:spPr>
           <a:xfrm>
-            <a:off x="1325880" y="4422908"/>
+            <a:off x="1325880" y="4005072"/>
             <a:ext cx="9875400" cy="261600"/>
           </a:xfrm>
           <a:prstGeom prst="rect">
@@ -22217,7 +26763,7 @@
         </p:nvCxnSpPr>
         <p:spPr>
           <a:xfrm>
-            <a:off x="640080" y="4910326"/>
+            <a:off x="640080" y="4453128"/>
             <a:ext cx="10515600" cy="0"/>
           </a:xfrm>
           <a:prstGeom prst="straightConnector1">
@@ -22243,7 +26789,7 @@
         </p:nvSpPr>
         <p:spPr>
           <a:xfrm>
-            <a:off x="1325880" y="5136153"/>
+            <a:off x="1325880" y="4645152"/>
             <a:ext cx="9875400" cy="261600"/>
           </a:xfrm>
           <a:prstGeom prst="rect">
@@ -22293,7 +26839,7 @@
         </p:nvSpPr>
         <p:spPr>
           <a:xfrm>
-            <a:off x="604075" y="2161713"/>
+            <a:off x="603504" y="1965960"/>
             <a:ext cx="592200" cy="504600"/>
           </a:xfrm>
           <a:prstGeom prst="ellipse">
@@ -22357,7 +26903,7 @@
         </p:nvSpPr>
         <p:spPr>
           <a:xfrm>
-            <a:off x="604075" y="2874925"/>
+            <a:off x="603504" y="2606039"/>
             <a:ext cx="592200" cy="504600"/>
           </a:xfrm>
           <a:prstGeom prst="ellipse">
@@ -22421,7 +26967,7 @@
         </p:nvSpPr>
         <p:spPr>
           <a:xfrm>
-            <a:off x="572575" y="3588163"/>
+            <a:off x="603504" y="3246120"/>
             <a:ext cx="592200" cy="504600"/>
           </a:xfrm>
           <a:prstGeom prst="ellipse">
@@ -22485,7 +27031,7 @@
         </p:nvSpPr>
         <p:spPr>
           <a:xfrm>
-            <a:off x="604075" y="4301400"/>
+            <a:off x="603504" y="3886200"/>
             <a:ext cx="592200" cy="504600"/>
           </a:xfrm>
           <a:prstGeom prst="ellipse">
@@ -22549,7 +27095,7 @@
         </p:nvSpPr>
         <p:spPr>
           <a:xfrm>
-            <a:off x="604075" y="4983475"/>
+            <a:off x="603504" y="4526280"/>
             <a:ext cx="592200" cy="504600"/>
           </a:xfrm>
           <a:prstGeom prst="ellipse">
@@ -22605,6 +27151,146 @@
           </a:p>
         </p:txBody>
       </p:sp>
+      <p:sp>
+        <p:nvSpPr>
+          <p:cNvPr id="3001" name="Shape 3001"/>
+          <p:cNvSpPr/>
+          <p:nvPr/>
+        </p:nvSpPr>
+        <p:spPr>
+          <a:xfrm>
+            <a:off x="603504" y="5166359"/>
+            <a:ext cx="592200" cy="504600"/>
+          </a:xfrm>
+          <a:prstGeom prst="ellipse">
+            <a:avLst/>
+          </a:prstGeom>
+          <a:solidFill>
+            <a:srgbClr val="202C5E"/>
+          </a:solidFill>
+          <a:ln>
+            <a:noFill/>
+          </a:ln>
+        </p:spPr>
+        <p:txBody>
+          <a:bodyPr anchorCtr="0" anchor="ctr" bIns="45700" lIns="91425" spcFirstLastPara="1" rIns="91425" wrap="square" tIns="45700">
+            <a:noAutofit/>
+          </a:bodyPr>
+          <a:lstStyle/>
+          <a:p>
+            <a:pPr indent="0" lvl="0" marL="0" marR="0" rtl="0" algn="ctr">
+              <a:spcBef>
+                <a:spcPts val="0"/>
+              </a:spcBef>
+              <a:spcAft>
+                <a:spcPts val="0"/>
+              </a:spcAft>
+              <a:buNone/>
+            </a:pPr>
+            <a:r>
+              <a:rPr b="1" i="0" lang="en-US" sz="1300" u="none" cap="none" strike="noStrike">
+                <a:solidFill>
+                  <a:srgbClr val="FFFFFF"/>
+                </a:solidFill>
+                <a:latin typeface="Courier New"/>
+                <a:ea typeface="Courier New"/>
+                <a:cs typeface="Courier New"/>
+                <a:sym typeface="Courier New"/>
+              </a:rPr>
+              <a:t>0</a:t>
+            </a:r>
+            <a:r>
+              <a:rPr b="1" lang="en-US" sz="1300">
+                <a:solidFill>
+                  <a:srgbClr val="FFFFFF"/>
+                </a:solidFill>
+                <a:latin typeface="Courier New"/>
+                <a:ea typeface="Courier New"/>
+                <a:cs typeface="Courier New"/>
+                <a:sym typeface="Courier New"/>
+              </a:rPr>
+              <a:t>7</a:t>
+            </a:r>
+            <a:endParaRPr/>
+          </a:p>
+        </p:txBody>
+      </p:sp>
+      <p:sp>
+        <p:nvSpPr>
+          <p:cNvPr id="3002" name="Shape 3002"/>
+          <p:cNvSpPr txBox="1"/>
+          <p:nvPr/>
+        </p:nvSpPr>
+        <p:spPr>
+          <a:xfrm>
+            <a:off x="1325880" y="5285231"/>
+            <a:ext cx="9875400" cy="261600"/>
+          </a:xfrm>
+          <a:prstGeom prst="rect">
+            <a:avLst/>
+          </a:prstGeom>
+          <a:noFill/>
+          <a:ln>
+            <a:noFill/>
+          </a:ln>
+        </p:spPr>
+        <p:txBody>
+          <a:bodyPr anchorCtr="0" anchor="ctr" bIns="0" lIns="0" spcFirstLastPara="1" rIns="0" wrap="square" tIns="0">
+            <a:spAutoFit/>
+          </a:bodyPr>
+          <a:lstStyle/>
+          <a:p>
+            <a:pPr indent="0" lvl="0" marL="0" marR="0" rtl="0" algn="l">
+              <a:spcBef>
+                <a:spcPts val="0"/>
+              </a:spcBef>
+              <a:spcAft>
+                <a:spcPts val="0"/>
+              </a:spcAft>
+              <a:buNone/>
+            </a:pPr>
+            <a:r>
+              <a:rPr b="0" i="0" lang="en-US" sz="1700" u="none" cap="none" strike="noStrike">
+                <a:solidFill>
+                  <a:srgbClr val="23325D"/>
+                </a:solidFill>
+                <a:latin typeface="Calibri"/>
+                <a:ea typeface="Calibri"/>
+                <a:cs typeface="Calibri"/>
+                <a:sym typeface="Calibri"/>
+              </a:rPr>
+              <a:t>Where HTMX stands in Drupal core today, and how to contribute</a:t>
+            </a:r>
+            <a:endParaRPr/>
+          </a:p>
+        </p:txBody>
+      </p:sp>
+      <p:cxnSp>
+        <p:nvCxnSpPr>
+          <p:cNvPr id="3003" name="Shape 3003"/>
+          <p:cNvCxnSpPr/>
+          <p:nvPr/>
+        </p:nvCxnSpPr>
+        <p:spPr>
+          <a:xfrm>
+            <a:off x="640080" y="5093208"/>
+            <a:ext cx="10515600" cy="0"/>
+          </a:xfrm>
+          <a:prstGeom prst="straightConnector1">
+            <a:avLst/>
+          </a:prstGeom>
+          <a:noFill/>
+          <a:ln cap="flat" cmpd="sng" w="9525">
+            <a:solidFill>
+              <a:srgbClr val="E3E6EC"/>
+            </a:solidFill>
+            <a:prstDash val="solid"/>
+            <a:miter lim="8000"/>
+            <a:headEnd len="sm" w="sm" type="none"/>
+            <a:tailEnd len="sm" w="sm" type="none"/>
+          </a:ln>
+        </p:spPr>
+      </p:cxnSp>
     </p:spTree>
   </p:cSld>
   <p:clrMapOvr>
@@ -23137,7 +27823,7 @@
                 <a:cs typeface="Calibri"/>
                 <a:sym typeface="Calibri"/>
               </a:rPr>
-              <a:t>AjaxResponse extends Response; interactions become a stack of Commands</a:t>
+              <a:t>AjaxResponse extends JsonResponse; interactions become a stack of Commands</a:t>
             </a:r>
             <a:endParaRPr/>
           </a:p>
@@ -23712,7 +28398,7 @@
                 <a:cs typeface="Calibri"/>
                 <a:sym typeface="Calibri"/>
               </a:rPr>
-              <a:t> + Drupal.behaviors interpret those commands client-side</a:t>
+              <a:t> runs each command client-side; Drupal.behaviors re-attach to the new markup</a:t>
             </a:r>
             <a:endParaRPr/>
           </a:p>

--- a/Ajax to HTMX.pptx
+++ b/Ajax to HTMX.pptx
@@ -5551,7 +5551,7 @@
           <a:lstStyle/>
           <a:p>
             <a:r>
-              <a:t>This isn't a someday story. HTMX came into core as a dependency in 11.2 and became fully featured in 11.3, as part of an active initiative to gradually replace the Ajax system. Both APIs are running side by side right now, on purpose, while contrib gets time to convert. And the payoff is measurable: drupal.org reports up to 71% less JavaScript loaded for browser-server interactions.</a:t>
+              <a:t>This isn't a someday story. HTMX came into core as a dependency in 11.2 and became fully featured in 11.3, as part of an active community initiative, Replace AJAX API with HTMX. Both APIs are running side by side right now, on purpose, while contrib gets time to convert. And the payoff is measurable: drupal.org reports up to 71% less JavaScript loaded for browser-server interactions.</a:t>
             </a:r>
           </a:p>
         </p:txBody>
@@ -5667,7 +5667,7 @@
           <a:lstStyle/>
           <a:p>
             <a:r>
-              <a:t>Triage issues, convert a #ajax/Command usage to HTMX and report back, write docs/examples, build real-world case studies like this talk. The core initiative issue queue, the contrib module issue queue, and the #htmx channel on Drupal Slack are where the work happens.</a:t>
+              <a:t>Start at the initiative page on drupal.org: Replace AJAX API with HTMX. From there, the plan issue and its child issues are where core work happens. The contrib module has its own issue queue, and the #htmx channel on Drupal Slack is where the lead collaborators talk almost daily, with coordination meetings every other Thursday, left open for 24 hours so every time zone can join. Entry points: triage issues, convert a #ajax/Command usage to HTMX and report back, write docs/examples, build real-world case studies like this talk.</a:t>
             </a:r>
           </a:p>
         </p:txBody>
@@ -24543,8 +24543,21 @@
                 <a:ea typeface="Calibri"/>
                 <a:cs typeface="Calibri"/>
                 <a:sym typeface="Calibri"/>
-              </a:rPr>
-              <a:t>"Gradually replace Drupal's AJAX system with HTMX" - still active. Both APIs run side by side until contrib has time to convert.</a:t>
+                <a:hlinkClick r:id="rId3"/>
+              </a:rPr>
+              <a:t>"Replace AJAX API with HTMX"</a:t>
+            </a:r>
+            <a:r>
+              <a:rPr b="0" i="0" lang="en-US" sz="1350">
+                <a:solidFill>
+                  <a:srgbClr val="5B6378"/>
+                </a:solidFill>
+                <a:latin typeface="Calibri"/>
+                <a:ea typeface="Calibri"/>
+                <a:cs typeface="Calibri"/>
+                <a:sym typeface="Calibri"/>
+              </a:rPr>
+              <a:t> - an official community initiative, still active. Both APIs run side by side until contrib has time to convert.</a:t>
             </a:r>
             <a:endParaRPr/>
           </a:p>
@@ -25326,8 +25339,46 @@
                 <a:ea typeface="Calibri"/>
                 <a:cs typeface="Calibri"/>
                 <a:sym typeface="Calibri"/>
-              </a:rPr>
-              <a:t>Plan issue + POC issue in the core queue.</a:t>
+                <a:hlinkClick r:id="rId3"/>
+              </a:rPr>
+              <a:t>drupal.org/community-initiatives/replace-ajax-api-with-htmx</a:t>
+            </a:r>
+            <a:r>
+              <a:rPr b="0" i="0" lang="en-US" sz="1350">
+                <a:solidFill>
+                  <a:srgbClr val="5B6378"/>
+                </a:solidFill>
+                <a:latin typeface="Calibri"/>
+                <a:ea typeface="Calibri"/>
+                <a:cs typeface="Calibri"/>
+                <a:sym typeface="Calibri"/>
+              </a:rPr>
+              <a:t> - plus the plan issue </a:t>
+            </a:r>
+            <a:r>
+              <a:rPr b="0" i="0" lang="en-US" sz="1350">
+                <a:solidFill>
+                  <a:srgbClr val="5B6378"/>
+                </a:solidFill>
+                <a:latin typeface="Calibri"/>
+                <a:ea typeface="Calibri"/>
+                <a:cs typeface="Calibri"/>
+                <a:sym typeface="Calibri"/>
+                <a:hlinkClick r:id="rId4"/>
+              </a:rPr>
+              <a:t>#3404409</a:t>
+            </a:r>
+            <a:r>
+              <a:rPr b="0" i="0" lang="en-US" sz="1350">
+                <a:solidFill>
+                  <a:srgbClr val="5B6378"/>
+                </a:solidFill>
+                <a:latin typeface="Calibri"/>
+                <a:ea typeface="Calibri"/>
+                <a:cs typeface="Calibri"/>
+                <a:sym typeface="Calibri"/>
+              </a:rPr>
+              <a:t> and its child issues.</a:t>
             </a:r>
             <a:endParaRPr/>
           </a:p>
@@ -25407,8 +25458,21 @@
                 <a:ea typeface="Calibri"/>
                 <a:cs typeface="Calibri"/>
                 <a:sym typeface="Calibri"/>
-              </a:rPr>
-              <a:t>drupal.org/project/htmx issue queue.</a:t>
+                <a:hlinkClick r:id="rId5"/>
+              </a:rPr>
+              <a:t>drupal.org/project/htmx</a:t>
+            </a:r>
+            <a:r>
+              <a:rPr b="0" i="0" lang="en-US" sz="1350">
+                <a:solidFill>
+                  <a:srgbClr val="5B6378"/>
+                </a:solidFill>
+                <a:latin typeface="Calibri"/>
+                <a:ea typeface="Calibri"/>
+                <a:cs typeface="Calibri"/>
+                <a:sym typeface="Calibri"/>
+              </a:rPr>
+              <a:t> issue queue.</a:t>
             </a:r>
             <a:endParaRPr/>
           </a:p>
@@ -25489,7 +25553,7 @@
                 <a:cs typeface="Calibri"/>
                 <a:sym typeface="Calibri"/>
               </a:rPr>
-              <a:t>#htmx on Drupal Slack.</a:t>
+              <a:t>#htmx on Drupal Slack. Coordination meetings every other Thursday, open for 24 hours.</a:t>
             </a:r>
             <a:endParaRPr/>
           </a:p>
